--- a/media/exports/reports/2025-11/program-cost.pptx
+++ b/media/exports/reports/2025-11/program-cost.pptx
@@ -301,7 +301,9 @@
     <a:lstStyle/>
     <a:p>
       <a:pPr>
-        <a:defRPr sz="1800"/>
+        <a:defRPr sz="1800">
+          <a:latin typeface="Roboto"/>
+        </a:defRPr>
       </a:pPr>
       <a:endParaRPr lang="en-US"/>
     </a:p>
@@ -497,7 +499,9 @@
     <a:lstStyle/>
     <a:p>
       <a:pPr>
-        <a:defRPr sz="1800"/>
+        <a:defRPr sz="1800">
+          <a:latin typeface="Roboto"/>
+        </a:defRPr>
       </a:pPr>
       <a:endParaRPr lang="en-US"/>
     </a:p>
@@ -733,7 +737,9 @@
     <a:lstStyle/>
     <a:p>
       <a:pPr>
-        <a:defRPr sz="1800"/>
+        <a:defRPr sz="1800">
+          <a:latin typeface="Roboto"/>
+        </a:defRPr>
       </a:pPr>
       <a:endParaRPr/>
     </a:p>
@@ -3764,11 +3770,17 @@
           <a:bodyPr rtlCol="0" anchor="ctr"/>
           <a:lstStyle/>
           <a:p>
+            <a:pPr>
+              <a:defRPr>
+                <a:latin typeface="Roboto"/>
+              </a:defRPr>
+            </a:pPr>
             <a:r>
               <a:rPr sz="1600" b="1">
                 <a:solidFill>
                   <a:srgbClr val="FFFFFF"/>
                 </a:solidFill>
+                <a:latin typeface="Roboto"/>
               </a:rPr>
               <a:t>4th</a:t>
             </a:r>
@@ -3797,14 +3809,19 @@
           </a:bodyPr>
           <a:lstStyle/>
           <a:p>
+            <a:pPr>
+              <a:defRPr>
+                <a:latin typeface="Roboto"/>
+              </a:defRPr>
+            </a:pPr>
             <a:r>
               <a:rPr sz="1800" b="1">
                 <a:solidFill>
                   <a:srgbClr val="25342A"/>
                 </a:solidFill>
-                <a:latin typeface="Arial"/>
+                <a:latin typeface="Roboto"/>
               </a:rPr>
-              <a:t>The 4th Sheet</a:t>
+              <a:t>The Fourth Sheet</a:t>
             </a:r>
           </a:p>
         </p:txBody>
@@ -3831,12 +3848,17 @@
           </a:bodyPr>
           <a:lstStyle/>
           <a:p>
+            <a:pPr>
+              <a:defRPr>
+                <a:latin typeface="Roboto"/>
+              </a:defRPr>
+            </a:pPr>
             <a:r>
               <a:rPr sz="1100" b="1">
                 <a:solidFill>
                   <a:srgbClr val="8A7A52"/>
                 </a:solidFill>
-                <a:latin typeface="Arial"/>
+                <a:latin typeface="Roboto"/>
               </a:rPr>
               <a:t>SAMPLE DATA · invented figures for demonstration</a:t>
             </a:r>
@@ -3865,12 +3887,17 @@
           </a:bodyPr>
           <a:lstStyle/>
           <a:p>
+            <a:pPr>
+              <a:defRPr>
+                <a:latin typeface="Roboto"/>
+              </a:defRPr>
+            </a:pPr>
             <a:r>
               <a:rPr sz="3400" b="1">
                 <a:solidFill>
                   <a:srgbClr val="25342A"/>
                 </a:solidFill>
-                <a:latin typeface="Arial"/>
+                <a:latin typeface="Roboto"/>
               </a:rPr>
               <a:t>What does each program really cost?</a:t>
             </a:r>
@@ -3899,12 +3926,17 @@
           </a:bodyPr>
           <a:lstStyle/>
           <a:p>
+            <a:pPr>
+              <a:defRPr>
+                <a:latin typeface="Roboto"/>
+              </a:defRPr>
+            </a:pPr>
             <a:r>
               <a:rPr sz="1600" b="0">
                 <a:solidFill>
                   <a:srgbClr val="5F6F63"/>
                 </a:solidFill>
-                <a:latin typeface="Arial"/>
+                <a:latin typeface="Roboto"/>
               </a:rPr>
               <a:t>Sample Community Services Ltd</a:t>
             </a:r>
@@ -3933,12 +3965,17 @@
           </a:bodyPr>
           <a:lstStyle/>
           <a:p>
+            <a:pPr>
+              <a:defRPr>
+                <a:latin typeface="Roboto"/>
+              </a:defRPr>
+            </a:pPr>
             <a:r>
               <a:rPr sz="1400" b="0">
                 <a:solidFill>
                   <a:srgbClr val="25342A"/>
                 </a:solidFill>
-                <a:latin typeface="Arial"/>
+                <a:latin typeface="Roboto"/>
               </a:rPr>
               <a:t>Period: November 2025. Each program's full cost: what its grant pays for, plus its fair share of the costs no single grant covers (untied program costs and administration, shared by grant spending). Pick a program and every chart and note follows it.</a:t>
             </a:r>
@@ -3967,45 +4004,65 @@
           </a:bodyPr>
           <a:lstStyle/>
           <a:p>
+            <a:pPr>
+              <a:defRPr>
+                <a:latin typeface="Roboto"/>
+              </a:defRPr>
+            </a:pPr>
             <a:r>
               <a:rPr sz="1100" b="0">
                 <a:solidFill>
                   <a:srgbClr val="5F6F63"/>
                 </a:solidFill>
-                <a:latin typeface="Arial"/>
+                <a:latin typeface="Roboto"/>
               </a:rPr>
               <a:t>How final is this data?</a:t>
             </a:r>
           </a:p>
           <a:p>
+            <a:pPr>
+              <a:defRPr>
+                <a:latin typeface="Roboto"/>
+              </a:defRPr>
+            </a:pPr>
             <a:r>
               <a:rPr sz="1100" b="0">
                 <a:solidFill>
                   <a:srgbClr val="5F6F63"/>
                 </a:solidFill>
-                <a:latin typeface="Arial"/>
+                <a:latin typeface="Roboto"/>
               </a:rPr>
               <a:t>October 2025: Locked. October 2025 is locked (closed 4 Nov 2025). These numbers won't change.</a:t>
             </a:r>
           </a:p>
           <a:p>
+            <a:pPr>
+              <a:defRPr>
+                <a:latin typeface="Roboto"/>
+              </a:defRPr>
+            </a:pPr>
             <a:r>
               <a:rPr sz="1100" b="0">
                 <a:solidFill>
                   <a:srgbClr val="5F6F63"/>
                 </a:solidFill>
-                <a:latin typeface="Arial"/>
+                <a:latin typeface="Roboto"/>
               </a:rPr>
               <a:t>November 2025: Locked. November 2025 is locked (closed 2 Dec 2025). These numbers won't change.</a:t>
             </a:r>
           </a:p>
           <a:p>
+            <a:pPr>
+              <a:defRPr>
+                <a:latin typeface="Roboto"/>
+              </a:defRPr>
+            </a:pPr>
             <a:r>
               <a:rPr sz="1100" b="0">
                 <a:solidFill>
                   <a:srgbClr val="5F6F63"/>
                 </a:solidFill>
-                <a:latin typeface="Arial"/>
+                <a:latin typeface="Roboto"/>
               </a:rPr>
               <a:t>October 2026: Incomplete. October 2026 is still in progress: figures to 6 Oct only.</a:t>
             </a:r>
@@ -4034,12 +4091,17 @@
           </a:bodyPr>
           <a:lstStyle/>
           <a:p>
+            <a:pPr>
+              <a:defRPr>
+                <a:latin typeface="Roboto"/>
+              </a:defRPr>
+            </a:pPr>
             <a:r>
               <a:rPr sz="900" b="0">
                 <a:solidFill>
                   <a:srgbClr val="5F6F63"/>
                 </a:solidFill>
-                <a:latin typeface="Arial"/>
+                <a:latin typeface="Roboto"/>
               </a:rPr>
               <a:t>program-cost.pptx</a:t>
             </a:r>
@@ -4068,13 +4130,17 @@
           </a:bodyPr>
           <a:lstStyle/>
           <a:p>
-            <a:pPr algn="ctr"/>
+            <a:pPr algn="ctr">
+              <a:defRPr>
+                <a:latin typeface="Roboto"/>
+              </a:defRPr>
+            </a:pPr>
             <a:r>
               <a:rPr sz="900" b="0">
                 <a:solidFill>
                   <a:srgbClr val="5F6F63"/>
                 </a:solidFill>
-                <a:latin typeface="Arial"/>
+                <a:latin typeface="Roboto"/>
               </a:rPr>
               <a:t>Data retrieved 2pm, Tue 6 Oct 2026 · Sample data</a:t>
             </a:r>
@@ -4103,13 +4169,17 @@
           </a:bodyPr>
           <a:lstStyle/>
           <a:p>
-            <a:pPr algn="r"/>
+            <a:pPr algn="r">
+              <a:defRPr>
+                <a:latin typeface="Roboto"/>
+              </a:defRPr>
+            </a:pPr>
             <a:r>
               <a:rPr sz="900" b="0">
                 <a:solidFill>
                   <a:srgbClr val="5F6F63"/>
                 </a:solidFill>
-                <a:latin typeface="Arial"/>
+                <a:latin typeface="Roboto"/>
               </a:rPr>
               <a:t>Slide 1 of 10</a:t>
             </a:r>
@@ -4173,7 +4243,11 @@
           <a:bodyPr rtlCol="0" anchor="ctr"/>
           <a:lstStyle/>
           <a:p>
-            <a:pPr algn="ctr"/>
+            <a:pPr algn="ctr">
+              <a:defRPr>
+                <a:latin typeface="Roboto"/>
+              </a:defRPr>
+            </a:pPr>
           </a:p>
         </p:txBody>
       </p:sp>
@@ -4199,12 +4273,17 @@
           </a:bodyPr>
           <a:lstStyle/>
           <a:p>
+            <a:pPr>
+              <a:defRPr>
+                <a:latin typeface="Roboto"/>
+              </a:defRPr>
+            </a:pPr>
             <a:r>
               <a:rPr sz="1000" b="0">
                 <a:solidFill>
                   <a:srgbClr val="5F6F63"/>
                 </a:solidFill>
-                <a:latin typeface="Arial"/>
+                <a:latin typeface="Roboto"/>
               </a:rPr>
               <a:t>Sample Community Services Ltd · What does each program really cost?</a:t>
             </a:r>
@@ -4233,12 +4312,17 @@
           </a:bodyPr>
           <a:lstStyle/>
           <a:p>
+            <a:pPr>
+              <a:defRPr>
+                <a:latin typeface="Roboto"/>
+              </a:defRPr>
+            </a:pPr>
             <a:r>
               <a:rPr sz="2400" b="1">
                 <a:solidFill>
                   <a:srgbClr val="25342A"/>
                 </a:solidFill>
-                <a:latin typeface="Arial"/>
+                <a:latin typeface="Roboto"/>
               </a:rPr>
               <a:t>Grant spending, by month · Spend $ · Every program at once</a:t>
             </a:r>
@@ -4267,12 +4351,17 @@
           </a:bodyPr>
           <a:lstStyle/>
           <a:p>
+            <a:pPr>
+              <a:defRPr>
+                <a:latin typeface="Roboto"/>
+              </a:defRPr>
+            </a:pPr>
             <a:r>
               <a:rPr sz="1200" b="0">
                 <a:solidFill>
                   <a:srgbClr val="5F6F63"/>
                 </a:solidFill>
-                <a:latin typeface="Arial"/>
+                <a:latin typeface="Roboto"/>
               </a:rPr>
               <a:t>Grant spending only (the program's direct cost). All programs includes grants that have finished.</a:t>
             </a:r>
@@ -4319,12 +4408,17 @@
           </a:bodyPr>
           <a:lstStyle/>
           <a:p>
+            <a:pPr>
+              <a:defRPr>
+                <a:latin typeface="Roboto"/>
+              </a:defRPr>
+            </a:pPr>
             <a:r>
               <a:rPr sz="900" b="0">
                 <a:solidFill>
                   <a:srgbClr val="5F6F63"/>
                 </a:solidFill>
-                <a:latin typeface="Arial"/>
+                <a:latin typeface="Roboto"/>
               </a:rPr>
               <a:t>program-cost.pptx</a:t>
             </a:r>
@@ -4353,13 +4447,17 @@
           </a:bodyPr>
           <a:lstStyle/>
           <a:p>
-            <a:pPr algn="ctr"/>
+            <a:pPr algn="ctr">
+              <a:defRPr>
+                <a:latin typeface="Roboto"/>
+              </a:defRPr>
+            </a:pPr>
             <a:r>
               <a:rPr sz="900" b="0">
                 <a:solidFill>
                   <a:srgbClr val="5F6F63"/>
                 </a:solidFill>
-                <a:latin typeface="Arial"/>
+                <a:latin typeface="Roboto"/>
               </a:rPr>
               <a:t>Data retrieved 2pm, Tue 6 Oct 2026 · Sample data</a:t>
             </a:r>
@@ -4388,13 +4486,17 @@
           </a:bodyPr>
           <a:lstStyle/>
           <a:p>
-            <a:pPr algn="r"/>
+            <a:pPr algn="r">
+              <a:defRPr>
+                <a:latin typeface="Roboto"/>
+              </a:defRPr>
+            </a:pPr>
             <a:r>
               <a:rPr sz="900" b="0">
                 <a:solidFill>
                   <a:srgbClr val="5F6F63"/>
                 </a:solidFill>
-                <a:latin typeface="Arial"/>
+                <a:latin typeface="Roboto"/>
               </a:rPr>
               <a:t>Slide 10 of 10</a:t>
             </a:r>
@@ -4458,7 +4560,11 @@
           <a:bodyPr rtlCol="0" anchor="ctr"/>
           <a:lstStyle/>
           <a:p>
-            <a:pPr algn="ctr"/>
+            <a:pPr algn="ctr">
+              <a:defRPr>
+                <a:latin typeface="Roboto"/>
+              </a:defRPr>
+            </a:pPr>
           </a:p>
         </p:txBody>
       </p:sp>
@@ -4484,12 +4590,17 @@
           </a:bodyPr>
           <a:lstStyle/>
           <a:p>
+            <a:pPr>
+              <a:defRPr>
+                <a:latin typeface="Roboto"/>
+              </a:defRPr>
+            </a:pPr>
             <a:r>
               <a:rPr sz="1000" b="0">
                 <a:solidFill>
                   <a:srgbClr val="5F6F63"/>
                 </a:solidFill>
-                <a:latin typeface="Arial"/>
+                <a:latin typeface="Roboto"/>
               </a:rPr>
               <a:t>Sample Community Services Ltd · What does each program really cost?</a:t>
             </a:r>
@@ -4518,12 +4629,17 @@
           </a:bodyPr>
           <a:lstStyle/>
           <a:p>
+            <a:pPr>
+              <a:defRPr>
+                <a:latin typeface="Roboto"/>
+              </a:defRPr>
+            </a:pPr>
             <a:r>
               <a:rPr sz="2400" b="1">
                 <a:solidFill>
                   <a:srgbClr val="25342A"/>
                 </a:solidFill>
-                <a:latin typeface="Arial"/>
+                <a:latin typeface="Roboto"/>
               </a:rPr>
               <a:t>Full cost of each program, November 2025 · $ · Program: All programs</a:t>
             </a:r>
@@ -4570,12 +4686,17 @@
           </a:bodyPr>
           <a:lstStyle/>
           <a:p>
+            <a:pPr>
+              <a:defRPr>
+                <a:latin typeface="Roboto"/>
+              </a:defRPr>
+            </a:pPr>
             <a:r>
               <a:rPr sz="900" b="0">
                 <a:solidFill>
                   <a:srgbClr val="5F6F63"/>
                 </a:solidFill>
-                <a:latin typeface="Arial"/>
+                <a:latin typeface="Roboto"/>
               </a:rPr>
               <a:t>program-cost.pptx</a:t>
             </a:r>
@@ -4604,13 +4725,17 @@
           </a:bodyPr>
           <a:lstStyle/>
           <a:p>
-            <a:pPr algn="ctr"/>
+            <a:pPr algn="ctr">
+              <a:defRPr>
+                <a:latin typeface="Roboto"/>
+              </a:defRPr>
+            </a:pPr>
             <a:r>
               <a:rPr sz="900" b="0">
                 <a:solidFill>
                   <a:srgbClr val="5F6F63"/>
                 </a:solidFill>
-                <a:latin typeface="Arial"/>
+                <a:latin typeface="Roboto"/>
               </a:rPr>
               <a:t>Data retrieved 2pm, Tue 6 Oct 2026 · Sample data</a:t>
             </a:r>
@@ -4639,13 +4764,17 @@
           </a:bodyPr>
           <a:lstStyle/>
           <a:p>
-            <a:pPr algn="r"/>
+            <a:pPr algn="r">
+              <a:defRPr>
+                <a:latin typeface="Roboto"/>
+              </a:defRPr>
+            </a:pPr>
             <a:r>
               <a:rPr sz="900" b="0">
                 <a:solidFill>
                   <a:srgbClr val="5F6F63"/>
                 </a:solidFill>
-                <a:latin typeface="Arial"/>
+                <a:latin typeface="Roboto"/>
               </a:rPr>
               <a:t>Slide 2 of 10</a:t>
             </a:r>
@@ -4709,7 +4838,11 @@
           <a:bodyPr rtlCol="0" anchor="ctr"/>
           <a:lstStyle/>
           <a:p>
-            <a:pPr algn="ctr"/>
+            <a:pPr algn="ctr">
+              <a:defRPr>
+                <a:latin typeface="Roboto"/>
+              </a:defRPr>
+            </a:pPr>
           </a:p>
         </p:txBody>
       </p:sp>
@@ -4735,12 +4868,17 @@
           </a:bodyPr>
           <a:lstStyle/>
           <a:p>
+            <a:pPr>
+              <a:defRPr>
+                <a:latin typeface="Roboto"/>
+              </a:defRPr>
+            </a:pPr>
             <a:r>
               <a:rPr sz="1000" b="0">
                 <a:solidFill>
                   <a:srgbClr val="5F6F63"/>
                 </a:solidFill>
-                <a:latin typeface="Arial"/>
+                <a:latin typeface="Roboto"/>
               </a:rPr>
               <a:t>Sample Community Services Ltd · What does each program really cost?</a:t>
             </a:r>
@@ -4769,12 +4907,17 @@
           </a:bodyPr>
           <a:lstStyle/>
           <a:p>
+            <a:pPr>
+              <a:defRPr>
+                <a:latin typeface="Roboto"/>
+              </a:defRPr>
+            </a:pPr>
             <a:r>
               <a:rPr sz="2400" b="1">
                 <a:solidFill>
                   <a:srgbClr val="25342A"/>
                 </a:solidFill>
-                <a:latin typeface="Arial"/>
+                <a:latin typeface="Roboto"/>
               </a:rPr>
               <a:t>Full cost of each program, November 2025 · % of total · Program: All programs</a:t>
             </a:r>
@@ -4821,12 +4964,17 @@
           </a:bodyPr>
           <a:lstStyle/>
           <a:p>
+            <a:pPr>
+              <a:defRPr>
+                <a:latin typeface="Roboto"/>
+              </a:defRPr>
+            </a:pPr>
             <a:r>
               <a:rPr sz="900" b="0">
                 <a:solidFill>
                   <a:srgbClr val="5F6F63"/>
                 </a:solidFill>
-                <a:latin typeface="Arial"/>
+                <a:latin typeface="Roboto"/>
               </a:rPr>
               <a:t>program-cost.pptx</a:t>
             </a:r>
@@ -4855,13 +5003,17 @@
           </a:bodyPr>
           <a:lstStyle/>
           <a:p>
-            <a:pPr algn="ctr"/>
+            <a:pPr algn="ctr">
+              <a:defRPr>
+                <a:latin typeface="Roboto"/>
+              </a:defRPr>
+            </a:pPr>
             <a:r>
               <a:rPr sz="900" b="0">
                 <a:solidFill>
                   <a:srgbClr val="5F6F63"/>
                 </a:solidFill>
-                <a:latin typeface="Arial"/>
+                <a:latin typeface="Roboto"/>
               </a:rPr>
               <a:t>Data retrieved 2pm, Tue 6 Oct 2026 · Sample data</a:t>
             </a:r>
@@ -4890,13 +5042,17 @@
           </a:bodyPr>
           <a:lstStyle/>
           <a:p>
-            <a:pPr algn="r"/>
+            <a:pPr algn="r">
+              <a:defRPr>
+                <a:latin typeface="Roboto"/>
+              </a:defRPr>
+            </a:pPr>
             <a:r>
               <a:rPr sz="900" b="0">
                 <a:solidFill>
                   <a:srgbClr val="5F6F63"/>
                 </a:solidFill>
-                <a:latin typeface="Arial"/>
+                <a:latin typeface="Roboto"/>
               </a:rPr>
               <a:t>Slide 3 of 10</a:t>
             </a:r>
@@ -4960,7 +5116,11 @@
           <a:bodyPr rtlCol="0" anchor="ctr"/>
           <a:lstStyle/>
           <a:p>
-            <a:pPr algn="ctr"/>
+            <a:pPr algn="ctr">
+              <a:defRPr>
+                <a:latin typeface="Roboto"/>
+              </a:defRPr>
+            </a:pPr>
           </a:p>
         </p:txBody>
       </p:sp>
@@ -4986,12 +5146,17 @@
           </a:bodyPr>
           <a:lstStyle/>
           <a:p>
+            <a:pPr>
+              <a:defRPr>
+                <a:latin typeface="Roboto"/>
+              </a:defRPr>
+            </a:pPr>
             <a:r>
               <a:rPr sz="1000" b="0">
                 <a:solidFill>
                   <a:srgbClr val="5F6F63"/>
                 </a:solidFill>
-                <a:latin typeface="Arial"/>
+                <a:latin typeface="Roboto"/>
               </a:rPr>
               <a:t>Sample Community Services Ltd · What does each program really cost?</a:t>
             </a:r>
@@ -5020,12 +5185,17 @@
           </a:bodyPr>
           <a:lstStyle/>
           <a:p>
+            <a:pPr>
+              <a:defRPr>
+                <a:latin typeface="Roboto"/>
+              </a:defRPr>
+            </a:pPr>
             <a:r>
               <a:rPr sz="2400" b="1">
                 <a:solidFill>
                   <a:srgbClr val="25342A"/>
                 </a:solidFill>
-                <a:latin typeface="Arial"/>
+                <a:latin typeface="Roboto"/>
               </a:rPr>
               <a:t>What it shows · Program: All programs</a:t>
             </a:r>
@@ -5073,7 +5243,11 @@
           <a:bodyPr rtlCol="0" anchor="ctr"/>
           <a:lstStyle/>
           <a:p>
-            <a:pPr algn="ctr"/>
+            <a:pPr algn="ctr">
+              <a:defRPr>
+                <a:latin typeface="Roboto"/>
+              </a:defRPr>
+            </a:pPr>
           </a:p>
         </p:txBody>
       </p:sp>
@@ -5099,12 +5273,17 @@
           </a:bodyPr>
           <a:lstStyle/>
           <a:p>
+            <a:pPr>
+              <a:defRPr>
+                <a:latin typeface="Roboto"/>
+              </a:defRPr>
+            </a:pPr>
             <a:r>
               <a:rPr sz="1100" b="1">
                 <a:solidFill>
                   <a:srgbClr val="5F6F63"/>
                 </a:solidFill>
-                <a:latin typeface="Arial"/>
+                <a:latin typeface="Roboto"/>
               </a:rPr>
               <a:t>WHAT IT SHOWS</a:t>
             </a:r>
@@ -5133,12 +5312,17 @@
           </a:bodyPr>
           <a:lstStyle/>
           <a:p>
+            <a:pPr>
+              <a:defRPr>
+                <a:latin typeface="Roboto"/>
+              </a:defRPr>
+            </a:pPr>
             <a:r>
               <a:rPr sz="1600" b="0">
                 <a:solidFill>
                   <a:srgbClr val="25342A"/>
                 </a:solidFill>
-                <a:latin typeface="Arial"/>
+                <a:latin typeface="Roboto"/>
               </a:rPr>
               <a:t>Housing support (2025) is the biggest program: $52,362 in November once its share of untied program costs and administration is added to $30,000 of grant spending. Shared costs add 74.5% on top of grant spending across all programs.</a:t>
             </a:r>
@@ -5186,7 +5370,11 @@
           <a:bodyPr rtlCol="0" anchor="ctr"/>
           <a:lstStyle/>
           <a:p>
-            <a:pPr algn="ctr"/>
+            <a:pPr algn="ctr">
+              <a:defRPr>
+                <a:latin typeface="Roboto"/>
+              </a:defRPr>
+            </a:pPr>
           </a:p>
         </p:txBody>
       </p:sp>
@@ -5212,12 +5400,17 @@
           </a:bodyPr>
           <a:lstStyle/>
           <a:p>
+            <a:pPr>
+              <a:defRPr>
+                <a:latin typeface="Roboto"/>
+              </a:defRPr>
+            </a:pPr>
             <a:r>
               <a:rPr sz="1100" b="1">
                 <a:solidFill>
                   <a:srgbClr val="5F6F63"/>
                 </a:solidFill>
-                <a:latin typeface="Arial"/>
+                <a:latin typeface="Roboto"/>
               </a:rPr>
               <a:t>WHAT YOU'D DO ABOUT IT</a:t>
             </a:r>
@@ -5246,12 +5439,17 @@
           </a:bodyPr>
           <a:lstStyle/>
           <a:p>
+            <a:pPr>
+              <a:defRPr>
+                <a:latin typeface="Roboto"/>
+              </a:defRPr>
+            </a:pPr>
             <a:r>
               <a:rPr sz="1600" b="0">
                 <a:solidFill>
                   <a:srgbClr val="25342A"/>
                 </a:solidFill>
-                <a:latin typeface="Arial"/>
+                <a:latin typeface="Roboto"/>
               </a:rPr>
               <a:t>The full cost (not just the grant line) is the number for renewal applications, where the funder lets you recover a share of overheads. Pick a program above to see it on its own.</a:t>
             </a:r>
@@ -5280,12 +5478,17 @@
           </a:bodyPr>
           <a:lstStyle/>
           <a:p>
+            <a:pPr>
+              <a:defRPr>
+                <a:latin typeface="Roboto"/>
+              </a:defRPr>
+            </a:pPr>
             <a:r>
               <a:rPr sz="900" b="0">
                 <a:solidFill>
                   <a:srgbClr val="5F6F63"/>
                 </a:solidFill>
-                <a:latin typeface="Arial"/>
+                <a:latin typeface="Roboto"/>
               </a:rPr>
               <a:t>program-cost.pptx</a:t>
             </a:r>
@@ -5314,13 +5517,17 @@
           </a:bodyPr>
           <a:lstStyle/>
           <a:p>
-            <a:pPr algn="ctr"/>
+            <a:pPr algn="ctr">
+              <a:defRPr>
+                <a:latin typeface="Roboto"/>
+              </a:defRPr>
+            </a:pPr>
             <a:r>
               <a:rPr sz="900" b="0">
                 <a:solidFill>
                   <a:srgbClr val="5F6F63"/>
                 </a:solidFill>
-                <a:latin typeface="Arial"/>
+                <a:latin typeface="Roboto"/>
               </a:rPr>
               <a:t>Data retrieved 2pm, Tue 6 Oct 2026 · Sample data</a:t>
             </a:r>
@@ -5349,13 +5556,17 @@
           </a:bodyPr>
           <a:lstStyle/>
           <a:p>
-            <a:pPr algn="r"/>
+            <a:pPr algn="r">
+              <a:defRPr>
+                <a:latin typeface="Roboto"/>
+              </a:defRPr>
+            </a:pPr>
             <a:r>
               <a:rPr sz="900" b="0">
                 <a:solidFill>
                   <a:srgbClr val="5F6F63"/>
                 </a:solidFill>
-                <a:latin typeface="Arial"/>
+                <a:latin typeface="Roboto"/>
               </a:rPr>
               <a:t>Slide 4 of 10</a:t>
             </a:r>
@@ -5419,7 +5630,11 @@
           <a:bodyPr rtlCol="0" anchor="ctr"/>
           <a:lstStyle/>
           <a:p>
-            <a:pPr algn="ctr"/>
+            <a:pPr algn="ctr">
+              <a:defRPr>
+                <a:latin typeface="Roboto"/>
+              </a:defRPr>
+            </a:pPr>
           </a:p>
         </p:txBody>
       </p:sp>
@@ -5445,12 +5660,17 @@
           </a:bodyPr>
           <a:lstStyle/>
           <a:p>
+            <a:pPr>
+              <a:defRPr>
+                <a:latin typeface="Roboto"/>
+              </a:defRPr>
+            </a:pPr>
             <a:r>
               <a:rPr sz="1000" b="0">
                 <a:solidFill>
                   <a:srgbClr val="5F6F63"/>
                 </a:solidFill>
-                <a:latin typeface="Arial"/>
+                <a:latin typeface="Roboto"/>
               </a:rPr>
               <a:t>Sample Community Services Ltd · What does each program really cost?</a:t>
             </a:r>
@@ -5479,12 +5699,17 @@
           </a:bodyPr>
           <a:lstStyle/>
           <a:p>
+            <a:pPr>
+              <a:defRPr>
+                <a:latin typeface="Roboto"/>
+              </a:defRPr>
+            </a:pPr>
             <a:r>
               <a:rPr sz="2400" b="1">
                 <a:solidFill>
                   <a:srgbClr val="25342A"/>
                 </a:solidFill>
-                <a:latin typeface="Arial"/>
+                <a:latin typeface="Roboto"/>
               </a:rPr>
               <a:t>What it shows · Program: Housing support (2025)</a:t>
             </a:r>
@@ -5532,7 +5757,11 @@
           <a:bodyPr rtlCol="0" anchor="ctr"/>
           <a:lstStyle/>
           <a:p>
-            <a:pPr algn="ctr"/>
+            <a:pPr algn="ctr">
+              <a:defRPr>
+                <a:latin typeface="Roboto"/>
+              </a:defRPr>
+            </a:pPr>
           </a:p>
         </p:txBody>
       </p:sp>
@@ -5558,12 +5787,17 @@
           </a:bodyPr>
           <a:lstStyle/>
           <a:p>
+            <a:pPr>
+              <a:defRPr>
+                <a:latin typeface="Roboto"/>
+              </a:defRPr>
+            </a:pPr>
             <a:r>
               <a:rPr sz="1100" b="1">
                 <a:solidFill>
                   <a:srgbClr val="5F6F63"/>
                 </a:solidFill>
-                <a:latin typeface="Arial"/>
+                <a:latin typeface="Roboto"/>
               </a:rPr>
               <a:t>WHAT IT SHOWS</a:t>
             </a:r>
@@ -5592,12 +5826,17 @@
           </a:bodyPr>
           <a:lstStyle/>
           <a:p>
+            <a:pPr>
+              <a:defRPr>
+                <a:latin typeface="Roboto"/>
+              </a:defRPr>
+            </a:pPr>
             <a:r>
               <a:rPr sz="1600" b="0">
                 <a:solidFill>
                   <a:srgbClr val="25342A"/>
                 </a:solidFill>
-                <a:latin typeface="Arial"/>
+                <a:latin typeface="Roboto"/>
               </a:rPr>
               <a:t>Housing support (2025) cost $52,362 in full in November: $30,000 paid by the State Housing Program grant, and $22,362 of shared costs no grant covers. It has spent 99.6% of its budget to date, with $29,100 left and 1 months to go.</a:t>
             </a:r>
@@ -5645,7 +5884,11 @@
           <a:bodyPr rtlCol="0" anchor="ctr"/>
           <a:lstStyle/>
           <a:p>
-            <a:pPr algn="ctr"/>
+            <a:pPr algn="ctr">
+              <a:defRPr>
+                <a:latin typeface="Roboto"/>
+              </a:defRPr>
+            </a:pPr>
           </a:p>
         </p:txBody>
       </p:sp>
@@ -5671,12 +5914,17 @@
           </a:bodyPr>
           <a:lstStyle/>
           <a:p>
+            <a:pPr>
+              <a:defRPr>
+                <a:latin typeface="Roboto"/>
+              </a:defRPr>
+            </a:pPr>
             <a:r>
               <a:rPr sz="1100" b="1">
                 <a:solidFill>
                   <a:srgbClr val="5F6F63"/>
                 </a:solidFill>
-                <a:latin typeface="Arial"/>
+                <a:latin typeface="Roboto"/>
               </a:rPr>
               <a:t>WHAT YOU'D DO ABOUT IT</a:t>
             </a:r>
@@ -5705,12 +5953,17 @@
           </a:bodyPr>
           <a:lstStyle/>
           <a:p>
+            <a:pPr>
+              <a:defRPr>
+                <a:latin typeface="Roboto"/>
+              </a:defRPr>
+            </a:pPr>
             <a:r>
               <a:rPr sz="1600" b="0">
                 <a:solidFill>
                   <a:srgbClr val="25342A"/>
                 </a:solidFill>
-                <a:latin typeface="Arial"/>
+                <a:latin typeface="Roboto"/>
               </a:rPr>
               <a:t>The full cost is $52,362 a month; $22,362 of it is shared cost the grant doesn't pay for. Worth asking for as much of it as the funder allows at renewal.</a:t>
             </a:r>
@@ -5739,12 +5992,17 @@
           </a:bodyPr>
           <a:lstStyle/>
           <a:p>
+            <a:pPr>
+              <a:defRPr>
+                <a:latin typeface="Roboto"/>
+              </a:defRPr>
+            </a:pPr>
             <a:r>
               <a:rPr sz="900" b="0">
                 <a:solidFill>
                   <a:srgbClr val="5F6F63"/>
                 </a:solidFill>
-                <a:latin typeface="Arial"/>
+                <a:latin typeface="Roboto"/>
               </a:rPr>
               <a:t>program-cost.pptx</a:t>
             </a:r>
@@ -5773,13 +6031,17 @@
           </a:bodyPr>
           <a:lstStyle/>
           <a:p>
-            <a:pPr algn="ctr"/>
+            <a:pPr algn="ctr">
+              <a:defRPr>
+                <a:latin typeface="Roboto"/>
+              </a:defRPr>
+            </a:pPr>
             <a:r>
               <a:rPr sz="900" b="0">
                 <a:solidFill>
                   <a:srgbClr val="5F6F63"/>
                 </a:solidFill>
-                <a:latin typeface="Arial"/>
+                <a:latin typeface="Roboto"/>
               </a:rPr>
               <a:t>Data retrieved 2pm, Tue 6 Oct 2026 · Sample data</a:t>
             </a:r>
@@ -5808,13 +6070,17 @@
           </a:bodyPr>
           <a:lstStyle/>
           <a:p>
-            <a:pPr algn="r"/>
+            <a:pPr algn="r">
+              <a:defRPr>
+                <a:latin typeface="Roboto"/>
+              </a:defRPr>
+            </a:pPr>
             <a:r>
               <a:rPr sz="900" b="0">
                 <a:solidFill>
                   <a:srgbClr val="5F6F63"/>
                 </a:solidFill>
-                <a:latin typeface="Arial"/>
+                <a:latin typeface="Roboto"/>
               </a:rPr>
               <a:t>Slide 5 of 10</a:t>
             </a:r>
@@ -5878,7 +6144,11 @@
           <a:bodyPr rtlCol="0" anchor="ctr"/>
           <a:lstStyle/>
           <a:p>
-            <a:pPr algn="ctr"/>
+            <a:pPr algn="ctr">
+              <a:defRPr>
+                <a:latin typeface="Roboto"/>
+              </a:defRPr>
+            </a:pPr>
           </a:p>
         </p:txBody>
       </p:sp>
@@ -5904,12 +6174,17 @@
           </a:bodyPr>
           <a:lstStyle/>
           <a:p>
+            <a:pPr>
+              <a:defRPr>
+                <a:latin typeface="Roboto"/>
+              </a:defRPr>
+            </a:pPr>
             <a:r>
               <a:rPr sz="1000" b="0">
                 <a:solidFill>
                   <a:srgbClr val="5F6F63"/>
                 </a:solidFill>
-                <a:latin typeface="Arial"/>
+                <a:latin typeface="Roboto"/>
               </a:rPr>
               <a:t>Sample Community Services Ltd · What does each program really cost?</a:t>
             </a:r>
@@ -5938,12 +6213,17 @@
           </a:bodyPr>
           <a:lstStyle/>
           <a:p>
+            <a:pPr>
+              <a:defRPr>
+                <a:latin typeface="Roboto"/>
+              </a:defRPr>
+            </a:pPr>
             <a:r>
               <a:rPr sz="2400" b="1">
                 <a:solidFill>
                   <a:srgbClr val="25342A"/>
                 </a:solidFill>
-                <a:latin typeface="Arial"/>
+                <a:latin typeface="Roboto"/>
               </a:rPr>
               <a:t>What it shows · Program: Youth outreach</a:t>
             </a:r>
@@ -5991,7 +6271,11 @@
           <a:bodyPr rtlCol="0" anchor="ctr"/>
           <a:lstStyle/>
           <a:p>
-            <a:pPr algn="ctr"/>
+            <a:pPr algn="ctr">
+              <a:defRPr>
+                <a:latin typeface="Roboto"/>
+              </a:defRPr>
+            </a:pPr>
           </a:p>
         </p:txBody>
       </p:sp>
@@ -6017,12 +6301,17 @@
           </a:bodyPr>
           <a:lstStyle/>
           <a:p>
+            <a:pPr>
+              <a:defRPr>
+                <a:latin typeface="Roboto"/>
+              </a:defRPr>
+            </a:pPr>
             <a:r>
               <a:rPr sz="1100" b="1">
                 <a:solidFill>
                   <a:srgbClr val="5F6F63"/>
                 </a:solidFill>
-                <a:latin typeface="Arial"/>
+                <a:latin typeface="Roboto"/>
               </a:rPr>
               <a:t>WHAT IT SHOWS</a:t>
             </a:r>
@@ -6051,12 +6340,17 @@
           </a:bodyPr>
           <a:lstStyle/>
           <a:p>
+            <a:pPr>
+              <a:defRPr>
+                <a:latin typeface="Roboto"/>
+              </a:defRPr>
+            </a:pPr>
             <a:r>
               <a:rPr sz="1600" b="0">
                 <a:solidFill>
                   <a:srgbClr val="25342A"/>
                 </a:solidFill>
-                <a:latin typeface="Arial"/>
+                <a:latin typeface="Roboto"/>
               </a:rPr>
               <a:t>Youth outreach cost $36,791 in full in November: $21,079 paid by the State Department of Families grant, and $15,712 of shared costs no grant covers. It has spent 99.0% of its budget to date, with $380,952 left and 19 months to go.</a:t>
             </a:r>
@@ -6104,7 +6398,11 @@
           <a:bodyPr rtlCol="0" anchor="ctr"/>
           <a:lstStyle/>
           <a:p>
-            <a:pPr algn="ctr"/>
+            <a:pPr algn="ctr">
+              <a:defRPr>
+                <a:latin typeface="Roboto"/>
+              </a:defRPr>
+            </a:pPr>
           </a:p>
         </p:txBody>
       </p:sp>
@@ -6130,12 +6428,17 @@
           </a:bodyPr>
           <a:lstStyle/>
           <a:p>
+            <a:pPr>
+              <a:defRPr>
+                <a:latin typeface="Roboto"/>
+              </a:defRPr>
+            </a:pPr>
             <a:r>
               <a:rPr sz="1100" b="1">
                 <a:solidFill>
                   <a:srgbClr val="5F6F63"/>
                 </a:solidFill>
-                <a:latin typeface="Arial"/>
+                <a:latin typeface="Roboto"/>
               </a:rPr>
               <a:t>WHAT YOU'D DO ABOUT IT</a:t>
             </a:r>
@@ -6164,12 +6467,17 @@
           </a:bodyPr>
           <a:lstStyle/>
           <a:p>
+            <a:pPr>
+              <a:defRPr>
+                <a:latin typeface="Roboto"/>
+              </a:defRPr>
+            </a:pPr>
             <a:r>
               <a:rPr sz="1600" b="0">
                 <a:solidFill>
                   <a:srgbClr val="25342A"/>
                 </a:solidFill>
-                <a:latin typeface="Arial"/>
+                <a:latin typeface="Roboto"/>
               </a:rPr>
               <a:t>The full cost is $36,791 a month; $15,712 of it is shared cost the grant doesn't pay for. Worth asking for as much of it as the funder allows at renewal.</a:t>
             </a:r>
@@ -6198,12 +6506,17 @@
           </a:bodyPr>
           <a:lstStyle/>
           <a:p>
+            <a:pPr>
+              <a:defRPr>
+                <a:latin typeface="Roboto"/>
+              </a:defRPr>
+            </a:pPr>
             <a:r>
               <a:rPr sz="900" b="0">
                 <a:solidFill>
                   <a:srgbClr val="5F6F63"/>
                 </a:solidFill>
-                <a:latin typeface="Arial"/>
+                <a:latin typeface="Roboto"/>
               </a:rPr>
               <a:t>program-cost.pptx</a:t>
             </a:r>
@@ -6232,13 +6545,17 @@
           </a:bodyPr>
           <a:lstStyle/>
           <a:p>
-            <a:pPr algn="ctr"/>
+            <a:pPr algn="ctr">
+              <a:defRPr>
+                <a:latin typeface="Roboto"/>
+              </a:defRPr>
+            </a:pPr>
             <a:r>
               <a:rPr sz="900" b="0">
                 <a:solidFill>
                   <a:srgbClr val="5F6F63"/>
                 </a:solidFill>
-                <a:latin typeface="Arial"/>
+                <a:latin typeface="Roboto"/>
               </a:rPr>
               <a:t>Data retrieved 2pm, Tue 6 Oct 2026 · Sample data</a:t>
             </a:r>
@@ -6267,13 +6584,17 @@
           </a:bodyPr>
           <a:lstStyle/>
           <a:p>
-            <a:pPr algn="r"/>
+            <a:pPr algn="r">
+              <a:defRPr>
+                <a:latin typeface="Roboto"/>
+              </a:defRPr>
+            </a:pPr>
             <a:r>
               <a:rPr sz="900" b="0">
                 <a:solidFill>
                   <a:srgbClr val="5F6F63"/>
                 </a:solidFill>
-                <a:latin typeface="Arial"/>
+                <a:latin typeface="Roboto"/>
               </a:rPr>
               <a:t>Slide 6 of 10</a:t>
             </a:r>
@@ -6337,7 +6658,11 @@
           <a:bodyPr rtlCol="0" anchor="ctr"/>
           <a:lstStyle/>
           <a:p>
-            <a:pPr algn="ctr"/>
+            <a:pPr algn="ctr">
+              <a:defRPr>
+                <a:latin typeface="Roboto"/>
+              </a:defRPr>
+            </a:pPr>
           </a:p>
         </p:txBody>
       </p:sp>
@@ -6363,12 +6688,17 @@
           </a:bodyPr>
           <a:lstStyle/>
           <a:p>
+            <a:pPr>
+              <a:defRPr>
+                <a:latin typeface="Roboto"/>
+              </a:defRPr>
+            </a:pPr>
             <a:r>
               <a:rPr sz="1000" b="0">
                 <a:solidFill>
                   <a:srgbClr val="5F6F63"/>
                 </a:solidFill>
-                <a:latin typeface="Arial"/>
+                <a:latin typeface="Roboto"/>
               </a:rPr>
               <a:t>Sample Community Services Ltd · What does each program really cost?</a:t>
             </a:r>
@@ -6397,12 +6727,17 @@
           </a:bodyPr>
           <a:lstStyle/>
           <a:p>
+            <a:pPr>
+              <a:defRPr>
+                <a:latin typeface="Roboto"/>
+              </a:defRPr>
+            </a:pPr>
             <a:r>
               <a:rPr sz="2400" b="1">
                 <a:solidFill>
                   <a:srgbClr val="25342A"/>
                 </a:solidFill>
-                <a:latin typeface="Arial"/>
+                <a:latin typeface="Roboto"/>
               </a:rPr>
               <a:t>What it shows · Program: Emergency relief</a:t>
             </a:r>
@@ -6450,7 +6785,11 @@
           <a:bodyPr rtlCol="0" anchor="ctr"/>
           <a:lstStyle/>
           <a:p>
-            <a:pPr algn="ctr"/>
+            <a:pPr algn="ctr">
+              <a:defRPr>
+                <a:latin typeface="Roboto"/>
+              </a:defRPr>
+            </a:pPr>
           </a:p>
         </p:txBody>
       </p:sp>
@@ -6476,12 +6815,17 @@
           </a:bodyPr>
           <a:lstStyle/>
           <a:p>
+            <a:pPr>
+              <a:defRPr>
+                <a:latin typeface="Roboto"/>
+              </a:defRPr>
+            </a:pPr>
             <a:r>
               <a:rPr sz="1100" b="1">
                 <a:solidFill>
                   <a:srgbClr val="5F6F63"/>
                 </a:solidFill>
-                <a:latin typeface="Arial"/>
+                <a:latin typeface="Roboto"/>
               </a:rPr>
               <a:t>WHAT IT SHOWS</a:t>
             </a:r>
@@ -6510,12 +6854,17 @@
           </a:bodyPr>
           <a:lstStyle/>
           <a:p>
+            <a:pPr>
+              <a:defRPr>
+                <a:latin typeface="Roboto"/>
+              </a:defRPr>
+            </a:pPr>
             <a:r>
               <a:rPr sz="1600" b="0">
                 <a:solidFill>
                   <a:srgbClr val="25342A"/>
                 </a:solidFill>
-                <a:latin typeface="Arial"/>
+                <a:latin typeface="Roboto"/>
               </a:rPr>
               <a:t>Emergency relief cost $19,898 in full in November: $11,400 paid by the Federal community grant grant, and $8,498 of shared costs no grant covers. It has spent 99.7% of its budget to date (spending before October 2024 taken at budget), with $12,900 left and 1 months to go.</a:t>
             </a:r>
@@ -6563,7 +6912,11 @@
           <a:bodyPr rtlCol="0" anchor="ctr"/>
           <a:lstStyle/>
           <a:p>
-            <a:pPr algn="ctr"/>
+            <a:pPr algn="ctr">
+              <a:defRPr>
+                <a:latin typeface="Roboto"/>
+              </a:defRPr>
+            </a:pPr>
           </a:p>
         </p:txBody>
       </p:sp>
@@ -6589,12 +6942,17 @@
           </a:bodyPr>
           <a:lstStyle/>
           <a:p>
+            <a:pPr>
+              <a:defRPr>
+                <a:latin typeface="Roboto"/>
+              </a:defRPr>
+            </a:pPr>
             <a:r>
               <a:rPr sz="1100" b="1">
                 <a:solidFill>
                   <a:srgbClr val="5F6F63"/>
                 </a:solidFill>
-                <a:latin typeface="Arial"/>
+                <a:latin typeface="Roboto"/>
               </a:rPr>
               <a:t>WHAT YOU'D DO ABOUT IT</a:t>
             </a:r>
@@ -6623,12 +6981,17 @@
           </a:bodyPr>
           <a:lstStyle/>
           <a:p>
+            <a:pPr>
+              <a:defRPr>
+                <a:latin typeface="Roboto"/>
+              </a:defRPr>
+            </a:pPr>
             <a:r>
               <a:rPr sz="1600" b="0">
                 <a:solidFill>
                   <a:srgbClr val="25342A"/>
                 </a:solidFill>
-                <a:latin typeface="Arial"/>
+                <a:latin typeface="Roboto"/>
               </a:rPr>
               <a:t>The full cost is $19,898 a month; $8,498 of it is shared cost the grant doesn't pay for. Worth asking for as much of it as the funder allows at renewal.</a:t>
             </a:r>
@@ -6657,12 +7020,17 @@
           </a:bodyPr>
           <a:lstStyle/>
           <a:p>
+            <a:pPr>
+              <a:defRPr>
+                <a:latin typeface="Roboto"/>
+              </a:defRPr>
+            </a:pPr>
             <a:r>
               <a:rPr sz="900" b="0">
                 <a:solidFill>
                   <a:srgbClr val="5F6F63"/>
                 </a:solidFill>
-                <a:latin typeface="Arial"/>
+                <a:latin typeface="Roboto"/>
               </a:rPr>
               <a:t>program-cost.pptx</a:t>
             </a:r>
@@ -6691,13 +7059,17 @@
           </a:bodyPr>
           <a:lstStyle/>
           <a:p>
-            <a:pPr algn="ctr"/>
+            <a:pPr algn="ctr">
+              <a:defRPr>
+                <a:latin typeface="Roboto"/>
+              </a:defRPr>
+            </a:pPr>
             <a:r>
               <a:rPr sz="900" b="0">
                 <a:solidFill>
                   <a:srgbClr val="5F6F63"/>
                 </a:solidFill>
-                <a:latin typeface="Arial"/>
+                <a:latin typeface="Roboto"/>
               </a:rPr>
               <a:t>Data retrieved 2pm, Tue 6 Oct 2026 · Sample data</a:t>
             </a:r>
@@ -6726,13 +7098,17 @@
           </a:bodyPr>
           <a:lstStyle/>
           <a:p>
-            <a:pPr algn="r"/>
+            <a:pPr algn="r">
+              <a:defRPr>
+                <a:latin typeface="Roboto"/>
+              </a:defRPr>
+            </a:pPr>
             <a:r>
               <a:rPr sz="900" b="0">
                 <a:solidFill>
                   <a:srgbClr val="5F6F63"/>
                 </a:solidFill>
-                <a:latin typeface="Arial"/>
+                <a:latin typeface="Roboto"/>
               </a:rPr>
               <a:t>Slide 7 of 10</a:t>
             </a:r>
@@ -6796,7 +7172,11 @@
           <a:bodyPr rtlCol="0" anchor="ctr"/>
           <a:lstStyle/>
           <a:p>
-            <a:pPr algn="ctr"/>
+            <a:pPr algn="ctr">
+              <a:defRPr>
+                <a:latin typeface="Roboto"/>
+              </a:defRPr>
+            </a:pPr>
           </a:p>
         </p:txBody>
       </p:sp>
@@ -6822,12 +7202,17 @@
           </a:bodyPr>
           <a:lstStyle/>
           <a:p>
+            <a:pPr>
+              <a:defRPr>
+                <a:latin typeface="Roboto"/>
+              </a:defRPr>
+            </a:pPr>
             <a:r>
               <a:rPr sz="1000" b="0">
                 <a:solidFill>
                   <a:srgbClr val="5F6F63"/>
                 </a:solidFill>
-                <a:latin typeface="Arial"/>
+                <a:latin typeface="Roboto"/>
               </a:rPr>
               <a:t>Sample Community Services Ltd · What does each program really cost?</a:t>
             </a:r>
@@ -6856,12 +7241,17 @@
           </a:bodyPr>
           <a:lstStyle/>
           <a:p>
+            <a:pPr>
+              <a:defRPr>
+                <a:latin typeface="Roboto"/>
+              </a:defRPr>
+            </a:pPr>
             <a:r>
               <a:rPr sz="2400" b="1">
                 <a:solidFill>
                   <a:srgbClr val="25342A"/>
                 </a:solidFill>
-                <a:latin typeface="Arial"/>
+                <a:latin typeface="Roboto"/>
               </a:rPr>
               <a:t>What it shows · Program: Digital literacy</a:t>
             </a:r>
@@ -6909,7 +7299,11 @@
           <a:bodyPr rtlCol="0" anchor="ctr"/>
           <a:lstStyle/>
           <a:p>
-            <a:pPr algn="ctr"/>
+            <a:pPr algn="ctr">
+              <a:defRPr>
+                <a:latin typeface="Roboto"/>
+              </a:defRPr>
+            </a:pPr>
           </a:p>
         </p:txBody>
       </p:sp>
@@ -6935,12 +7329,17 @@
           </a:bodyPr>
           <a:lstStyle/>
           <a:p>
+            <a:pPr>
+              <a:defRPr>
+                <a:latin typeface="Roboto"/>
+              </a:defRPr>
+            </a:pPr>
             <a:r>
               <a:rPr sz="1100" b="1">
                 <a:solidFill>
                   <a:srgbClr val="5F6F63"/>
                 </a:solidFill>
-                <a:latin typeface="Arial"/>
+                <a:latin typeface="Roboto"/>
               </a:rPr>
               <a:t>WHAT IT SHOWS</a:t>
             </a:r>
@@ -6969,12 +7368,17 @@
           </a:bodyPr>
           <a:lstStyle/>
           <a:p>
+            <a:pPr>
+              <a:defRPr>
+                <a:latin typeface="Roboto"/>
+              </a:defRPr>
+            </a:pPr>
             <a:r>
               <a:rPr sz="1600" b="0">
                 <a:solidFill>
                   <a:srgbClr val="25342A"/>
                 </a:solidFill>
-                <a:latin typeface="Arial"/>
+                <a:latin typeface="Roboto"/>
               </a:rPr>
               <a:t>Digital literacy cost $8,003 in full in November: $4,585 paid by the Philanthropic foundation grant, and $3,418 of shared costs no grant covers. It has spent 97.5% of its budget to date, with $80,255 left and 16 months to go.</a:t>
             </a:r>
@@ -7022,7 +7426,11 @@
           <a:bodyPr rtlCol="0" anchor="ctr"/>
           <a:lstStyle/>
           <a:p>
-            <a:pPr algn="ctr"/>
+            <a:pPr algn="ctr">
+              <a:defRPr>
+                <a:latin typeface="Roboto"/>
+              </a:defRPr>
+            </a:pPr>
           </a:p>
         </p:txBody>
       </p:sp>
@@ -7048,12 +7456,17 @@
           </a:bodyPr>
           <a:lstStyle/>
           <a:p>
+            <a:pPr>
+              <a:defRPr>
+                <a:latin typeface="Roboto"/>
+              </a:defRPr>
+            </a:pPr>
             <a:r>
               <a:rPr sz="1100" b="1">
                 <a:solidFill>
                   <a:srgbClr val="5F6F63"/>
                 </a:solidFill>
-                <a:latin typeface="Arial"/>
+                <a:latin typeface="Roboto"/>
               </a:rPr>
               <a:t>WHAT YOU'D DO ABOUT IT</a:t>
             </a:r>
@@ -7082,12 +7495,17 @@
           </a:bodyPr>
           <a:lstStyle/>
           <a:p>
+            <a:pPr>
+              <a:defRPr>
+                <a:latin typeface="Roboto"/>
+              </a:defRPr>
+            </a:pPr>
             <a:r>
               <a:rPr sz="1600" b="0">
                 <a:solidFill>
                   <a:srgbClr val="25342A"/>
                 </a:solidFill>
-                <a:latin typeface="Arial"/>
+                <a:latin typeface="Roboto"/>
               </a:rPr>
               <a:t>The full cost is $8,003 a month; $3,418 of it is shared cost the grant doesn't pay for. Worth asking for as much of it as the funder allows at renewal.</a:t>
             </a:r>
@@ -7116,12 +7534,17 @@
           </a:bodyPr>
           <a:lstStyle/>
           <a:p>
+            <a:pPr>
+              <a:defRPr>
+                <a:latin typeface="Roboto"/>
+              </a:defRPr>
+            </a:pPr>
             <a:r>
               <a:rPr sz="900" b="0">
                 <a:solidFill>
                   <a:srgbClr val="5F6F63"/>
                 </a:solidFill>
-                <a:latin typeface="Arial"/>
+                <a:latin typeface="Roboto"/>
               </a:rPr>
               <a:t>program-cost.pptx</a:t>
             </a:r>
@@ -7150,13 +7573,17 @@
           </a:bodyPr>
           <a:lstStyle/>
           <a:p>
-            <a:pPr algn="ctr"/>
+            <a:pPr algn="ctr">
+              <a:defRPr>
+                <a:latin typeface="Roboto"/>
+              </a:defRPr>
+            </a:pPr>
             <a:r>
               <a:rPr sz="900" b="0">
                 <a:solidFill>
                   <a:srgbClr val="5F6F63"/>
                 </a:solidFill>
-                <a:latin typeface="Arial"/>
+                <a:latin typeface="Roboto"/>
               </a:rPr>
               <a:t>Data retrieved 2pm, Tue 6 Oct 2026 · Sample data</a:t>
             </a:r>
@@ -7185,13 +7612,17 @@
           </a:bodyPr>
           <a:lstStyle/>
           <a:p>
-            <a:pPr algn="r"/>
+            <a:pPr algn="r">
+              <a:defRPr>
+                <a:latin typeface="Roboto"/>
+              </a:defRPr>
+            </a:pPr>
             <a:r>
               <a:rPr sz="900" b="0">
                 <a:solidFill>
                   <a:srgbClr val="5F6F63"/>
                 </a:solidFill>
-                <a:latin typeface="Arial"/>
+                <a:latin typeface="Roboto"/>
               </a:rPr>
               <a:t>Slide 8 of 10</a:t>
             </a:r>
@@ -7255,7 +7686,11 @@
           <a:bodyPr rtlCol="0" anchor="ctr"/>
           <a:lstStyle/>
           <a:p>
-            <a:pPr algn="ctr"/>
+            <a:pPr algn="ctr">
+              <a:defRPr>
+                <a:latin typeface="Roboto"/>
+              </a:defRPr>
+            </a:pPr>
           </a:p>
         </p:txBody>
       </p:sp>
@@ -7281,12 +7716,17 @@
           </a:bodyPr>
           <a:lstStyle/>
           <a:p>
+            <a:pPr>
+              <a:defRPr>
+                <a:latin typeface="Roboto"/>
+              </a:defRPr>
+            </a:pPr>
             <a:r>
               <a:rPr sz="1000" b="0">
                 <a:solidFill>
                   <a:srgbClr val="5F6F63"/>
                 </a:solidFill>
-                <a:latin typeface="Arial"/>
+                <a:latin typeface="Roboto"/>
               </a:rPr>
               <a:t>Sample Community Services Ltd · What does each program really cost?</a:t>
             </a:r>
@@ -7315,12 +7755,17 @@
           </a:bodyPr>
           <a:lstStyle/>
           <a:p>
+            <a:pPr>
+              <a:defRPr>
+                <a:latin typeface="Roboto"/>
+              </a:defRPr>
+            </a:pPr>
             <a:r>
               <a:rPr sz="2400" b="1">
                 <a:solidFill>
                   <a:srgbClr val="25342A"/>
                 </a:solidFill>
-                <a:latin typeface="Arial"/>
+                <a:latin typeface="Roboto"/>
               </a:rPr>
               <a:t>What it shows · Program: Community meals (2025-26)</a:t>
             </a:r>
@@ -7368,7 +7813,11 @@
           <a:bodyPr rtlCol="0" anchor="ctr"/>
           <a:lstStyle/>
           <a:p>
-            <a:pPr algn="ctr"/>
+            <a:pPr algn="ctr">
+              <a:defRPr>
+                <a:latin typeface="Roboto"/>
+              </a:defRPr>
+            </a:pPr>
           </a:p>
         </p:txBody>
       </p:sp>
@@ -7394,12 +7843,17 @@
           </a:bodyPr>
           <a:lstStyle/>
           <a:p>
+            <a:pPr>
+              <a:defRPr>
+                <a:latin typeface="Roboto"/>
+              </a:defRPr>
+            </a:pPr>
             <a:r>
               <a:rPr sz="1100" b="1">
                 <a:solidFill>
                   <a:srgbClr val="5F6F63"/>
                 </a:solidFill>
-                <a:latin typeface="Arial"/>
+                <a:latin typeface="Roboto"/>
               </a:rPr>
               <a:t>WHAT IT SHOWS</a:t>
             </a:r>
@@ -7428,12 +7882,17 @@
           </a:bodyPr>
           <a:lstStyle/>
           <a:p>
+            <a:pPr>
+              <a:defRPr>
+                <a:latin typeface="Roboto"/>
+              </a:defRPr>
+            </a:pPr>
             <a:r>
               <a:rPr sz="1600" b="0">
                 <a:solidFill>
                   <a:srgbClr val="25342A"/>
                 </a:solidFill>
-                <a:latin typeface="Arial"/>
+                <a:latin typeface="Roboto"/>
               </a:rPr>
               <a:t>Community meals (2025-26) cost $5,411 in full in November: $3,100 paid by the Local council community grant grant, and $2,311 of shared costs no grant covers. It has spent 93.8% of its budget to date, with $26,800 left and 7 months to go.</a:t>
             </a:r>
@@ -7481,7 +7940,11 @@
           <a:bodyPr rtlCol="0" anchor="ctr"/>
           <a:lstStyle/>
           <a:p>
-            <a:pPr algn="ctr"/>
+            <a:pPr algn="ctr">
+              <a:defRPr>
+                <a:latin typeface="Roboto"/>
+              </a:defRPr>
+            </a:pPr>
           </a:p>
         </p:txBody>
       </p:sp>
@@ -7507,12 +7970,17 @@
           </a:bodyPr>
           <a:lstStyle/>
           <a:p>
+            <a:pPr>
+              <a:defRPr>
+                <a:latin typeface="Roboto"/>
+              </a:defRPr>
+            </a:pPr>
             <a:r>
               <a:rPr sz="1100" b="1">
                 <a:solidFill>
                   <a:srgbClr val="5F6F63"/>
                 </a:solidFill>
-                <a:latin typeface="Arial"/>
+                <a:latin typeface="Roboto"/>
               </a:rPr>
               <a:t>WHAT YOU'D DO ABOUT IT</a:t>
             </a:r>
@@ -7541,12 +8009,17 @@
           </a:bodyPr>
           <a:lstStyle/>
           <a:p>
+            <a:pPr>
+              <a:defRPr>
+                <a:latin typeface="Roboto"/>
+              </a:defRPr>
+            </a:pPr>
             <a:r>
               <a:rPr sz="1600" b="0">
                 <a:solidFill>
                   <a:srgbClr val="25342A"/>
                 </a:solidFill>
-                <a:latin typeface="Arial"/>
+                <a:latin typeface="Roboto"/>
               </a:rPr>
               <a:t>The full cost is $5,411 a month; $2,311 of it is shared cost the grant doesn't pay for. Worth asking for as much of it as the funder allows at renewal.</a:t>
             </a:r>
@@ -7575,12 +8048,17 @@
           </a:bodyPr>
           <a:lstStyle/>
           <a:p>
+            <a:pPr>
+              <a:defRPr>
+                <a:latin typeface="Roboto"/>
+              </a:defRPr>
+            </a:pPr>
             <a:r>
               <a:rPr sz="900" b="0">
                 <a:solidFill>
                   <a:srgbClr val="5F6F63"/>
                 </a:solidFill>
-                <a:latin typeface="Arial"/>
+                <a:latin typeface="Roboto"/>
               </a:rPr>
               <a:t>program-cost.pptx</a:t>
             </a:r>
@@ -7609,13 +8087,17 @@
           </a:bodyPr>
           <a:lstStyle/>
           <a:p>
-            <a:pPr algn="ctr"/>
+            <a:pPr algn="ctr">
+              <a:defRPr>
+                <a:latin typeface="Roboto"/>
+              </a:defRPr>
+            </a:pPr>
             <a:r>
               <a:rPr sz="900" b="0">
                 <a:solidFill>
                   <a:srgbClr val="5F6F63"/>
                 </a:solidFill>
-                <a:latin typeface="Arial"/>
+                <a:latin typeface="Roboto"/>
               </a:rPr>
               <a:t>Data retrieved 2pm, Tue 6 Oct 2026 · Sample data</a:t>
             </a:r>
@@ -7644,13 +8126,17 @@
           </a:bodyPr>
           <a:lstStyle/>
           <a:p>
-            <a:pPr algn="r"/>
+            <a:pPr algn="r">
+              <a:defRPr>
+                <a:latin typeface="Roboto"/>
+              </a:defRPr>
+            </a:pPr>
             <a:r>
               <a:rPr sz="900" b="0">
                 <a:solidFill>
                   <a:srgbClr val="5F6F63"/>
                 </a:solidFill>
-                <a:latin typeface="Arial"/>
+                <a:latin typeface="Roboto"/>
               </a:rPr>
               <a:t>Slide 9 of 10</a:t>
             </a:r>

--- a/media/exports/reports/2025-11/program-cost.pptx
+++ b/media/exports/reports/2025-11/program-cost.pptx
@@ -6,15 +6,12 @@
   </p:sldMasterIdLst>
   <p:sldIdLst>
     <p:sldId id="256" r:id="rId7"/>
-    <p:sldId id="257" r:id="rId8"/>
-    <p:sldId id="258" r:id="rId9"/>
-    <p:sldId id="259" r:id="rId10"/>
-    <p:sldId id="260" r:id="rId11"/>
-    <p:sldId id="261" r:id="rId12"/>
-    <p:sldId id="262" r:id="rId13"/>
-    <p:sldId id="263" r:id="rId14"/>
-    <p:sldId id="264" r:id="rId15"/>
-    <p:sldId id="265" r:id="rId16"/>
+    <p:sldId id="257" r:id="rId9"/>
+    <p:sldId id="258" r:id="rId10"/>
+    <p:sldId id="259" r:id="rId11"/>
+    <p:sldId id="260" r:id="rId12"/>
+    <p:sldId id="261" r:id="rId13"/>
+    <p:sldId id="262" r:id="rId14"/>
   </p:sldIdLst>
   <p:sldSz cx="12191695" cy="6858000" type="screen4x3"/>
   <p:notesSz cx="6858000" cy="9144000"/>
@@ -120,8 +117,19 @@
 <c:chartSpace xmlns:c="http://schemas.openxmlformats.org/drawingml/2006/chart" xmlns:a="http://schemas.openxmlformats.org/drawingml/2006/main" xmlns:r="http://schemas.openxmlformats.org/officeDocument/2006/relationships">
   <c:date1904 val="0"/>
   <c:chart>
-    <c:autoTitleDeleted val="0"/>
+    <c:autoTitleDeleted val="1"/>
     <c:plotArea>
+      <c:layout>
+        <c:manualLayout>
+          <c:layoutTarget val="inner"/>
+          <c:xMode val="edge"/>
+          <c:yMode val="edge"/>
+          <c:x val="0.3"/>
+          <c:y val="0.03"/>
+          <c:w val="0.58"/>
+          <c:h val="0.88"/>
+        </c:manualLayout>
+      </c:layout>
       <c:barChart>
         <c:barDir val="bar"/>
         <c:grouping val="clustered"/>
@@ -134,7 +142,7 @@
               <c:strCache>
                 <c:ptCount val="1"/>
                 <c:pt idx="0">
-                  <c:v>Value</c:v>
+                  <c:v>$</c:v>
                 </c:pt>
               </c:strCache>
             </c:strRef>
@@ -234,7 +242,7 @@
             <a:lstStyle/>
             <a:p>
               <a:pPr>
-                <a:defRPr sz="1100"/>
+                <a:defRPr sz="1000"/>
               </a:pPr>
             </a:p>
           </c:txPr>
@@ -271,7 +279,7 @@
           <a:lstStyle/>
           <a:p>
             <a:pPr>
-              <a:defRPr sz="1200"/>
+              <a:defRPr sz="1100"/>
             </a:pPr>
           </a:p>
         </c:txPr>
@@ -284,7 +292,10 @@
       </c:catAx>
       <c:valAx>
         <c:axId val="-2113994440"/>
-        <c:scaling/>
+        <c:scaling>
+          <c:max val="60216.299999999996"/>
+          <c:min val="0.0"/>
+        </c:scaling>
         <c:delete/>
         <c:axPos val="b"/>
         <c:majorTickMark val="out"/>
@@ -317,209 +328,21 @@
 <file path=ppt/charts/chart2.xml><?xml version="1.0" encoding="utf-8"?>
 <c:chartSpace xmlns:c="http://schemas.openxmlformats.org/drawingml/2006/chart" xmlns:a="http://schemas.openxmlformats.org/drawingml/2006/main" xmlns:r="http://schemas.openxmlformats.org/officeDocument/2006/relationships">
   <c:date1904 val="0"/>
-  <c:chart>
-    <c:autoTitleDeleted val="0"/>
-    <c:plotArea>
-      <c:barChart>
-        <c:barDir val="bar"/>
-        <c:grouping val="clustered"/>
-        <c:ser>
-          <c:idx val="0"/>
-          <c:order val="0"/>
-          <c:tx>
-            <c:strRef>
-              <c:f>Sheet1!$B$1</c:f>
-              <c:strCache>
-                <c:ptCount val="1"/>
-                <c:pt idx="0">
-                  <c:v>Value</c:v>
-                </c:pt>
-              </c:strCache>
-            </c:strRef>
-          </c:tx>
-          <c:dPt>
-            <c:idx val="0"/>
-            <c:spPr>
-              <a:solidFill>
-                <a:srgbClr val="0E9F6E"/>
-              </a:solidFill>
-            </c:spPr>
-          </c:dPt>
-          <c:dPt>
-            <c:idx val="1"/>
-            <c:spPr>
-              <a:solidFill>
-                <a:srgbClr val="0E9F6E"/>
-              </a:solidFill>
-            </c:spPr>
-          </c:dPt>
-          <c:dPt>
-            <c:idx val="2"/>
-            <c:spPr>
-              <a:solidFill>
-                <a:srgbClr val="0E9F6E"/>
-              </a:solidFill>
-            </c:spPr>
-          </c:dPt>
-          <c:dPt>
-            <c:idx val="3"/>
-            <c:spPr>
-              <a:solidFill>
-                <a:srgbClr val="0E9F6E"/>
-              </a:solidFill>
-            </c:spPr>
-          </c:dPt>
-          <c:dPt>
-            <c:idx val="4"/>
-            <c:spPr>
-              <a:solidFill>
-                <a:srgbClr val="0E9F6E"/>
-              </a:solidFill>
-            </c:spPr>
-          </c:dPt>
-          <c:cat>
-            <c:strRef>
-              <c:f>Sheet1!$A$2:$A$6</c:f>
-              <c:strCache>
-                <c:ptCount val="5"/>
-                <c:pt idx="0">
-                  <c:v>Community meals (2025-26)</c:v>
-                </c:pt>
-                <c:pt idx="1">
-                  <c:v>Digital literacy</c:v>
-                </c:pt>
-                <c:pt idx="2">
-                  <c:v>Emergency relief</c:v>
-                </c:pt>
-                <c:pt idx="3">
-                  <c:v>Youth outreach</c:v>
-                </c:pt>
-                <c:pt idx="4">
-                  <c:v>Housing support (2025)</c:v>
-                </c:pt>
-              </c:strCache>
-            </c:strRef>
-          </c:cat>
-          <c:val>
-            <c:numRef>
-              <c:f>Sheet1!$B$2:$B$6</c:f>
-              <c:numCache>
-                <c:formatCode>0.0"%";[Red](0.0"%")</c:formatCode>
-                <c:ptCount val="5"/>
-                <c:pt idx="0">
-                  <c:v>4.4</c:v>
-                </c:pt>
-                <c:pt idx="1">
-                  <c:v>6.5</c:v>
-                </c:pt>
-                <c:pt idx="2">
-                  <c:v>16.2</c:v>
-                </c:pt>
-                <c:pt idx="3">
-                  <c:v>30.0</c:v>
-                </c:pt>
-                <c:pt idx="4">
-                  <c:v>42.8</c:v>
-                </c:pt>
-              </c:numCache>
-            </c:numRef>
-          </c:val>
-        </c:ser>
-        <c:dLbls>
-          <c:numFmt formatCode="0.0&quot;%&quot;;[Red](0.0&quot;%&quot;)" sourceLinked="0"/>
-          <c:txPr>
-            <a:bodyPr/>
-            <a:lstStyle/>
-            <a:p>
-              <a:pPr>
-                <a:defRPr sz="1100"/>
-              </a:pPr>
-            </a:p>
-          </c:txPr>
-          <c:dLblPos val="outEnd"/>
-          <c:showLegendKey val="0"/>
-          <c:showVal val="1"/>
-          <c:showCatName val="0"/>
-          <c:showSerName val="0"/>
-          <c:showPercent val="0"/>
-          <c:showBubbleSize val="0"/>
-          <c:showLeaderLines val="1"/>
-        </c:dLbls>
-        <c:gapWidth val="60"/>
-        <c:axId val="-2068027336"/>
-        <c:axId val="-2113994440"/>
-      </c:barChart>
-      <c:catAx>
-        <c:axId val="-2068027336"/>
-        <c:scaling>
-          <c:orientation val="minMax"/>
-        </c:scaling>
-        <c:delete val="0"/>
-        <c:axPos val="l"/>
-        <c:majorTickMark val="out"/>
-        <c:minorTickMark val="none"/>
-        <c:tickLblPos val="nextTo"/>
-        <c:spPr>
-          <a:ln>
-            <a:noFill/>
-          </a:ln>
-        </c:spPr>
-        <c:txPr>
-          <a:bodyPr/>
-          <a:lstStyle/>
-          <a:p>
-            <a:pPr>
-              <a:defRPr sz="1200"/>
-            </a:pPr>
-          </a:p>
-        </c:txPr>
-        <c:crossAx val="-2113994440"/>
-        <c:crosses val="autoZero"/>
-        <c:auto val="1"/>
-        <c:lblAlgn val="ctr"/>
-        <c:lblOffset val="100"/>
-        <c:noMultiLvlLbl val="0"/>
-      </c:catAx>
-      <c:valAx>
-        <c:axId val="-2113994440"/>
-        <c:scaling/>
-        <c:delete/>
-        <c:axPos val="b"/>
-        <c:majorTickMark val="out"/>
-        <c:minorTickMark val="none"/>
-        <c:tickLblPos val="nextTo"/>
-        <c:crossAx val="-2068027336"/>
-        <c:crosses val="autoZero"/>
-      </c:valAx>
-    </c:plotArea>
-    <c:dispBlanksAs val="gap"/>
-  </c:chart>
-  <c:txPr>
-    <a:bodyPr/>
-    <a:lstStyle/>
-    <a:p>
-      <a:pPr>
-        <a:defRPr sz="1800">
-          <a:latin typeface="Roboto"/>
-        </a:defRPr>
-      </a:pPr>
-      <a:endParaRPr lang="en-US"/>
-    </a:p>
-  </c:txPr>
-  <c:externalData r:id="rId1">
-    <c:autoUpdate val="0"/>
-  </c:externalData>
-</c:chartSpace>
-</file>
-
-<file path=ppt/charts/chart3.xml><?xml version="1.0" encoding="utf-8"?>
-<c:chartSpace xmlns:c="http://schemas.openxmlformats.org/drawingml/2006/chart" xmlns:a="http://schemas.openxmlformats.org/drawingml/2006/main" xmlns:r="http://schemas.openxmlformats.org/officeDocument/2006/relationships">
-  <c:date1904 val="0"/>
   <c:roundedCorners val="0"/>
   <c:chart>
-    <c:autoTitleDeleted val="0"/>
+    <c:autoTitleDeleted val="1"/>
     <c:plotArea>
-      <c:layout/>
+      <c:layout>
+        <c:manualLayout>
+          <c:layoutTarget val="inner"/>
+          <c:xMode val="edge"/>
+          <c:yMode val="edge"/>
+          <c:x val="0.11"/>
+          <c:y val="0.05"/>
+          <c:w val="0.86"/>
+          <c:h val="0.8"/>
+        </c:manualLayout>
+      </c:layout>
       <c:areaChart>
         <c:grouping val="standard"/>
         <c:varyColors val="0"/>
@@ -532,7 +355,7 @@
               <c:strCache>
                 <c:ptCount val="1"/>
                 <c:pt idx="0">
-                  <c:v>Value</c:v>
+                  <c:v>Spend $</c:v>
                 </c:pt>
               </c:strCache>
             </c:strRef>
@@ -606,46 +429,46 @@
                 <c:formatCode>$#,##0;[Red]($#,##0);"-"</c:formatCode>
                 <c:ptCount val="14"/>
                 <c:pt idx="0">
+                  <c:v>0</c:v>
+                </c:pt>
+                <c:pt idx="1">
+                  <c:v>0</c:v>
+                </c:pt>
+                <c:pt idx="2">
+                  <c:v>0</c:v>
+                </c:pt>
+                <c:pt idx="3">
+                  <c:v>31100</c:v>
+                </c:pt>
+                <c:pt idx="4">
+                  <c:v>31300</c:v>
+                </c:pt>
+                <c:pt idx="5">
+                  <c:v>24200</c:v>
+                </c:pt>
+                <c:pt idx="6">
                   <c:v>26600</c:v>
                 </c:pt>
-                <c:pt idx="1">
-                  <c:v>31800</c:v>
-                </c:pt>
-                <c:pt idx="2">
-                  <c:v>29700</c:v>
-                </c:pt>
-                <c:pt idx="3">
-                  <c:v>62700</c:v>
-                </c:pt>
-                <c:pt idx="4">
-                  <c:v>61700</c:v>
-                </c:pt>
-                <c:pt idx="5">
-                  <c:v>54500</c:v>
-                </c:pt>
-                <c:pt idx="6">
-                  <c:v>61500</c:v>
-                </c:pt>
                 <c:pt idx="7">
-                  <c:v>61700</c:v>
+                  <c:v>30900</c:v>
                 </c:pt>
                 <c:pt idx="8">
-                  <c:v>52200</c:v>
+                  <c:v>24100</c:v>
                 </c:pt>
                 <c:pt idx="9">
-                  <c:v>59063</c:v>
+                  <c:v>28100</c:v>
                 </c:pt>
                 <c:pt idx="10">
-                  <c:v>61544</c:v>
+                  <c:v>26300</c:v>
                 </c:pt>
                 <c:pt idx="11">
-                  <c:v>62137</c:v>
+                  <c:v>27700</c:v>
                 </c:pt>
                 <c:pt idx="12">
-                  <c:v>69185</c:v>
+                  <c:v>26600</c:v>
                 </c:pt>
                 <c:pt idx="13">
-                  <c:v>70164</c:v>
+                  <c:v>30000</c:v>
                 </c:pt>
               </c:numCache>
             </c:numRef>
@@ -687,12 +510,15 @@
         <c:auto val="1"/>
         <c:lblAlgn val="ctr"/>
         <c:lblOffset val="100"/>
+        <c:tickLblSkip val="2"/>
         <c:noMultiLvlLbl val="0"/>
       </c:catAx>
       <c:valAx>
         <c:axId val="-2100718248"/>
         <c:scaling>
           <c:orientation val="minMax"/>
+          <c:max val="40000.0"/>
+          <c:min val="0.0"/>
         </c:scaling>
         <c:delete val="0"/>
         <c:axPos val="l"/>
@@ -726,6 +552,7 @@
         <c:crossAx val="-2101159928"/>
         <c:crosses val="autoZero"/>
         <c:crossBetween val="midCat"/>
+        <c:majorUnit val="10000.0"/>
       </c:valAx>
     </c:plotArea>
     <c:plotVisOnly val="1"/>
@@ -748,6 +575,1854 @@
     <c:autoUpdate val="0"/>
   </c:externalData>
 </c:chartSpace>
+</file>
+
+<file path=ppt/charts/chart3.xml><?xml version="1.0" encoding="utf-8"?>
+<c:chartSpace xmlns:c="http://schemas.openxmlformats.org/drawingml/2006/chart" xmlns:a="http://schemas.openxmlformats.org/drawingml/2006/main" xmlns:r="http://schemas.openxmlformats.org/officeDocument/2006/relationships">
+  <c:date1904 val="0"/>
+  <c:roundedCorners val="0"/>
+  <c:chart>
+    <c:autoTitleDeleted val="1"/>
+    <c:plotArea>
+      <c:layout>
+        <c:manualLayout>
+          <c:layoutTarget val="inner"/>
+          <c:xMode val="edge"/>
+          <c:yMode val="edge"/>
+          <c:x val="0.11"/>
+          <c:y val="0.05"/>
+          <c:w val="0.86"/>
+          <c:h val="0.8"/>
+        </c:manualLayout>
+      </c:layout>
+      <c:areaChart>
+        <c:grouping val="standard"/>
+        <c:varyColors val="0"/>
+        <c:ser>
+          <c:idx val="0"/>
+          <c:order val="0"/>
+          <c:tx>
+            <c:strRef>
+              <c:f>Sheet1!$B$1</c:f>
+              <c:strCache>
+                <c:ptCount val="1"/>
+                <c:pt idx="0">
+                  <c:v>Spend $</c:v>
+                </c:pt>
+              </c:strCache>
+            </c:strRef>
+          </c:tx>
+          <c:spPr>
+            <a:solidFill>
+              <a:srgbClr val="0E9F6E">
+                <a:alpha val="25000"/>
+              </a:srgbClr>
+            </a:solidFill>
+            <a:ln w="31750">
+              <a:solidFill>
+                <a:srgbClr val="0E9F6E"/>
+              </a:solidFill>
+            </a:ln>
+          </c:spPr>
+          <c:cat>
+            <c:strRef>
+              <c:f>Sheet1!$A$2:$A$15</c:f>
+              <c:strCache>
+                <c:ptCount val="14"/>
+                <c:pt idx="0">
+                  <c:v>Oct 24</c:v>
+                </c:pt>
+                <c:pt idx="1">
+                  <c:v>Nov 24</c:v>
+                </c:pt>
+                <c:pt idx="2">
+                  <c:v>Dec 24</c:v>
+                </c:pt>
+                <c:pt idx="3">
+                  <c:v>Jan 25</c:v>
+                </c:pt>
+                <c:pt idx="4">
+                  <c:v>Feb 25</c:v>
+                </c:pt>
+                <c:pt idx="5">
+                  <c:v>Mar 25</c:v>
+                </c:pt>
+                <c:pt idx="6">
+                  <c:v>Apr 25</c:v>
+                </c:pt>
+                <c:pt idx="7">
+                  <c:v>May 25</c:v>
+                </c:pt>
+                <c:pt idx="8">
+                  <c:v>Jun 25</c:v>
+                </c:pt>
+                <c:pt idx="9">
+                  <c:v>Jul 25</c:v>
+                </c:pt>
+                <c:pt idx="10">
+                  <c:v>Aug 25</c:v>
+                </c:pt>
+                <c:pt idx="11">
+                  <c:v>Sep 25</c:v>
+                </c:pt>
+                <c:pt idx="12">
+                  <c:v>Oct 25</c:v>
+                </c:pt>
+                <c:pt idx="13">
+                  <c:v>Nov 25</c:v>
+                </c:pt>
+              </c:strCache>
+            </c:strRef>
+          </c:cat>
+          <c:val>
+            <c:numRef>
+              <c:f>Sheet1!$B$2:$B$15</c:f>
+              <c:numCache>
+                <c:formatCode>$#,##0;[Red]($#,##0);"-"</c:formatCode>
+                <c:ptCount val="14"/>
+                <c:pt idx="0">
+                  <c:v>0</c:v>
+                </c:pt>
+                <c:pt idx="1">
+                  <c:v>0</c:v>
+                </c:pt>
+                <c:pt idx="2">
+                  <c:v>0</c:v>
+                </c:pt>
+                <c:pt idx="3">
+                  <c:v>0</c:v>
+                </c:pt>
+                <c:pt idx="4">
+                  <c:v>0</c:v>
+                </c:pt>
+                <c:pt idx="5">
+                  <c:v>0</c:v>
+                </c:pt>
+                <c:pt idx="6">
+                  <c:v>0</c:v>
+                </c:pt>
+                <c:pt idx="7">
+                  <c:v>0</c:v>
+                </c:pt>
+                <c:pt idx="8">
+                  <c:v>0</c:v>
+                </c:pt>
+                <c:pt idx="9">
+                  <c:v>17363</c:v>
+                </c:pt>
+                <c:pt idx="10">
+                  <c:v>21144</c:v>
+                </c:pt>
+                <c:pt idx="11">
+                  <c:v>17537</c:v>
+                </c:pt>
+                <c:pt idx="12">
+                  <c:v>21925</c:v>
+                </c:pt>
+                <c:pt idx="13">
+                  <c:v>21079</c:v>
+                </c:pt>
+              </c:numCache>
+            </c:numRef>
+          </c:val>
+        </c:ser>
+        <c:dLbls>
+          <c:showLegendKey val="0"/>
+          <c:showVal val="0"/>
+          <c:showCatName val="0"/>
+          <c:showSerName val="0"/>
+          <c:showPercent val="0"/>
+          <c:showBubbleSize val="0"/>
+        </c:dLbls>
+        <c:axId val="-2101159928"/>
+        <c:axId val="-2100718248"/>
+      </c:areaChart>
+      <c:catAx>
+        <c:axId val="-2101159928"/>
+        <c:scaling>
+          <c:orientation val="minMax"/>
+        </c:scaling>
+        <c:delete val="0"/>
+        <c:axPos val="b"/>
+        <c:numFmt formatCode="General" sourceLinked="1"/>
+        <c:majorTickMark val="out"/>
+        <c:minorTickMark val="none"/>
+        <c:tickLblPos val="nextTo"/>
+        <c:txPr>
+          <a:bodyPr/>
+          <a:lstStyle/>
+          <a:p>
+            <a:pPr>
+              <a:defRPr sz="1000"/>
+            </a:pPr>
+          </a:p>
+        </c:txPr>
+        <c:crossAx val="-2100718248"/>
+        <c:crosses val="autoZero"/>
+        <c:auto val="1"/>
+        <c:lblAlgn val="ctr"/>
+        <c:lblOffset val="100"/>
+        <c:tickLblSkip val="2"/>
+        <c:noMultiLvlLbl val="0"/>
+      </c:catAx>
+      <c:valAx>
+        <c:axId val="-2100718248"/>
+        <c:scaling>
+          <c:orientation val="minMax"/>
+          <c:max val="25000.0"/>
+          <c:min val="0.0"/>
+        </c:scaling>
+        <c:delete val="0"/>
+        <c:axPos val="l"/>
+        <c:majorGridlines>
+          <c:spPr>
+            <a:ln>
+              <a:solidFill>
+                <a:srgbClr val="E6EAE7"/>
+              </a:solidFill>
+            </a:ln>
+          </c:spPr>
+        </c:majorGridlines>
+        <c:numFmt formatCode="$#,##0;[Red]($#,##0);&quot;-&quot;" sourceLinked="0"/>
+        <c:majorTickMark val="out"/>
+        <c:minorTickMark val="none"/>
+        <c:tickLblPos val="nextTo"/>
+        <c:spPr>
+          <a:ln>
+            <a:noFill/>
+          </a:ln>
+        </c:spPr>
+        <c:txPr>
+          <a:bodyPr/>
+          <a:lstStyle/>
+          <a:p>
+            <a:pPr>
+              <a:defRPr sz="1000"/>
+            </a:pPr>
+          </a:p>
+        </c:txPr>
+        <c:crossAx val="-2101159928"/>
+        <c:crosses val="autoZero"/>
+        <c:crossBetween val="midCat"/>
+        <c:majorUnit val="5000.0"/>
+      </c:valAx>
+    </c:plotArea>
+    <c:plotVisOnly val="1"/>
+    <c:dispBlanksAs val="zero"/>
+    <c:showDLblsOverMax val="0"/>
+  </c:chart>
+  <c:txPr>
+    <a:bodyPr/>
+    <a:lstStyle/>
+    <a:p>
+      <a:pPr>
+        <a:defRPr sz="1800">
+          <a:latin typeface="Roboto"/>
+        </a:defRPr>
+      </a:pPr>
+      <a:endParaRPr/>
+    </a:p>
+  </c:txPr>
+  <c:externalData r:id="rId1">
+    <c:autoUpdate val="0"/>
+  </c:externalData>
+</c:chartSpace>
+</file>
+
+<file path=ppt/charts/chart4.xml><?xml version="1.0" encoding="utf-8"?>
+<c:chartSpace xmlns:c="http://schemas.openxmlformats.org/drawingml/2006/chart" xmlns:a="http://schemas.openxmlformats.org/drawingml/2006/main" xmlns:r="http://schemas.openxmlformats.org/officeDocument/2006/relationships">
+  <c:date1904 val="0"/>
+  <c:roundedCorners val="0"/>
+  <c:chart>
+    <c:autoTitleDeleted val="1"/>
+    <c:plotArea>
+      <c:layout>
+        <c:manualLayout>
+          <c:layoutTarget val="inner"/>
+          <c:xMode val="edge"/>
+          <c:yMode val="edge"/>
+          <c:x val="0.11"/>
+          <c:y val="0.05"/>
+          <c:w val="0.86"/>
+          <c:h val="0.8"/>
+        </c:manualLayout>
+      </c:layout>
+      <c:areaChart>
+        <c:grouping val="standard"/>
+        <c:varyColors val="0"/>
+        <c:ser>
+          <c:idx val="0"/>
+          <c:order val="0"/>
+          <c:tx>
+            <c:strRef>
+              <c:f>Sheet1!$B$1</c:f>
+              <c:strCache>
+                <c:ptCount val="1"/>
+                <c:pt idx="0">
+                  <c:v>Spend $</c:v>
+                </c:pt>
+              </c:strCache>
+            </c:strRef>
+          </c:tx>
+          <c:spPr>
+            <a:solidFill>
+              <a:srgbClr val="0E9F6E">
+                <a:alpha val="25000"/>
+              </a:srgbClr>
+            </a:solidFill>
+            <a:ln w="31750">
+              <a:solidFill>
+                <a:srgbClr val="0E9F6E"/>
+              </a:solidFill>
+            </a:ln>
+          </c:spPr>
+          <c:cat>
+            <c:strRef>
+              <c:f>Sheet1!$A$2:$A$15</c:f>
+              <c:strCache>
+                <c:ptCount val="14"/>
+                <c:pt idx="0">
+                  <c:v>Oct 24</c:v>
+                </c:pt>
+                <c:pt idx="1">
+                  <c:v>Nov 24</c:v>
+                </c:pt>
+                <c:pt idx="2">
+                  <c:v>Dec 24</c:v>
+                </c:pt>
+                <c:pt idx="3">
+                  <c:v>Jan 25</c:v>
+                </c:pt>
+                <c:pt idx="4">
+                  <c:v>Feb 25</c:v>
+                </c:pt>
+                <c:pt idx="5">
+                  <c:v>Mar 25</c:v>
+                </c:pt>
+                <c:pt idx="6">
+                  <c:v>Apr 25</c:v>
+                </c:pt>
+                <c:pt idx="7">
+                  <c:v>May 25</c:v>
+                </c:pt>
+                <c:pt idx="8">
+                  <c:v>Jun 25</c:v>
+                </c:pt>
+                <c:pt idx="9">
+                  <c:v>Jul 25</c:v>
+                </c:pt>
+                <c:pt idx="10">
+                  <c:v>Aug 25</c:v>
+                </c:pt>
+                <c:pt idx="11">
+                  <c:v>Sep 25</c:v>
+                </c:pt>
+                <c:pt idx="12">
+                  <c:v>Oct 25</c:v>
+                </c:pt>
+                <c:pt idx="13">
+                  <c:v>Nov 25</c:v>
+                </c:pt>
+              </c:strCache>
+            </c:strRef>
+          </c:cat>
+          <c:val>
+            <c:numRef>
+              <c:f>Sheet1!$B$2:$B$15</c:f>
+              <c:numCache>
+                <c:formatCode>$#,##0;[Red]($#,##0);"-"</c:formatCode>
+                <c:ptCount val="14"/>
+                <c:pt idx="0">
+                  <c:v>10400</c:v>
+                </c:pt>
+                <c:pt idx="1">
+                  <c:v>13400</c:v>
+                </c:pt>
+                <c:pt idx="2">
+                  <c:v>11900</c:v>
+                </c:pt>
+                <c:pt idx="3">
+                  <c:v>12700</c:v>
+                </c:pt>
+                <c:pt idx="4">
+                  <c:v>10500</c:v>
+                </c:pt>
+                <c:pt idx="5">
+                  <c:v>12200</c:v>
+                </c:pt>
+                <c:pt idx="6">
+                  <c:v>13500</c:v>
+                </c:pt>
+                <c:pt idx="7">
+                  <c:v>13200</c:v>
+                </c:pt>
+                <c:pt idx="8">
+                  <c:v>11900</c:v>
+                </c:pt>
+                <c:pt idx="9">
+                  <c:v>10200</c:v>
+                </c:pt>
+                <c:pt idx="10">
+                  <c:v>10600</c:v>
+                </c:pt>
+                <c:pt idx="11">
+                  <c:v>12900</c:v>
+                </c:pt>
+                <c:pt idx="12">
+                  <c:v>12300</c:v>
+                </c:pt>
+                <c:pt idx="13">
+                  <c:v>11400</c:v>
+                </c:pt>
+              </c:numCache>
+            </c:numRef>
+          </c:val>
+        </c:ser>
+        <c:dLbls>
+          <c:showLegendKey val="0"/>
+          <c:showVal val="0"/>
+          <c:showCatName val="0"/>
+          <c:showSerName val="0"/>
+          <c:showPercent val="0"/>
+          <c:showBubbleSize val="0"/>
+        </c:dLbls>
+        <c:axId val="-2101159928"/>
+        <c:axId val="-2100718248"/>
+      </c:areaChart>
+      <c:catAx>
+        <c:axId val="-2101159928"/>
+        <c:scaling>
+          <c:orientation val="minMax"/>
+        </c:scaling>
+        <c:delete val="0"/>
+        <c:axPos val="b"/>
+        <c:numFmt formatCode="General" sourceLinked="1"/>
+        <c:majorTickMark val="out"/>
+        <c:minorTickMark val="none"/>
+        <c:tickLblPos val="nextTo"/>
+        <c:txPr>
+          <a:bodyPr/>
+          <a:lstStyle/>
+          <a:p>
+            <a:pPr>
+              <a:defRPr sz="1000"/>
+            </a:pPr>
+          </a:p>
+        </c:txPr>
+        <c:crossAx val="-2100718248"/>
+        <c:crosses val="autoZero"/>
+        <c:auto val="1"/>
+        <c:lblAlgn val="ctr"/>
+        <c:lblOffset val="100"/>
+        <c:tickLblSkip val="2"/>
+        <c:noMultiLvlLbl val="0"/>
+      </c:catAx>
+      <c:valAx>
+        <c:axId val="-2100718248"/>
+        <c:scaling>
+          <c:orientation val="minMax"/>
+          <c:max val="15000.0"/>
+          <c:min val="0.0"/>
+        </c:scaling>
+        <c:delete val="0"/>
+        <c:axPos val="l"/>
+        <c:majorGridlines>
+          <c:spPr>
+            <a:ln>
+              <a:solidFill>
+                <a:srgbClr val="E6EAE7"/>
+              </a:solidFill>
+            </a:ln>
+          </c:spPr>
+        </c:majorGridlines>
+        <c:numFmt formatCode="$#,##0;[Red]($#,##0);&quot;-&quot;" sourceLinked="0"/>
+        <c:majorTickMark val="out"/>
+        <c:minorTickMark val="none"/>
+        <c:tickLblPos val="nextTo"/>
+        <c:spPr>
+          <a:ln>
+            <a:noFill/>
+          </a:ln>
+        </c:spPr>
+        <c:txPr>
+          <a:bodyPr/>
+          <a:lstStyle/>
+          <a:p>
+            <a:pPr>
+              <a:defRPr sz="1000"/>
+            </a:pPr>
+          </a:p>
+        </c:txPr>
+        <c:crossAx val="-2101159928"/>
+        <c:crosses val="autoZero"/>
+        <c:crossBetween val="midCat"/>
+        <c:majorUnit val="5000.0"/>
+      </c:valAx>
+    </c:plotArea>
+    <c:plotVisOnly val="1"/>
+    <c:dispBlanksAs val="zero"/>
+    <c:showDLblsOverMax val="0"/>
+  </c:chart>
+  <c:txPr>
+    <a:bodyPr/>
+    <a:lstStyle/>
+    <a:p>
+      <a:pPr>
+        <a:defRPr sz="1800">
+          <a:latin typeface="Roboto"/>
+        </a:defRPr>
+      </a:pPr>
+      <a:endParaRPr/>
+    </a:p>
+  </c:txPr>
+  <c:externalData r:id="rId1">
+    <c:autoUpdate val="0"/>
+  </c:externalData>
+</c:chartSpace>
+</file>
+
+<file path=ppt/charts/chart5.xml><?xml version="1.0" encoding="utf-8"?>
+<c:chartSpace xmlns:c="http://schemas.openxmlformats.org/drawingml/2006/chart" xmlns:a="http://schemas.openxmlformats.org/drawingml/2006/main" xmlns:r="http://schemas.openxmlformats.org/officeDocument/2006/relationships">
+  <c:date1904 val="0"/>
+  <c:roundedCorners val="0"/>
+  <c:chart>
+    <c:autoTitleDeleted val="1"/>
+    <c:plotArea>
+      <c:layout>
+        <c:manualLayout>
+          <c:layoutTarget val="inner"/>
+          <c:xMode val="edge"/>
+          <c:yMode val="edge"/>
+          <c:x val="0.11"/>
+          <c:y val="0.05"/>
+          <c:w val="0.86"/>
+          <c:h val="0.8"/>
+        </c:manualLayout>
+      </c:layout>
+      <c:areaChart>
+        <c:grouping val="standard"/>
+        <c:varyColors val="0"/>
+        <c:ser>
+          <c:idx val="0"/>
+          <c:order val="0"/>
+          <c:tx>
+            <c:strRef>
+              <c:f>Sheet1!$B$1</c:f>
+              <c:strCache>
+                <c:ptCount val="1"/>
+                <c:pt idx="0">
+                  <c:v>Spend $</c:v>
+                </c:pt>
+              </c:strCache>
+            </c:strRef>
+          </c:tx>
+          <c:spPr>
+            <a:solidFill>
+              <a:srgbClr val="0E9F6E">
+                <a:alpha val="25000"/>
+              </a:srgbClr>
+            </a:solidFill>
+            <a:ln w="31750">
+              <a:solidFill>
+                <a:srgbClr val="0E9F6E"/>
+              </a:solidFill>
+            </a:ln>
+          </c:spPr>
+          <c:cat>
+            <c:strRef>
+              <c:f>Sheet1!$A$2:$A$15</c:f>
+              <c:strCache>
+                <c:ptCount val="14"/>
+                <c:pt idx="0">
+                  <c:v>Oct 24</c:v>
+                </c:pt>
+                <c:pt idx="1">
+                  <c:v>Nov 24</c:v>
+                </c:pt>
+                <c:pt idx="2">
+                  <c:v>Dec 24</c:v>
+                </c:pt>
+                <c:pt idx="3">
+                  <c:v>Jan 25</c:v>
+                </c:pt>
+                <c:pt idx="4">
+                  <c:v>Feb 25</c:v>
+                </c:pt>
+                <c:pt idx="5">
+                  <c:v>Mar 25</c:v>
+                </c:pt>
+                <c:pt idx="6">
+                  <c:v>Apr 25</c:v>
+                </c:pt>
+                <c:pt idx="7">
+                  <c:v>May 25</c:v>
+                </c:pt>
+                <c:pt idx="8">
+                  <c:v>Jun 25</c:v>
+                </c:pt>
+                <c:pt idx="9">
+                  <c:v>Jul 25</c:v>
+                </c:pt>
+                <c:pt idx="10">
+                  <c:v>Aug 25</c:v>
+                </c:pt>
+                <c:pt idx="11">
+                  <c:v>Sep 25</c:v>
+                </c:pt>
+                <c:pt idx="12">
+                  <c:v>Oct 25</c:v>
+                </c:pt>
+                <c:pt idx="13">
+                  <c:v>Nov 25</c:v>
+                </c:pt>
+              </c:strCache>
+            </c:strRef>
+          </c:cat>
+          <c:val>
+            <c:numRef>
+              <c:f>Sheet1!$B$2:$B$15</c:f>
+              <c:numCache>
+                <c:formatCode>$#,##0;[Red]($#,##0);"-"</c:formatCode>
+                <c:ptCount val="14"/>
+                <c:pt idx="0">
+                  <c:v>0</c:v>
+                </c:pt>
+                <c:pt idx="1">
+                  <c:v>0</c:v>
+                </c:pt>
+                <c:pt idx="2">
+                  <c:v>0</c:v>
+                </c:pt>
+                <c:pt idx="3">
+                  <c:v>0</c:v>
+                </c:pt>
+                <c:pt idx="4">
+                  <c:v>0</c:v>
+                </c:pt>
+                <c:pt idx="5">
+                  <c:v>0</c:v>
+                </c:pt>
+                <c:pt idx="6">
+                  <c:v>0</c:v>
+                </c:pt>
+                <c:pt idx="7">
+                  <c:v>0</c:v>
+                </c:pt>
+                <c:pt idx="8">
+                  <c:v>0</c:v>
+                </c:pt>
+                <c:pt idx="9">
+                  <c:v>0</c:v>
+                </c:pt>
+                <c:pt idx="10">
+                  <c:v>0</c:v>
+                </c:pt>
+                <c:pt idx="11">
+                  <c:v>0</c:v>
+                </c:pt>
+                <c:pt idx="12">
+                  <c:v>5160</c:v>
+                </c:pt>
+                <c:pt idx="13">
+                  <c:v>4585</c:v>
+                </c:pt>
+              </c:numCache>
+            </c:numRef>
+          </c:val>
+        </c:ser>
+        <c:dLbls>
+          <c:showLegendKey val="0"/>
+          <c:showVal val="0"/>
+          <c:showCatName val="0"/>
+          <c:showSerName val="0"/>
+          <c:showPercent val="0"/>
+          <c:showBubbleSize val="0"/>
+        </c:dLbls>
+        <c:axId val="-2101159928"/>
+        <c:axId val="-2100718248"/>
+      </c:areaChart>
+      <c:catAx>
+        <c:axId val="-2101159928"/>
+        <c:scaling>
+          <c:orientation val="minMax"/>
+        </c:scaling>
+        <c:delete val="0"/>
+        <c:axPos val="b"/>
+        <c:numFmt formatCode="General" sourceLinked="1"/>
+        <c:majorTickMark val="out"/>
+        <c:minorTickMark val="none"/>
+        <c:tickLblPos val="nextTo"/>
+        <c:txPr>
+          <a:bodyPr/>
+          <a:lstStyle/>
+          <a:p>
+            <a:pPr>
+              <a:defRPr sz="1000"/>
+            </a:pPr>
+          </a:p>
+        </c:txPr>
+        <c:crossAx val="-2100718248"/>
+        <c:crosses val="autoZero"/>
+        <c:auto val="1"/>
+        <c:lblAlgn val="ctr"/>
+        <c:lblOffset val="100"/>
+        <c:tickLblSkip val="2"/>
+        <c:noMultiLvlLbl val="0"/>
+      </c:catAx>
+      <c:valAx>
+        <c:axId val="-2100718248"/>
+        <c:scaling>
+          <c:orientation val="minMax"/>
+          <c:max val="6000.0"/>
+          <c:min val="0.0"/>
+        </c:scaling>
+        <c:delete val="0"/>
+        <c:axPos val="l"/>
+        <c:majorGridlines>
+          <c:spPr>
+            <a:ln>
+              <a:solidFill>
+                <a:srgbClr val="E6EAE7"/>
+              </a:solidFill>
+            </a:ln>
+          </c:spPr>
+        </c:majorGridlines>
+        <c:numFmt formatCode="$#,##0;[Red]($#,##0);&quot;-&quot;" sourceLinked="0"/>
+        <c:majorTickMark val="out"/>
+        <c:minorTickMark val="none"/>
+        <c:tickLblPos val="nextTo"/>
+        <c:spPr>
+          <a:ln>
+            <a:noFill/>
+          </a:ln>
+        </c:spPr>
+        <c:txPr>
+          <a:bodyPr/>
+          <a:lstStyle/>
+          <a:p>
+            <a:pPr>
+              <a:defRPr sz="1000"/>
+            </a:pPr>
+          </a:p>
+        </c:txPr>
+        <c:crossAx val="-2101159928"/>
+        <c:crosses val="autoZero"/>
+        <c:crossBetween val="midCat"/>
+        <c:majorUnit val="2000.0"/>
+      </c:valAx>
+    </c:plotArea>
+    <c:plotVisOnly val="1"/>
+    <c:dispBlanksAs val="zero"/>
+    <c:showDLblsOverMax val="0"/>
+  </c:chart>
+  <c:txPr>
+    <a:bodyPr/>
+    <a:lstStyle/>
+    <a:p>
+      <a:pPr>
+        <a:defRPr sz="1800">
+          <a:latin typeface="Roboto"/>
+        </a:defRPr>
+      </a:pPr>
+      <a:endParaRPr/>
+    </a:p>
+  </c:txPr>
+  <c:externalData r:id="rId1">
+    <c:autoUpdate val="0"/>
+  </c:externalData>
+</c:chartSpace>
+</file>
+
+<file path=ppt/charts/chart6.xml><?xml version="1.0" encoding="utf-8"?>
+<c:chartSpace xmlns:c="http://schemas.openxmlformats.org/drawingml/2006/chart" xmlns:a="http://schemas.openxmlformats.org/drawingml/2006/main" xmlns:r="http://schemas.openxmlformats.org/officeDocument/2006/relationships">
+  <c:date1904 val="0"/>
+  <c:roundedCorners val="0"/>
+  <c:chart>
+    <c:autoTitleDeleted val="1"/>
+    <c:plotArea>
+      <c:layout>
+        <c:manualLayout>
+          <c:layoutTarget val="inner"/>
+          <c:xMode val="edge"/>
+          <c:yMode val="edge"/>
+          <c:x val="0.11"/>
+          <c:y val="0.05"/>
+          <c:w val="0.86"/>
+          <c:h val="0.8"/>
+        </c:manualLayout>
+      </c:layout>
+      <c:areaChart>
+        <c:grouping val="standard"/>
+        <c:varyColors val="0"/>
+        <c:ser>
+          <c:idx val="0"/>
+          <c:order val="0"/>
+          <c:tx>
+            <c:strRef>
+              <c:f>Sheet1!$B$1</c:f>
+              <c:strCache>
+                <c:ptCount val="1"/>
+                <c:pt idx="0">
+                  <c:v>Spend $</c:v>
+                </c:pt>
+              </c:strCache>
+            </c:strRef>
+          </c:tx>
+          <c:spPr>
+            <a:solidFill>
+              <a:srgbClr val="0E9F6E">
+                <a:alpha val="25000"/>
+              </a:srgbClr>
+            </a:solidFill>
+            <a:ln w="31750">
+              <a:solidFill>
+                <a:srgbClr val="0E9F6E"/>
+              </a:solidFill>
+            </a:ln>
+          </c:spPr>
+          <c:cat>
+            <c:strRef>
+              <c:f>Sheet1!$A$2:$A$15</c:f>
+              <c:strCache>
+                <c:ptCount val="14"/>
+                <c:pt idx="0">
+                  <c:v>Oct 24</c:v>
+                </c:pt>
+                <c:pt idx="1">
+                  <c:v>Nov 24</c:v>
+                </c:pt>
+                <c:pt idx="2">
+                  <c:v>Dec 24</c:v>
+                </c:pt>
+                <c:pt idx="3">
+                  <c:v>Jan 25</c:v>
+                </c:pt>
+                <c:pt idx="4">
+                  <c:v>Feb 25</c:v>
+                </c:pt>
+                <c:pt idx="5">
+                  <c:v>Mar 25</c:v>
+                </c:pt>
+                <c:pt idx="6">
+                  <c:v>Apr 25</c:v>
+                </c:pt>
+                <c:pt idx="7">
+                  <c:v>May 25</c:v>
+                </c:pt>
+                <c:pt idx="8">
+                  <c:v>Jun 25</c:v>
+                </c:pt>
+                <c:pt idx="9">
+                  <c:v>Jul 25</c:v>
+                </c:pt>
+                <c:pt idx="10">
+                  <c:v>Aug 25</c:v>
+                </c:pt>
+                <c:pt idx="11">
+                  <c:v>Sep 25</c:v>
+                </c:pt>
+                <c:pt idx="12">
+                  <c:v>Oct 25</c:v>
+                </c:pt>
+                <c:pt idx="13">
+                  <c:v>Nov 25</c:v>
+                </c:pt>
+              </c:strCache>
+            </c:strRef>
+          </c:cat>
+          <c:val>
+            <c:numRef>
+              <c:f>Sheet1!$B$2:$B$15</c:f>
+              <c:numCache>
+                <c:formatCode>$#,##0;[Red]($#,##0);"-"</c:formatCode>
+                <c:ptCount val="14"/>
+                <c:pt idx="0">
+                  <c:v>0</c:v>
+                </c:pt>
+                <c:pt idx="1">
+                  <c:v>0</c:v>
+                </c:pt>
+                <c:pt idx="2">
+                  <c:v>0</c:v>
+                </c:pt>
+                <c:pt idx="3">
+                  <c:v>0</c:v>
+                </c:pt>
+                <c:pt idx="4">
+                  <c:v>0</c:v>
+                </c:pt>
+                <c:pt idx="5">
+                  <c:v>0</c:v>
+                </c:pt>
+                <c:pt idx="6">
+                  <c:v>0</c:v>
+                </c:pt>
+                <c:pt idx="7">
+                  <c:v>0</c:v>
+                </c:pt>
+                <c:pt idx="8">
+                  <c:v>0</c:v>
+                </c:pt>
+                <c:pt idx="9">
+                  <c:v>3400</c:v>
+                </c:pt>
+                <c:pt idx="10">
+                  <c:v>3500</c:v>
+                </c:pt>
+                <c:pt idx="11">
+                  <c:v>4000</c:v>
+                </c:pt>
+                <c:pt idx="12">
+                  <c:v>3200</c:v>
+                </c:pt>
+                <c:pt idx="13">
+                  <c:v>3100</c:v>
+                </c:pt>
+              </c:numCache>
+            </c:numRef>
+          </c:val>
+        </c:ser>
+        <c:dLbls>
+          <c:showLegendKey val="0"/>
+          <c:showVal val="0"/>
+          <c:showCatName val="0"/>
+          <c:showSerName val="0"/>
+          <c:showPercent val="0"/>
+          <c:showBubbleSize val="0"/>
+        </c:dLbls>
+        <c:axId val="-2101159928"/>
+        <c:axId val="-2100718248"/>
+      </c:areaChart>
+      <c:catAx>
+        <c:axId val="-2101159928"/>
+        <c:scaling>
+          <c:orientation val="minMax"/>
+        </c:scaling>
+        <c:delete val="0"/>
+        <c:axPos val="b"/>
+        <c:numFmt formatCode="General" sourceLinked="1"/>
+        <c:majorTickMark val="out"/>
+        <c:minorTickMark val="none"/>
+        <c:tickLblPos val="nextTo"/>
+        <c:txPr>
+          <a:bodyPr/>
+          <a:lstStyle/>
+          <a:p>
+            <a:pPr>
+              <a:defRPr sz="1000"/>
+            </a:pPr>
+          </a:p>
+        </c:txPr>
+        <c:crossAx val="-2100718248"/>
+        <c:crosses val="autoZero"/>
+        <c:auto val="1"/>
+        <c:lblAlgn val="ctr"/>
+        <c:lblOffset val="100"/>
+        <c:tickLblSkip val="2"/>
+        <c:noMultiLvlLbl val="0"/>
+      </c:catAx>
+      <c:valAx>
+        <c:axId val="-2100718248"/>
+        <c:scaling>
+          <c:orientation val="minMax"/>
+          <c:max val="5000.0"/>
+          <c:min val="0.0"/>
+        </c:scaling>
+        <c:delete val="0"/>
+        <c:axPos val="l"/>
+        <c:majorGridlines>
+          <c:spPr>
+            <a:ln>
+              <a:solidFill>
+                <a:srgbClr val="E6EAE7"/>
+              </a:solidFill>
+            </a:ln>
+          </c:spPr>
+        </c:majorGridlines>
+        <c:numFmt formatCode="$#,##0;[Red]($#,##0);&quot;-&quot;" sourceLinked="0"/>
+        <c:majorTickMark val="out"/>
+        <c:minorTickMark val="none"/>
+        <c:tickLblPos val="nextTo"/>
+        <c:spPr>
+          <a:ln>
+            <a:noFill/>
+          </a:ln>
+        </c:spPr>
+        <c:txPr>
+          <a:bodyPr/>
+          <a:lstStyle/>
+          <a:p>
+            <a:pPr>
+              <a:defRPr sz="1000"/>
+            </a:pPr>
+          </a:p>
+        </c:txPr>
+        <c:crossAx val="-2101159928"/>
+        <c:crosses val="autoZero"/>
+        <c:crossBetween val="midCat"/>
+        <c:majorUnit val="1000.0"/>
+      </c:valAx>
+    </c:plotArea>
+    <c:plotVisOnly val="1"/>
+    <c:dispBlanksAs val="zero"/>
+    <c:showDLblsOverMax val="0"/>
+  </c:chart>
+  <c:txPr>
+    <a:bodyPr/>
+    <a:lstStyle/>
+    <a:p>
+      <a:pPr>
+        <a:defRPr sz="1800">
+          <a:latin typeface="Roboto"/>
+        </a:defRPr>
+      </a:pPr>
+      <a:endParaRPr/>
+    </a:p>
+  </c:txPr>
+  <c:externalData r:id="rId1">
+    <c:autoUpdate val="0"/>
+  </c:externalData>
+</c:chartSpace>
+</file>
+
+<file path=ppt/notesMasters/notesMaster1.xml><?xml version="1.0" encoding="utf-8"?>
+<p:notesMaster xmlns:a="http://schemas.openxmlformats.org/drawingml/2006/main" xmlns:p="http://schemas.openxmlformats.org/presentationml/2006/main" xmlns:r="http://schemas.openxmlformats.org/officeDocument/2006/relationships">
+  <p:cSld>
+    <p:bg>
+      <p:bgRef idx="1001">
+        <a:schemeClr val="bg1"/>
+      </p:bgRef>
+    </p:bg>
+    <p:spTree>
+      <p:nvGrpSpPr>
+        <p:cNvPr id="1" name=""/>
+        <p:cNvGrpSpPr/>
+        <p:nvPr/>
+      </p:nvGrpSpPr>
+      <p:grpSpPr>
+        <a:xfrm>
+          <a:off x="0" y="0"/>
+          <a:ext cx="0" cy="0"/>
+          <a:chOff x="0" y="0"/>
+          <a:chExt cx="0" cy="0"/>
+        </a:xfrm>
+      </p:grpSpPr>
+      <p:sp>
+        <p:nvSpPr>
+          <p:cNvPr id="2" name="Header Placeholder 1"/>
+          <p:cNvSpPr>
+            <a:spLocks noGrp="1"/>
+          </p:cNvSpPr>
+          <p:nvPr>
+            <p:ph type="hdr" sz="quarter"/>
+          </p:nvPr>
+        </p:nvSpPr>
+        <p:spPr>
+          <a:xfrm>
+            <a:off x="0" y="0"/>
+            <a:ext cx="2971800" cy="457200"/>
+          </a:xfrm>
+          <a:prstGeom prst="rect">
+            <a:avLst/>
+          </a:prstGeom>
+        </p:spPr>
+        <p:txBody>
+          <a:bodyPr vert="horz" lIns="91440" tIns="45720" rIns="91440" bIns="45720" rtlCol="0"/>
+          <a:lstStyle>
+            <a:lvl1pPr algn="l">
+              <a:defRPr sz="1200"/>
+            </a:lvl1pPr>
+          </a:lstStyle>
+          <a:p>
+            <a:endParaRPr lang="en-US"/>
+          </a:p>
+        </p:txBody>
+      </p:sp>
+      <p:sp>
+        <p:nvSpPr>
+          <p:cNvPr id="3" name="Date Placeholder 2"/>
+          <p:cNvSpPr>
+            <a:spLocks noGrp="1"/>
+          </p:cNvSpPr>
+          <p:nvPr>
+            <p:ph type="dt" idx="1"/>
+          </p:nvPr>
+        </p:nvSpPr>
+        <p:spPr>
+          <a:xfrm>
+            <a:off x="3884613" y="0"/>
+            <a:ext cx="2971800" cy="457200"/>
+          </a:xfrm>
+          <a:prstGeom prst="rect">
+            <a:avLst/>
+          </a:prstGeom>
+        </p:spPr>
+        <p:txBody>
+          <a:bodyPr vert="horz" lIns="91440" tIns="45720" rIns="91440" bIns="45720" rtlCol="0"/>
+          <a:lstStyle>
+            <a:lvl1pPr algn="r">
+              <a:defRPr sz="1200"/>
+            </a:lvl1pPr>
+          </a:lstStyle>
+          <a:p>
+            <a:fld id="{0F89C1C7-3DCD-1040-A9CF-14679D8B5DDD}" type="datetimeFigureOut">
+              <a:rPr lang="en-US" smtClean="0"/>
+              <a:t>10/17/16</a:t>
+            </a:fld>
+            <a:endParaRPr lang="en-US"/>
+          </a:p>
+        </p:txBody>
+      </p:sp>
+      <p:sp>
+        <p:nvSpPr>
+          <p:cNvPr id="4" name="Slide Image Placeholder 3"/>
+          <p:cNvSpPr>
+            <a:spLocks noGrp="1" noRot="1" noChangeAspect="1"/>
+          </p:cNvSpPr>
+          <p:nvPr>
+            <p:ph type="sldImg" idx="2"/>
+          </p:nvPr>
+        </p:nvSpPr>
+        <p:spPr>
+          <a:xfrm>
+            <a:off x="1143000" y="685800"/>
+            <a:ext cx="4572000" cy="3429000"/>
+          </a:xfrm>
+          <a:prstGeom prst="rect">
+            <a:avLst/>
+          </a:prstGeom>
+          <a:noFill/>
+          <a:ln w="12700">
+            <a:solidFill>
+              <a:prstClr val="black"/>
+            </a:solidFill>
+          </a:ln>
+        </p:spPr>
+        <p:txBody>
+          <a:bodyPr vert="horz" lIns="91440" tIns="45720" rIns="91440" bIns="45720" rtlCol="0" anchor="ctr"/>
+          <a:lstStyle/>
+          <a:p>
+            <a:endParaRPr lang="en-US"/>
+          </a:p>
+        </p:txBody>
+      </p:sp>
+      <p:sp>
+        <p:nvSpPr>
+          <p:cNvPr id="5" name="Notes Placeholder 4"/>
+          <p:cNvSpPr>
+            <a:spLocks noGrp="1"/>
+          </p:cNvSpPr>
+          <p:nvPr>
+            <p:ph type="body" sz="quarter" idx="3"/>
+          </p:nvPr>
+        </p:nvSpPr>
+        <p:spPr>
+          <a:xfrm>
+            <a:off x="685800" y="4343400"/>
+            <a:ext cx="5486400" cy="4114800"/>
+          </a:xfrm>
+          <a:prstGeom prst="rect">
+            <a:avLst/>
+          </a:prstGeom>
+        </p:spPr>
+        <p:txBody>
+          <a:bodyPr vert="horz" lIns="91440" tIns="45720" rIns="91440" bIns="45720" rtlCol="0"/>
+          <a:lstStyle/>
+          <a:p>
+            <a:pPr lvl="0"/>
+            <a:r>
+              <a:rPr lang="en-US" smtClean="0"/>
+              <a:t>Click to edit Master text styles</a:t>
+            </a:r>
+          </a:p>
+          <a:p>
+            <a:pPr lvl="1"/>
+            <a:r>
+              <a:rPr lang="en-US" smtClean="0"/>
+              <a:t>Second level</a:t>
+            </a:r>
+          </a:p>
+          <a:p>
+            <a:pPr lvl="2"/>
+            <a:r>
+              <a:rPr lang="en-US" smtClean="0"/>
+              <a:t>Third level</a:t>
+            </a:r>
+          </a:p>
+          <a:p>
+            <a:pPr lvl="3"/>
+            <a:r>
+              <a:rPr lang="en-US" smtClean="0"/>
+              <a:t>Fourth level</a:t>
+            </a:r>
+          </a:p>
+          <a:p>
+            <a:pPr lvl="4"/>
+            <a:r>
+              <a:rPr lang="en-US" smtClean="0"/>
+              <a:t>Fifth level</a:t>
+            </a:r>
+            <a:endParaRPr lang="en-US"/>
+          </a:p>
+        </p:txBody>
+      </p:sp>
+      <p:sp>
+        <p:nvSpPr>
+          <p:cNvPr id="6" name="Footer Placeholder 5"/>
+          <p:cNvSpPr>
+            <a:spLocks noGrp="1"/>
+          </p:cNvSpPr>
+          <p:nvPr>
+            <p:ph type="ftr" sz="quarter" idx="4"/>
+          </p:nvPr>
+        </p:nvSpPr>
+        <p:spPr>
+          <a:xfrm>
+            <a:off x="0" y="8685213"/>
+            <a:ext cx="2971800" cy="457200"/>
+          </a:xfrm>
+          <a:prstGeom prst="rect">
+            <a:avLst/>
+          </a:prstGeom>
+        </p:spPr>
+        <p:txBody>
+          <a:bodyPr vert="horz" lIns="91440" tIns="45720" rIns="91440" bIns="45720" rtlCol="0" anchor="b"/>
+          <a:lstStyle>
+            <a:lvl1pPr algn="l">
+              <a:defRPr sz="1200"/>
+            </a:lvl1pPr>
+          </a:lstStyle>
+          <a:p>
+            <a:endParaRPr lang="en-US"/>
+          </a:p>
+        </p:txBody>
+      </p:sp>
+      <p:sp>
+        <p:nvSpPr>
+          <p:cNvPr id="7" name="Slide Number Placeholder 6"/>
+          <p:cNvSpPr>
+            <a:spLocks noGrp="1"/>
+          </p:cNvSpPr>
+          <p:nvPr>
+            <p:ph type="sldNum" sz="quarter" idx="5"/>
+          </p:nvPr>
+        </p:nvSpPr>
+        <p:spPr>
+          <a:xfrm>
+            <a:off x="3884613" y="8685213"/>
+            <a:ext cx="2971800" cy="457200"/>
+          </a:xfrm>
+          <a:prstGeom prst="rect">
+            <a:avLst/>
+          </a:prstGeom>
+        </p:spPr>
+        <p:txBody>
+          <a:bodyPr vert="horz" lIns="91440" tIns="45720" rIns="91440" bIns="45720" rtlCol="0" anchor="b"/>
+          <a:lstStyle>
+            <a:lvl1pPr algn="r">
+              <a:defRPr sz="1200"/>
+            </a:lvl1pPr>
+          </a:lstStyle>
+          <a:p>
+            <a:fld id="{BB5E49A5-4136-284D-997B-48E1D791AD67}" type="slidenum">
+              <a:rPr lang="en-US" smtClean="0"/>
+              <a:t>‹#›</a:t>
+            </a:fld>
+            <a:endParaRPr lang="en-US"/>
+          </a:p>
+        </p:txBody>
+      </p:sp>
+    </p:spTree>
+    <p:extLst>
+      <p:ext uri="{BB962C8B-B14F-4D97-AF65-F5344CB8AC3E}">
+        <p14:creationId xmlns:p14="http://schemas.microsoft.com/office/powerpoint/2010/main" val="2623252185"/>
+      </p:ext>
+    </p:extLst>
+  </p:cSld>
+  <p:clrMap bg1="lt1" tx1="dk1" bg2="lt2" tx2="dk2" accent1="accent1" accent2="accent2" accent3="accent3" accent4="accent4" accent5="accent5" accent6="accent6" hlink="hlink" folHlink="folHlink"/>
+  <p:notesStyle>
+    <a:lvl1pPr marL="0" algn="l" defTabSz="457200" rtl="0" eaLnBrk="1" latinLnBrk="0" hangingPunct="1">
+      <a:defRPr sz="1200" kern="1200">
+        <a:solidFill>
+          <a:schemeClr val="tx1"/>
+        </a:solidFill>
+        <a:latin typeface="+mn-lt"/>
+        <a:ea typeface="+mn-ea"/>
+        <a:cs typeface="+mn-cs"/>
+      </a:defRPr>
+    </a:lvl1pPr>
+    <a:lvl2pPr marL="457200" algn="l" defTabSz="457200" rtl="0" eaLnBrk="1" latinLnBrk="0" hangingPunct="1">
+      <a:defRPr sz="1200" kern="1200">
+        <a:solidFill>
+          <a:schemeClr val="tx1"/>
+        </a:solidFill>
+        <a:latin typeface="+mn-lt"/>
+        <a:ea typeface="+mn-ea"/>
+        <a:cs typeface="+mn-cs"/>
+      </a:defRPr>
+    </a:lvl2pPr>
+    <a:lvl3pPr marL="914400" algn="l" defTabSz="457200" rtl="0" eaLnBrk="1" latinLnBrk="0" hangingPunct="1">
+      <a:defRPr sz="1200" kern="1200">
+        <a:solidFill>
+          <a:schemeClr val="tx1"/>
+        </a:solidFill>
+        <a:latin typeface="+mn-lt"/>
+        <a:ea typeface="+mn-ea"/>
+        <a:cs typeface="+mn-cs"/>
+      </a:defRPr>
+    </a:lvl3pPr>
+    <a:lvl4pPr marL="1371600" algn="l" defTabSz="457200" rtl="0" eaLnBrk="1" latinLnBrk="0" hangingPunct="1">
+      <a:defRPr sz="1200" kern="1200">
+        <a:solidFill>
+          <a:schemeClr val="tx1"/>
+        </a:solidFill>
+        <a:latin typeface="+mn-lt"/>
+        <a:ea typeface="+mn-ea"/>
+        <a:cs typeface="+mn-cs"/>
+      </a:defRPr>
+    </a:lvl4pPr>
+    <a:lvl5pPr marL="1828800" algn="l" defTabSz="457200" rtl="0" eaLnBrk="1" latinLnBrk="0" hangingPunct="1">
+      <a:defRPr sz="1200" kern="1200">
+        <a:solidFill>
+          <a:schemeClr val="tx1"/>
+        </a:solidFill>
+        <a:latin typeface="+mn-lt"/>
+        <a:ea typeface="+mn-ea"/>
+        <a:cs typeface="+mn-cs"/>
+      </a:defRPr>
+    </a:lvl5pPr>
+    <a:lvl6pPr marL="2286000" algn="l" defTabSz="457200" rtl="0" eaLnBrk="1" latinLnBrk="0" hangingPunct="1">
+      <a:defRPr sz="1200" kern="1200">
+        <a:solidFill>
+          <a:schemeClr val="tx1"/>
+        </a:solidFill>
+        <a:latin typeface="+mn-lt"/>
+        <a:ea typeface="+mn-ea"/>
+        <a:cs typeface="+mn-cs"/>
+      </a:defRPr>
+    </a:lvl6pPr>
+    <a:lvl7pPr marL="2743200" algn="l" defTabSz="457200" rtl="0" eaLnBrk="1" latinLnBrk="0" hangingPunct="1">
+      <a:defRPr sz="1200" kern="1200">
+        <a:solidFill>
+          <a:schemeClr val="tx1"/>
+        </a:solidFill>
+        <a:latin typeface="+mn-lt"/>
+        <a:ea typeface="+mn-ea"/>
+        <a:cs typeface="+mn-cs"/>
+      </a:defRPr>
+    </a:lvl7pPr>
+    <a:lvl8pPr marL="3200400" algn="l" defTabSz="457200" rtl="0" eaLnBrk="1" latinLnBrk="0" hangingPunct="1">
+      <a:defRPr sz="1200" kern="1200">
+        <a:solidFill>
+          <a:schemeClr val="tx1"/>
+        </a:solidFill>
+        <a:latin typeface="+mn-lt"/>
+        <a:ea typeface="+mn-ea"/>
+        <a:cs typeface="+mn-cs"/>
+      </a:defRPr>
+    </a:lvl8pPr>
+    <a:lvl9pPr marL="3657600" algn="l" defTabSz="457200" rtl="0" eaLnBrk="1" latinLnBrk="0" hangingPunct="1">
+      <a:defRPr sz="1200" kern="1200">
+        <a:solidFill>
+          <a:schemeClr val="tx1"/>
+        </a:solidFill>
+        <a:latin typeface="+mn-lt"/>
+        <a:ea typeface="+mn-ea"/>
+        <a:cs typeface="+mn-cs"/>
+      </a:defRPr>
+    </a:lvl9pPr>
+  </p:notesStyle>
+</p:notesMaster>
+</file>
+
+<file path=ppt/notesSlides/notesSlide1.xml><?xml version="1.0" encoding="utf-8"?>
+<p:notes xmlns:a="http://schemas.openxmlformats.org/drawingml/2006/main" xmlns:p="http://schemas.openxmlformats.org/presentationml/2006/main" xmlns:r="http://schemas.openxmlformats.org/officeDocument/2006/relationships">
+  <p:cSld>
+    <p:spTree>
+      <p:nvGrpSpPr>
+        <p:cNvPr id="1" name=""/>
+        <p:cNvGrpSpPr/>
+        <p:nvPr/>
+      </p:nvGrpSpPr>
+      <p:grpSpPr>
+        <a:xfrm>
+          <a:off x="0" y="0"/>
+          <a:ext cx="0" cy="0"/>
+          <a:chOff x="0" y="0"/>
+          <a:chExt cx="0" cy="0"/>
+        </a:xfrm>
+      </p:grpSpPr>
+      <p:sp>
+        <p:nvSpPr>
+          <p:cNvPr id="2" name="Slide Image Placeholder 1"/>
+          <p:cNvSpPr>
+            <a:spLocks noGrp="1"/>
+          </p:cNvSpPr>
+          <p:nvPr>
+            <p:ph type="sldImg" idx="2"/>
+          </p:nvPr>
+        </p:nvSpPr>
+        <p:spPr/>
+      </p:sp>
+      <p:sp>
+        <p:nvSpPr>
+          <p:cNvPr id="3" name="Notes Placeholder 2"/>
+          <p:cNvSpPr>
+            <a:spLocks noGrp="1"/>
+          </p:cNvSpPr>
+          <p:nvPr>
+            <p:ph type="body" idx="3" sz="quarter"/>
+          </p:nvPr>
+        </p:nvSpPr>
+        <p:spPr/>
+        <p:txBody>
+          <a:bodyPr/>
+          <a:lstStyle/>
+          <a:p>
+            <a:r>
+              <a:t>What does each program really cost?. Sample Community Services Ltd. Period: November 2025. Each program's full cost: what its grant pays for, plus its fair share of the costs no single grant covers (untied program costs and administration, shared by grant spending). Pick a program and every chart and note follows it.</a:t>
+            </a:r>
+          </a:p>
+        </p:txBody>
+      </p:sp>
+      <p:sp>
+        <p:nvSpPr>
+          <p:cNvPr id="4" name="Slide Number Placeholder 3"/>
+          <p:cNvSpPr>
+            <a:spLocks noGrp="1"/>
+          </p:cNvSpPr>
+          <p:nvPr>
+            <p:ph type="sldNum" idx="5" sz="quarter"/>
+          </p:nvPr>
+        </p:nvSpPr>
+        <p:spPr/>
+      </p:sp>
+    </p:spTree>
+  </p:cSld>
+  <p:clrMapOvr>
+    <a:masterClrMapping/>
+  </p:clrMapOvr>
+</p:notes>
+</file>
+
+<file path=ppt/notesSlides/notesSlide2.xml><?xml version="1.0" encoding="utf-8"?>
+<p:notes xmlns:a="http://schemas.openxmlformats.org/drawingml/2006/main" xmlns:p="http://schemas.openxmlformats.org/presentationml/2006/main" xmlns:r="http://schemas.openxmlformats.org/officeDocument/2006/relationships">
+  <p:cSld>
+    <p:spTree>
+      <p:nvGrpSpPr>
+        <p:cNvPr id="1" name=""/>
+        <p:cNvGrpSpPr/>
+        <p:nvPr/>
+      </p:nvGrpSpPr>
+      <p:grpSpPr>
+        <a:xfrm>
+          <a:off x="0" y="0"/>
+          <a:ext cx="0" cy="0"/>
+          <a:chOff x="0" y="0"/>
+          <a:chExt cx="0" cy="0"/>
+        </a:xfrm>
+      </p:grpSpPr>
+      <p:sp>
+        <p:nvSpPr>
+          <p:cNvPr id="2" name="Slide Image Placeholder 1"/>
+          <p:cNvSpPr>
+            <a:spLocks noGrp="1"/>
+          </p:cNvSpPr>
+          <p:nvPr>
+            <p:ph type="sldImg" idx="2"/>
+          </p:nvPr>
+        </p:nvSpPr>
+        <p:spPr/>
+      </p:sp>
+      <p:sp>
+        <p:nvSpPr>
+          <p:cNvPr id="3" name="Notes Placeholder 2"/>
+          <p:cNvSpPr>
+            <a:spLocks noGrp="1"/>
+          </p:cNvSpPr>
+          <p:nvPr>
+            <p:ph type="body" idx="3" sz="quarter"/>
+          </p:nvPr>
+        </p:nvSpPr>
+        <p:spPr/>
+        <p:txBody>
+          <a:bodyPr/>
+          <a:lstStyle/>
+          <a:p>
+            <a:r>
+              <a:t>All programs. Housing support (2025) is the biggest program: $52,362 in November once its share of untied program costs and administration is added to $30,000 of grant spending. Shared costs add 74.5% on top of grant spending across all programs. The full cost (not just the grant line) is the number for renewal applications, where the funder lets you recover a share of overheads. Pick a program above to see it on its own.</a:t>
+            </a:r>
+          </a:p>
+        </p:txBody>
+      </p:sp>
+      <p:sp>
+        <p:nvSpPr>
+          <p:cNvPr id="4" name="Slide Number Placeholder 3"/>
+          <p:cNvSpPr>
+            <a:spLocks noGrp="1"/>
+          </p:cNvSpPr>
+          <p:nvPr>
+            <p:ph type="sldNum" idx="5" sz="quarter"/>
+          </p:nvPr>
+        </p:nvSpPr>
+        <p:spPr/>
+      </p:sp>
+    </p:spTree>
+  </p:cSld>
+  <p:clrMapOvr>
+    <a:masterClrMapping/>
+  </p:clrMapOvr>
+</p:notes>
+</file>
+
+<file path=ppt/notesSlides/notesSlide3.xml><?xml version="1.0" encoding="utf-8"?>
+<p:notes xmlns:a="http://schemas.openxmlformats.org/drawingml/2006/main" xmlns:p="http://schemas.openxmlformats.org/presentationml/2006/main" xmlns:r="http://schemas.openxmlformats.org/officeDocument/2006/relationships">
+  <p:cSld>
+    <p:spTree>
+      <p:nvGrpSpPr>
+        <p:cNvPr id="1" name=""/>
+        <p:cNvGrpSpPr/>
+        <p:nvPr/>
+      </p:nvGrpSpPr>
+      <p:grpSpPr>
+        <a:xfrm>
+          <a:off x="0" y="0"/>
+          <a:ext cx="0" cy="0"/>
+          <a:chOff x="0" y="0"/>
+          <a:chExt cx="0" cy="0"/>
+        </a:xfrm>
+      </p:grpSpPr>
+      <p:sp>
+        <p:nvSpPr>
+          <p:cNvPr id="2" name="Slide Image Placeholder 1"/>
+          <p:cNvSpPr>
+            <a:spLocks noGrp="1"/>
+          </p:cNvSpPr>
+          <p:nvPr>
+            <p:ph type="sldImg" idx="2"/>
+          </p:nvPr>
+        </p:nvSpPr>
+        <p:spPr/>
+      </p:sp>
+      <p:sp>
+        <p:nvSpPr>
+          <p:cNvPr id="3" name="Notes Placeholder 2"/>
+          <p:cNvSpPr>
+            <a:spLocks noGrp="1"/>
+          </p:cNvSpPr>
+          <p:nvPr>
+            <p:ph type="body" idx="3" sz="quarter"/>
+          </p:nvPr>
+        </p:nvSpPr>
+        <p:spPr/>
+        <p:txBody>
+          <a:bodyPr/>
+          <a:lstStyle/>
+          <a:p>
+            <a:r>
+              <a:t>Housing support (2025). Housing support (2025) cost $52,362 in full in November: $30,000 paid by the State Housing Program grant, and $22,362 of shared costs no grant covers. It has spent 99.6% of its budget to date, with $29,100 left and 1 months to go. The full cost is $52,362 a month; $22,362 of it is shared cost the grant doesn't pay for. Worth asking for as much of it as the funder allows at renewal.</a:t>
+            </a:r>
+          </a:p>
+        </p:txBody>
+      </p:sp>
+      <p:sp>
+        <p:nvSpPr>
+          <p:cNvPr id="4" name="Slide Number Placeholder 3"/>
+          <p:cNvSpPr>
+            <a:spLocks noGrp="1"/>
+          </p:cNvSpPr>
+          <p:nvPr>
+            <p:ph type="sldNum" idx="5" sz="quarter"/>
+          </p:nvPr>
+        </p:nvSpPr>
+        <p:spPr/>
+      </p:sp>
+    </p:spTree>
+  </p:cSld>
+  <p:clrMapOvr>
+    <a:masterClrMapping/>
+  </p:clrMapOvr>
+</p:notes>
+</file>
+
+<file path=ppt/notesSlides/notesSlide4.xml><?xml version="1.0" encoding="utf-8"?>
+<p:notes xmlns:a="http://schemas.openxmlformats.org/drawingml/2006/main" xmlns:p="http://schemas.openxmlformats.org/presentationml/2006/main" xmlns:r="http://schemas.openxmlformats.org/officeDocument/2006/relationships">
+  <p:cSld>
+    <p:spTree>
+      <p:nvGrpSpPr>
+        <p:cNvPr id="1" name=""/>
+        <p:cNvGrpSpPr/>
+        <p:nvPr/>
+      </p:nvGrpSpPr>
+      <p:grpSpPr>
+        <a:xfrm>
+          <a:off x="0" y="0"/>
+          <a:ext cx="0" cy="0"/>
+          <a:chOff x="0" y="0"/>
+          <a:chExt cx="0" cy="0"/>
+        </a:xfrm>
+      </p:grpSpPr>
+      <p:sp>
+        <p:nvSpPr>
+          <p:cNvPr id="2" name="Slide Image Placeholder 1"/>
+          <p:cNvSpPr>
+            <a:spLocks noGrp="1"/>
+          </p:cNvSpPr>
+          <p:nvPr>
+            <p:ph type="sldImg" idx="2"/>
+          </p:nvPr>
+        </p:nvSpPr>
+        <p:spPr/>
+      </p:sp>
+      <p:sp>
+        <p:nvSpPr>
+          <p:cNvPr id="3" name="Notes Placeholder 2"/>
+          <p:cNvSpPr>
+            <a:spLocks noGrp="1"/>
+          </p:cNvSpPr>
+          <p:nvPr>
+            <p:ph type="body" idx="3" sz="quarter"/>
+          </p:nvPr>
+        </p:nvSpPr>
+        <p:spPr/>
+        <p:txBody>
+          <a:bodyPr/>
+          <a:lstStyle/>
+          <a:p>
+            <a:r>
+              <a:t>Youth outreach. Youth outreach cost $36,791 in full in November: $21,079 paid by the State Department of Families grant, and $15,712 of shared costs no grant covers. It has spent 99.0% of its budget to date, with $380,952 left and 19 months to go. The full cost is $36,791 a month; $15,712 of it is shared cost the grant doesn't pay for. Worth asking for as much of it as the funder allows at renewal.</a:t>
+            </a:r>
+          </a:p>
+        </p:txBody>
+      </p:sp>
+      <p:sp>
+        <p:nvSpPr>
+          <p:cNvPr id="4" name="Slide Number Placeholder 3"/>
+          <p:cNvSpPr>
+            <a:spLocks noGrp="1"/>
+          </p:cNvSpPr>
+          <p:nvPr>
+            <p:ph type="sldNum" idx="5" sz="quarter"/>
+          </p:nvPr>
+        </p:nvSpPr>
+        <p:spPr/>
+      </p:sp>
+    </p:spTree>
+  </p:cSld>
+  <p:clrMapOvr>
+    <a:masterClrMapping/>
+  </p:clrMapOvr>
+</p:notes>
+</file>
+
+<file path=ppt/notesSlides/notesSlide5.xml><?xml version="1.0" encoding="utf-8"?>
+<p:notes xmlns:a="http://schemas.openxmlformats.org/drawingml/2006/main" xmlns:p="http://schemas.openxmlformats.org/presentationml/2006/main" xmlns:r="http://schemas.openxmlformats.org/officeDocument/2006/relationships">
+  <p:cSld>
+    <p:spTree>
+      <p:nvGrpSpPr>
+        <p:cNvPr id="1" name=""/>
+        <p:cNvGrpSpPr/>
+        <p:nvPr/>
+      </p:nvGrpSpPr>
+      <p:grpSpPr>
+        <a:xfrm>
+          <a:off x="0" y="0"/>
+          <a:ext cx="0" cy="0"/>
+          <a:chOff x="0" y="0"/>
+          <a:chExt cx="0" cy="0"/>
+        </a:xfrm>
+      </p:grpSpPr>
+      <p:sp>
+        <p:nvSpPr>
+          <p:cNvPr id="2" name="Slide Image Placeholder 1"/>
+          <p:cNvSpPr>
+            <a:spLocks noGrp="1"/>
+          </p:cNvSpPr>
+          <p:nvPr>
+            <p:ph type="sldImg" idx="2"/>
+          </p:nvPr>
+        </p:nvSpPr>
+        <p:spPr/>
+      </p:sp>
+      <p:sp>
+        <p:nvSpPr>
+          <p:cNvPr id="3" name="Notes Placeholder 2"/>
+          <p:cNvSpPr>
+            <a:spLocks noGrp="1"/>
+          </p:cNvSpPr>
+          <p:nvPr>
+            <p:ph type="body" idx="3" sz="quarter"/>
+          </p:nvPr>
+        </p:nvSpPr>
+        <p:spPr/>
+        <p:txBody>
+          <a:bodyPr/>
+          <a:lstStyle/>
+          <a:p>
+            <a:r>
+              <a:t>Emergency relief. Emergency relief cost $19,898 in full in November: $11,400 paid by the Federal community grant grant, and $8,498 of shared costs no grant covers. It has spent 99.7% of its budget to date (spending before October 2024 taken at budget), with $12,900 left and 1 months to go. The full cost is $19,898 a month; $8,498 of it is shared cost the grant doesn't pay for. Worth asking for as much of it as the funder allows at renewal.</a:t>
+            </a:r>
+          </a:p>
+        </p:txBody>
+      </p:sp>
+      <p:sp>
+        <p:nvSpPr>
+          <p:cNvPr id="4" name="Slide Number Placeholder 3"/>
+          <p:cNvSpPr>
+            <a:spLocks noGrp="1"/>
+          </p:cNvSpPr>
+          <p:nvPr>
+            <p:ph type="sldNum" idx="5" sz="quarter"/>
+          </p:nvPr>
+        </p:nvSpPr>
+        <p:spPr/>
+      </p:sp>
+    </p:spTree>
+  </p:cSld>
+  <p:clrMapOvr>
+    <a:masterClrMapping/>
+  </p:clrMapOvr>
+</p:notes>
+</file>
+
+<file path=ppt/notesSlides/notesSlide6.xml><?xml version="1.0" encoding="utf-8"?>
+<p:notes xmlns:a="http://schemas.openxmlformats.org/drawingml/2006/main" xmlns:p="http://schemas.openxmlformats.org/presentationml/2006/main" xmlns:r="http://schemas.openxmlformats.org/officeDocument/2006/relationships">
+  <p:cSld>
+    <p:spTree>
+      <p:nvGrpSpPr>
+        <p:cNvPr id="1" name=""/>
+        <p:cNvGrpSpPr/>
+        <p:nvPr/>
+      </p:nvGrpSpPr>
+      <p:grpSpPr>
+        <a:xfrm>
+          <a:off x="0" y="0"/>
+          <a:ext cx="0" cy="0"/>
+          <a:chOff x="0" y="0"/>
+          <a:chExt cx="0" cy="0"/>
+        </a:xfrm>
+      </p:grpSpPr>
+      <p:sp>
+        <p:nvSpPr>
+          <p:cNvPr id="2" name="Slide Image Placeholder 1"/>
+          <p:cNvSpPr>
+            <a:spLocks noGrp="1"/>
+          </p:cNvSpPr>
+          <p:nvPr>
+            <p:ph type="sldImg" idx="2"/>
+          </p:nvPr>
+        </p:nvSpPr>
+        <p:spPr/>
+      </p:sp>
+      <p:sp>
+        <p:nvSpPr>
+          <p:cNvPr id="3" name="Notes Placeholder 2"/>
+          <p:cNvSpPr>
+            <a:spLocks noGrp="1"/>
+          </p:cNvSpPr>
+          <p:nvPr>
+            <p:ph type="body" idx="3" sz="quarter"/>
+          </p:nvPr>
+        </p:nvSpPr>
+        <p:spPr/>
+        <p:txBody>
+          <a:bodyPr/>
+          <a:lstStyle/>
+          <a:p>
+            <a:r>
+              <a:t>Digital literacy. Digital literacy cost $8,003 in full in November: $4,585 paid by the Philanthropic foundation grant, and $3,418 of shared costs no grant covers. It has spent 97.5% of its budget to date, with $80,255 left and 16 months to go. The full cost is $8,003 a month; $3,418 of it is shared cost the grant doesn't pay for. Worth asking for as much of it as the funder allows at renewal.</a:t>
+            </a:r>
+          </a:p>
+        </p:txBody>
+      </p:sp>
+      <p:sp>
+        <p:nvSpPr>
+          <p:cNvPr id="4" name="Slide Number Placeholder 3"/>
+          <p:cNvSpPr>
+            <a:spLocks noGrp="1"/>
+          </p:cNvSpPr>
+          <p:nvPr>
+            <p:ph type="sldNum" idx="5" sz="quarter"/>
+          </p:nvPr>
+        </p:nvSpPr>
+        <p:spPr/>
+      </p:sp>
+    </p:spTree>
+  </p:cSld>
+  <p:clrMapOvr>
+    <a:masterClrMapping/>
+  </p:clrMapOvr>
+</p:notes>
+</file>
+
+<file path=ppt/notesSlides/notesSlide7.xml><?xml version="1.0" encoding="utf-8"?>
+<p:notes xmlns:a="http://schemas.openxmlformats.org/drawingml/2006/main" xmlns:p="http://schemas.openxmlformats.org/presentationml/2006/main" xmlns:r="http://schemas.openxmlformats.org/officeDocument/2006/relationships">
+  <p:cSld>
+    <p:spTree>
+      <p:nvGrpSpPr>
+        <p:cNvPr id="1" name=""/>
+        <p:cNvGrpSpPr/>
+        <p:nvPr/>
+      </p:nvGrpSpPr>
+      <p:grpSpPr>
+        <a:xfrm>
+          <a:off x="0" y="0"/>
+          <a:ext cx="0" cy="0"/>
+          <a:chOff x="0" y="0"/>
+          <a:chExt cx="0" cy="0"/>
+        </a:xfrm>
+      </p:grpSpPr>
+      <p:sp>
+        <p:nvSpPr>
+          <p:cNvPr id="2" name="Slide Image Placeholder 1"/>
+          <p:cNvSpPr>
+            <a:spLocks noGrp="1"/>
+          </p:cNvSpPr>
+          <p:nvPr>
+            <p:ph type="sldImg" idx="2"/>
+          </p:nvPr>
+        </p:nvSpPr>
+        <p:spPr/>
+      </p:sp>
+      <p:sp>
+        <p:nvSpPr>
+          <p:cNvPr id="3" name="Notes Placeholder 2"/>
+          <p:cNvSpPr>
+            <a:spLocks noGrp="1"/>
+          </p:cNvSpPr>
+          <p:nvPr>
+            <p:ph type="body" idx="3" sz="quarter"/>
+          </p:nvPr>
+        </p:nvSpPr>
+        <p:spPr/>
+        <p:txBody>
+          <a:bodyPr/>
+          <a:lstStyle/>
+          <a:p>
+            <a:r>
+              <a:t>Community meals (2025-26). Community meals (2025-26) cost $5,411 in full in November: $3,100 paid by the Local council community grant grant, and $2,311 of shared costs no grant covers. It has spent 93.8% of its budget to date, with $26,800 left and 7 months to go. The full cost is $5,411 a month; $2,311 of it is shared cost the grant doesn't pay for. Worth asking for as much of it as the funder allows at renewal.</a:t>
+            </a:r>
+          </a:p>
+        </p:txBody>
+      </p:sp>
+      <p:sp>
+        <p:nvSpPr>
+          <p:cNvPr id="4" name="Slide Number Placeholder 3"/>
+          <p:cNvSpPr>
+            <a:spLocks noGrp="1"/>
+          </p:cNvSpPr>
+          <p:nvPr>
+            <p:ph type="sldNum" idx="5" sz="quarter"/>
+          </p:nvPr>
+        </p:nvSpPr>
+        <p:spPr/>
+      </p:sp>
+    </p:spTree>
+  </p:cSld>
+  <p:clrMapOvr>
+    <a:masterClrMapping/>
+  </p:clrMapOvr>
+</p:notes>
 </file>
 
 <file path=ppt/slideLayouts/slideLayout1.xml><?xml version="1.0" encoding="utf-8"?>
@@ -3733,7 +5408,44 @@
       <p:grpSpPr/>
       <p:sp>
         <p:nvSpPr>
-          <p:cNvPr id="2" name="Rectangle 1"/>
+          <p:cNvPr id="2" name="Title 1"/>
+          <p:cNvSpPr>
+            <a:spLocks noGrp="1"/>
+          </p:cNvSpPr>
+          <p:nvPr>
+            <p:ph type="ctrTitle"/>
+          </p:nvPr>
+        </p:nvSpPr>
+        <p:spPr>
+          <a:xfrm>
+            <a:off x="457200" y="1965960"/>
+            <a:ext cx="11277295" cy="1097280"/>
+          </a:xfrm>
+        </p:spPr>
+        <p:txBody>
+          <a:bodyPr wrap="square"/>
+          <a:lstStyle/>
+          <a:p>
+            <a:pPr algn="l">
+              <a:defRPr>
+                <a:latin typeface="Roboto"/>
+              </a:defRPr>
+            </a:pPr>
+            <a:r>
+              <a:rPr sz="3400" b="1">
+                <a:solidFill>
+                  <a:srgbClr val="25342A"/>
+                </a:solidFill>
+                <a:latin typeface="Roboto"/>
+              </a:rPr>
+              <a:t>What does each program really cost?</a:t>
+            </a:r>
+          </a:p>
+        </p:txBody>
+      </p:sp>
+      <p:sp>
+        <p:nvSpPr>
+          <p:cNvPr id="3" name="Rectangle 2"/>
           <p:cNvSpPr/>
           <p:nvPr/>
         </p:nvSpPr>
@@ -3789,7 +5501,7 @@
       </p:sp>
       <p:sp>
         <p:nvSpPr>
-          <p:cNvPr id="3" name="TextBox 2"/>
+          <p:cNvPr id="4" name="TextBox 3"/>
           <p:cNvSpPr txBox="1"/>
           <p:nvPr/>
         </p:nvSpPr>
@@ -3804,7 +5516,7 @@
           <a:noFill/>
         </p:spPr>
         <p:txBody>
-          <a:bodyPr wrap="square">
+          <a:bodyPr wrap="square" lIns="45720" rIns="45720">
             <a:spAutoFit/>
           </a:bodyPr>
           <a:lstStyle/>
@@ -3828,7 +5540,7 @@
       </p:sp>
       <p:sp>
         <p:nvSpPr>
-          <p:cNvPr id="4" name="TextBox 3"/>
+          <p:cNvPr id="5" name="TextBox 4"/>
           <p:cNvSpPr txBox="1"/>
           <p:nvPr/>
         </p:nvSpPr>
@@ -3843,7 +5555,7 @@
           <a:noFill/>
         </p:spPr>
         <p:txBody>
-          <a:bodyPr wrap="square">
+          <a:bodyPr wrap="square" lIns="45720" rIns="45720">
             <a:spAutoFit/>
           </a:bodyPr>
           <a:lstStyle/>
@@ -3867,14 +5579,14 @@
       </p:sp>
       <p:sp>
         <p:nvSpPr>
-          <p:cNvPr id="5" name="TextBox 4"/>
+          <p:cNvPr id="6" name="TextBox 5"/>
           <p:cNvSpPr txBox="1"/>
           <p:nvPr/>
         </p:nvSpPr>
         <p:spPr>
           <a:xfrm>
-            <a:off x="457200" y="2011680"/>
-            <a:ext cx="11247120" cy="1097280"/>
+            <a:off x="457200" y="3154680"/>
+            <a:ext cx="11277295" cy="457200"/>
           </a:xfrm>
           <a:prstGeom prst="rect">
             <a:avLst/>
@@ -3882,7 +5594,7 @@
           <a:noFill/>
         </p:spPr>
         <p:txBody>
-          <a:bodyPr wrap="square">
+          <a:bodyPr wrap="square" lIns="45720" rIns="45720">
             <a:spAutoFit/>
           </a:bodyPr>
           <a:lstStyle/>
@@ -3893,27 +5605,27 @@
               </a:defRPr>
             </a:pPr>
             <a:r>
-              <a:rPr sz="3400" b="1">
+              <a:rPr sz="1600" b="0">
                 <a:solidFill>
-                  <a:srgbClr val="25342A"/>
+                  <a:srgbClr val="5F6F63"/>
                 </a:solidFill>
                 <a:latin typeface="Roboto"/>
               </a:rPr>
-              <a:t>What does each program really cost?</a:t>
-            </a:r>
-          </a:p>
-        </p:txBody>
-      </p:sp>
-      <p:sp>
-        <p:nvSpPr>
-          <p:cNvPr id="6" name="TextBox 5"/>
+              <a:t>Sample Community Services Ltd</a:t>
+            </a:r>
+          </a:p>
+        </p:txBody>
+      </p:sp>
+      <p:sp>
+        <p:nvSpPr>
+          <p:cNvPr id="7" name="TextBox 6"/>
           <p:cNvSpPr txBox="1"/>
           <p:nvPr/>
         </p:nvSpPr>
         <p:spPr>
           <a:xfrm>
-            <a:off x="457200" y="3154680"/>
-            <a:ext cx="11247120" cy="457200"/>
+            <a:off x="457200" y="3703320"/>
+            <a:ext cx="11277295" cy="535940"/>
           </a:xfrm>
           <a:prstGeom prst="rect">
             <a:avLst/>
@@ -3921,7 +5633,7 @@
           <a:noFill/>
         </p:spPr>
         <p:txBody>
-          <a:bodyPr wrap="square">
+          <a:bodyPr wrap="square" lIns="45720" rIns="45720">
             <a:spAutoFit/>
           </a:bodyPr>
           <a:lstStyle/>
@@ -3932,27 +5644,27 @@
               </a:defRPr>
             </a:pPr>
             <a:r>
-              <a:rPr sz="1600" b="0">
+              <a:rPr sz="1400" b="0">
                 <a:solidFill>
-                  <a:srgbClr val="5F6F63"/>
+                  <a:srgbClr val="25342A"/>
                 </a:solidFill>
                 <a:latin typeface="Roboto"/>
               </a:rPr>
-              <a:t>Sample Community Services Ltd</a:t>
-            </a:r>
-          </a:p>
-        </p:txBody>
-      </p:sp>
-      <p:sp>
-        <p:nvSpPr>
-          <p:cNvPr id="7" name="TextBox 6"/>
+              <a:t>Period: November 2025. Each program's full cost: what its grant pays for, plus its fair share of the costs no single grant covers (untied program costs and administration, shared by grant spending). Pick a program and every chart and note follows it.</a:t>
+            </a:r>
+          </a:p>
+        </p:txBody>
+      </p:sp>
+      <p:sp>
+        <p:nvSpPr>
+          <p:cNvPr id="8" name="TextBox 7"/>
           <p:cNvSpPr txBox="1"/>
           <p:nvPr/>
         </p:nvSpPr>
         <p:spPr>
           <a:xfrm>
-            <a:off x="457200" y="3703320"/>
-            <a:ext cx="11247120" cy="1097280"/>
+            <a:off x="457200" y="4330700"/>
+            <a:ext cx="11277295" cy="1097280"/>
           </a:xfrm>
           <a:prstGeom prst="rect">
             <a:avLst/>
@@ -3960,7 +5672,7 @@
           <a:noFill/>
         </p:spPr>
         <p:txBody>
-          <a:bodyPr wrap="square">
+          <a:bodyPr wrap="square" lIns="45720" rIns="45720">
             <a:spAutoFit/>
           </a:bodyPr>
           <a:lstStyle/>
@@ -3971,27 +5683,75 @@
               </a:defRPr>
             </a:pPr>
             <a:r>
-              <a:rPr sz="1400" b="0">
+              <a:rPr sz="1100" b="0">
                 <a:solidFill>
-                  <a:srgbClr val="25342A"/>
+                  <a:srgbClr val="5F6F63"/>
                 </a:solidFill>
                 <a:latin typeface="Roboto"/>
               </a:rPr>
-              <a:t>Period: November 2025. Each program's full cost: what its grant pays for, plus its fair share of the costs no single grant covers (untied program costs and administration, shared by grant spending). Pick a program and every chart and note follows it.</a:t>
-            </a:r>
-          </a:p>
-        </p:txBody>
-      </p:sp>
-      <p:sp>
-        <p:nvSpPr>
-          <p:cNvPr id="8" name="TextBox 7"/>
+              <a:t>How final is this data?</a:t>
+            </a:r>
+          </a:p>
+          <a:p>
+            <a:pPr>
+              <a:defRPr>
+                <a:latin typeface="Roboto"/>
+              </a:defRPr>
+            </a:pPr>
+            <a:r>
+              <a:rPr sz="1100" b="0">
+                <a:solidFill>
+                  <a:srgbClr val="5F6F63"/>
+                </a:solidFill>
+                <a:latin typeface="Roboto"/>
+              </a:rPr>
+              <a:t>October 2025: Locked. October 2025 is locked (closed 4 Nov 2025). These numbers won't change.</a:t>
+            </a:r>
+          </a:p>
+          <a:p>
+            <a:pPr>
+              <a:defRPr>
+                <a:latin typeface="Roboto"/>
+              </a:defRPr>
+            </a:pPr>
+            <a:r>
+              <a:rPr sz="1100" b="0">
+                <a:solidFill>
+                  <a:srgbClr val="5F6F63"/>
+                </a:solidFill>
+                <a:latin typeface="Roboto"/>
+              </a:rPr>
+              <a:t>November 2025: Locked. November 2025 is locked (closed 2 Dec 2025). These numbers won't change.</a:t>
+            </a:r>
+          </a:p>
+          <a:p>
+            <a:pPr>
+              <a:defRPr>
+                <a:latin typeface="Roboto"/>
+              </a:defRPr>
+            </a:pPr>
+            <a:r>
+              <a:rPr sz="1100" b="0">
+                <a:solidFill>
+                  <a:srgbClr val="5F6F63"/>
+                </a:solidFill>
+                <a:latin typeface="Roboto"/>
+              </a:rPr>
+              <a:t>October 2026: Incomplete. October 2026 is still in progress: figures to 6 Oct only.</a:t>
+            </a:r>
+          </a:p>
+        </p:txBody>
+      </p:sp>
+      <p:sp>
+        <p:nvSpPr>
+          <p:cNvPr id="9" name="TextBox 8"/>
           <p:cNvSpPr txBox="1"/>
           <p:nvPr/>
         </p:nvSpPr>
         <p:spPr>
           <a:xfrm>
-            <a:off x="457200" y="4937760"/>
-            <a:ext cx="11247120" cy="1097280"/>
+            <a:off x="457200" y="6492240"/>
+            <a:ext cx="2926080" cy="274320"/>
           </a:xfrm>
           <a:prstGeom prst="rect">
             <a:avLst/>
@@ -3999,7 +5759,7 @@
           <a:noFill/>
         </p:spPr>
         <p:txBody>
-          <a:bodyPr wrap="square">
+          <a:bodyPr wrap="square" lIns="45720" rIns="45720">
             <a:spAutoFit/>
           </a:bodyPr>
           <a:lstStyle/>
@@ -4010,75 +5770,27 @@
               </a:defRPr>
             </a:pPr>
             <a:r>
-              <a:rPr sz="1100" b="0">
+              <a:rPr sz="900" b="0">
                 <a:solidFill>
                   <a:srgbClr val="5F6F63"/>
                 </a:solidFill>
                 <a:latin typeface="Roboto"/>
               </a:rPr>
-              <a:t>How final is this data?</a:t>
-            </a:r>
-          </a:p>
-          <a:p>
-            <a:pPr>
-              <a:defRPr>
-                <a:latin typeface="Roboto"/>
-              </a:defRPr>
-            </a:pPr>
-            <a:r>
-              <a:rPr sz="1100" b="0">
-                <a:solidFill>
-                  <a:srgbClr val="5F6F63"/>
-                </a:solidFill>
-                <a:latin typeface="Roboto"/>
-              </a:rPr>
-              <a:t>October 2025: Locked. October 2025 is locked (closed 4 Nov 2025). These numbers won't change.</a:t>
-            </a:r>
-          </a:p>
-          <a:p>
-            <a:pPr>
-              <a:defRPr>
-                <a:latin typeface="Roboto"/>
-              </a:defRPr>
-            </a:pPr>
-            <a:r>
-              <a:rPr sz="1100" b="0">
-                <a:solidFill>
-                  <a:srgbClr val="5F6F63"/>
-                </a:solidFill>
-                <a:latin typeface="Roboto"/>
-              </a:rPr>
-              <a:t>November 2025: Locked. November 2025 is locked (closed 2 Dec 2025). These numbers won't change.</a:t>
-            </a:r>
-          </a:p>
-          <a:p>
-            <a:pPr>
-              <a:defRPr>
-                <a:latin typeface="Roboto"/>
-              </a:defRPr>
-            </a:pPr>
-            <a:r>
-              <a:rPr sz="1100" b="0">
-                <a:solidFill>
-                  <a:srgbClr val="5F6F63"/>
-                </a:solidFill>
-                <a:latin typeface="Roboto"/>
-              </a:rPr>
-              <a:t>October 2026: Incomplete. October 2026 is still in progress: figures to 6 Oct only.</a:t>
-            </a:r>
-          </a:p>
-        </p:txBody>
-      </p:sp>
-      <p:sp>
-        <p:nvSpPr>
-          <p:cNvPr id="9" name="TextBox 8"/>
+              <a:t>program-cost.pptx</a:t>
+            </a:r>
+          </a:p>
+        </p:txBody>
+      </p:sp>
+      <p:sp>
+        <p:nvSpPr>
+          <p:cNvPr id="10" name="TextBox 9"/>
           <p:cNvSpPr txBox="1"/>
           <p:nvPr/>
         </p:nvSpPr>
         <p:spPr>
           <a:xfrm>
-            <a:off x="457200" y="6492240"/>
-            <a:ext cx="3657600" cy="274320"/>
+            <a:off x="3108960" y="6492240"/>
+            <a:ext cx="5943600" cy="274320"/>
           </a:xfrm>
           <a:prstGeom prst="rect">
             <a:avLst/>
@@ -4086,12 +5798,12 @@
           <a:noFill/>
         </p:spPr>
         <p:txBody>
-          <a:bodyPr wrap="square">
+          <a:bodyPr wrap="square" lIns="45720" rIns="45720">
             <a:spAutoFit/>
           </a:bodyPr>
           <a:lstStyle/>
           <a:p>
-            <a:pPr>
+            <a:pPr algn="ctr">
               <a:defRPr>
                 <a:latin typeface="Roboto"/>
               </a:defRPr>
@@ -4103,21 +5815,21 @@
                 </a:solidFill>
                 <a:latin typeface="Roboto"/>
               </a:rPr>
-              <a:t>program-cost.pptx</a:t>
-            </a:r>
-          </a:p>
-        </p:txBody>
-      </p:sp>
-      <p:sp>
-        <p:nvSpPr>
-          <p:cNvPr id="10" name="TextBox 9"/>
+              <a:t>Data retrieved 2pm, Tue 6 Oct 2026 · Generated 8 Oct 2026, 9:35am · Sample data · Made with Python (python-pptx)</a:t>
+            </a:r>
+          </a:p>
+        </p:txBody>
+      </p:sp>
+      <p:sp>
+        <p:nvSpPr>
+          <p:cNvPr id="11" name="TextBox 10"/>
           <p:cNvSpPr txBox="1"/>
           <p:nvPr/>
         </p:nvSpPr>
         <p:spPr>
           <a:xfrm>
-            <a:off x="4297680" y="6492240"/>
-            <a:ext cx="3657600" cy="274320"/>
+            <a:off x="8503920" y="6492240"/>
+            <a:ext cx="3200400" cy="274320"/>
           </a:xfrm>
           <a:prstGeom prst="rect">
             <a:avLst/>
@@ -4125,12 +5837,12 @@
           <a:noFill/>
         </p:spPr>
         <p:txBody>
-          <a:bodyPr wrap="square">
+          <a:bodyPr wrap="square" lIns="45720" rIns="45720">
             <a:spAutoFit/>
           </a:bodyPr>
           <a:lstStyle/>
           <a:p>
-            <a:pPr algn="ctr">
+            <a:pPr algn="r">
               <a:defRPr>
                 <a:latin typeface="Roboto"/>
               </a:defRPr>
@@ -4142,363 +5854,7 @@
                 </a:solidFill>
                 <a:latin typeface="Roboto"/>
               </a:rPr>
-              <a:t>Data retrieved 2pm, Tue 6 Oct 2026 · Sample data</a:t>
-            </a:r>
-          </a:p>
-        </p:txBody>
-      </p:sp>
-      <p:sp>
-        <p:nvSpPr>
-          <p:cNvPr id="11" name="TextBox 10"/>
-          <p:cNvSpPr txBox="1"/>
-          <p:nvPr/>
-        </p:nvSpPr>
-        <p:spPr>
-          <a:xfrm>
-            <a:off x="8503920" y="6492240"/>
-            <a:ext cx="3200400" cy="274320"/>
-          </a:xfrm>
-          <a:prstGeom prst="rect">
-            <a:avLst/>
-          </a:prstGeom>
-          <a:noFill/>
-        </p:spPr>
-        <p:txBody>
-          <a:bodyPr wrap="square">
-            <a:spAutoFit/>
-          </a:bodyPr>
-          <a:lstStyle/>
-          <a:p>
-            <a:pPr algn="r">
-              <a:defRPr>
-                <a:latin typeface="Roboto"/>
-              </a:defRPr>
-            </a:pPr>
-            <a:r>
-              <a:rPr sz="900" b="0">
-                <a:solidFill>
-                  <a:srgbClr val="5F6F63"/>
-                </a:solidFill>
-                <a:latin typeface="Roboto"/>
-              </a:rPr>
-              <a:t>Slide 1 of 10</a:t>
-            </a:r>
-          </a:p>
-        </p:txBody>
-      </p:sp>
-    </p:spTree>
-  </p:cSld>
-  <p:clrMapOvr>
-    <a:masterClrMapping/>
-  </p:clrMapOvr>
-</p:sld>
-</file>
-
-<file path=ppt/slides/slide10.xml><?xml version="1.0" encoding="utf-8"?>
-<p:sld xmlns:a="http://schemas.openxmlformats.org/drawingml/2006/main" xmlns:p="http://schemas.openxmlformats.org/presentationml/2006/main" xmlns:r="http://schemas.openxmlformats.org/officeDocument/2006/relationships">
-  <p:cSld>
-    <p:spTree>
-      <p:nvGrpSpPr>
-        <p:cNvPr id="1" name=""/>
-        <p:cNvGrpSpPr/>
-        <p:nvPr/>
-      </p:nvGrpSpPr>
-      <p:grpSpPr/>
-      <p:sp>
-        <p:nvSpPr>
-          <p:cNvPr id="2" name="Rectangle 1"/>
-          <p:cNvSpPr/>
-          <p:nvPr/>
-        </p:nvSpPr>
-        <p:spPr>
-          <a:xfrm>
-            <a:off x="0" y="0"/>
-            <a:ext cx="12191695" cy="73152"/>
-          </a:xfrm>
-          <a:prstGeom prst="rect">
-            <a:avLst/>
-          </a:prstGeom>
-          <a:solidFill>
-            <a:srgbClr val="2F7A5D"/>
-          </a:solidFill>
-          <a:ln>
-            <a:noFill/>
-          </a:ln>
-        </p:spPr>
-        <p:style>
-          <a:lnRef idx="1">
-            <a:schemeClr val="accent1"/>
-          </a:lnRef>
-          <a:fillRef idx="3">
-            <a:schemeClr val="accent1"/>
-          </a:fillRef>
-          <a:effectRef idx="2">
-            <a:schemeClr val="accent1"/>
-          </a:effectRef>
-          <a:fontRef idx="minor">
-            <a:schemeClr val="lt1"/>
-          </a:fontRef>
-        </p:style>
-        <p:txBody>
-          <a:bodyPr rtlCol="0" anchor="ctr"/>
-          <a:lstStyle/>
-          <a:p>
-            <a:pPr algn="ctr">
-              <a:defRPr>
-                <a:latin typeface="Roboto"/>
-              </a:defRPr>
-            </a:pPr>
-          </a:p>
-        </p:txBody>
-      </p:sp>
-      <p:sp>
-        <p:nvSpPr>
-          <p:cNvPr id="3" name="TextBox 2"/>
-          <p:cNvSpPr txBox="1"/>
-          <p:nvPr/>
-        </p:nvSpPr>
-        <p:spPr>
-          <a:xfrm>
-            <a:off x="457200" y="164592"/>
-            <a:ext cx="7315200" cy="274320"/>
-          </a:xfrm>
-          <a:prstGeom prst="rect">
-            <a:avLst/>
-          </a:prstGeom>
-          <a:noFill/>
-        </p:spPr>
-        <p:txBody>
-          <a:bodyPr wrap="square">
-            <a:spAutoFit/>
-          </a:bodyPr>
-          <a:lstStyle/>
-          <a:p>
-            <a:pPr>
-              <a:defRPr>
-                <a:latin typeface="Roboto"/>
-              </a:defRPr>
-            </a:pPr>
-            <a:r>
-              <a:rPr sz="1000" b="0">
-                <a:solidFill>
-                  <a:srgbClr val="5F6F63"/>
-                </a:solidFill>
-                <a:latin typeface="Roboto"/>
-              </a:rPr>
-              <a:t>Sample Community Services Ltd · What does each program really cost?</a:t>
-            </a:r>
-          </a:p>
-        </p:txBody>
-      </p:sp>
-      <p:sp>
-        <p:nvSpPr>
-          <p:cNvPr id="4" name="TextBox 3"/>
-          <p:cNvSpPr txBox="1"/>
-          <p:nvPr/>
-        </p:nvSpPr>
-        <p:spPr>
-          <a:xfrm>
-            <a:off x="457200" y="411480"/>
-            <a:ext cx="11247120" cy="548640"/>
-          </a:xfrm>
-          <a:prstGeom prst="rect">
-            <a:avLst/>
-          </a:prstGeom>
-          <a:noFill/>
-        </p:spPr>
-        <p:txBody>
-          <a:bodyPr wrap="square">
-            <a:spAutoFit/>
-          </a:bodyPr>
-          <a:lstStyle/>
-          <a:p>
-            <a:pPr>
-              <a:defRPr>
-                <a:latin typeface="Roboto"/>
-              </a:defRPr>
-            </a:pPr>
-            <a:r>
-              <a:rPr sz="2400" b="1">
-                <a:solidFill>
-                  <a:srgbClr val="25342A"/>
-                </a:solidFill>
-                <a:latin typeface="Roboto"/>
-              </a:rPr>
-              <a:t>Grant spending, by month · Spend $ · Every program at once</a:t>
-            </a:r>
-          </a:p>
-        </p:txBody>
-      </p:sp>
-      <p:sp>
-        <p:nvSpPr>
-          <p:cNvPr id="5" name="TextBox 4"/>
-          <p:cNvSpPr txBox="1"/>
-          <p:nvPr/>
-        </p:nvSpPr>
-        <p:spPr>
-          <a:xfrm>
-            <a:off x="457200" y="960120"/>
-            <a:ext cx="11247120" cy="457200"/>
-          </a:xfrm>
-          <a:prstGeom prst="rect">
-            <a:avLst/>
-          </a:prstGeom>
-          <a:noFill/>
-        </p:spPr>
-        <p:txBody>
-          <a:bodyPr wrap="square">
-            <a:spAutoFit/>
-          </a:bodyPr>
-          <a:lstStyle/>
-          <a:p>
-            <a:pPr>
-              <a:defRPr>
-                <a:latin typeface="Roboto"/>
-              </a:defRPr>
-            </a:pPr>
-            <a:r>
-              <a:rPr sz="1200" b="0">
-                <a:solidFill>
-                  <a:srgbClr val="5F6F63"/>
-                </a:solidFill>
-                <a:latin typeface="Roboto"/>
-              </a:rPr>
-              <a:t>Grant spending only (the program's direct cost). All programs includes grants that have finished.</a:t>
-            </a:r>
-          </a:p>
-        </p:txBody>
-      </p:sp>
-      <p:graphicFrame>
-        <p:nvGraphicFramePr>
-          <p:cNvPr id="6" name="Chart 5"/>
-          <p:cNvGraphicFramePr>
-            <a:graphicFrameLocks noGrp="1"/>
-          </p:cNvGraphicFramePr>
-          <p:nvPr/>
-        </p:nvGraphicFramePr>
-        <p:xfrm>
-          <a:off x="457200" y="1463040"/>
-          <a:ext cx="11247120" cy="4754880"/>
-        </p:xfrm>
-        <a:graphic>
-          <a:graphicData uri="http://schemas.openxmlformats.org/drawingml/2006/chart">
-            <c:chart xmlns:c="http://schemas.openxmlformats.org/drawingml/2006/chart" r:id="rId2"/>
-          </a:graphicData>
-        </a:graphic>
-      </p:graphicFrame>
-      <p:sp>
-        <p:nvSpPr>
-          <p:cNvPr id="7" name="TextBox 6"/>
-          <p:cNvSpPr txBox="1"/>
-          <p:nvPr/>
-        </p:nvSpPr>
-        <p:spPr>
-          <a:xfrm>
-            <a:off x="457200" y="6492240"/>
-            <a:ext cx="3657600" cy="274320"/>
-          </a:xfrm>
-          <a:prstGeom prst="rect">
-            <a:avLst/>
-          </a:prstGeom>
-          <a:noFill/>
-        </p:spPr>
-        <p:txBody>
-          <a:bodyPr wrap="square">
-            <a:spAutoFit/>
-          </a:bodyPr>
-          <a:lstStyle/>
-          <a:p>
-            <a:pPr>
-              <a:defRPr>
-                <a:latin typeface="Roboto"/>
-              </a:defRPr>
-            </a:pPr>
-            <a:r>
-              <a:rPr sz="900" b="0">
-                <a:solidFill>
-                  <a:srgbClr val="5F6F63"/>
-                </a:solidFill>
-                <a:latin typeface="Roboto"/>
-              </a:rPr>
-              <a:t>program-cost.pptx</a:t>
-            </a:r>
-          </a:p>
-        </p:txBody>
-      </p:sp>
-      <p:sp>
-        <p:nvSpPr>
-          <p:cNvPr id="8" name="TextBox 7"/>
-          <p:cNvSpPr txBox="1"/>
-          <p:nvPr/>
-        </p:nvSpPr>
-        <p:spPr>
-          <a:xfrm>
-            <a:off x="4297680" y="6492240"/>
-            <a:ext cx="3657600" cy="274320"/>
-          </a:xfrm>
-          <a:prstGeom prst="rect">
-            <a:avLst/>
-          </a:prstGeom>
-          <a:noFill/>
-        </p:spPr>
-        <p:txBody>
-          <a:bodyPr wrap="square">
-            <a:spAutoFit/>
-          </a:bodyPr>
-          <a:lstStyle/>
-          <a:p>
-            <a:pPr algn="ctr">
-              <a:defRPr>
-                <a:latin typeface="Roboto"/>
-              </a:defRPr>
-            </a:pPr>
-            <a:r>
-              <a:rPr sz="900" b="0">
-                <a:solidFill>
-                  <a:srgbClr val="5F6F63"/>
-                </a:solidFill>
-                <a:latin typeface="Roboto"/>
-              </a:rPr>
-              <a:t>Data retrieved 2pm, Tue 6 Oct 2026 · Sample data</a:t>
-            </a:r>
-          </a:p>
-        </p:txBody>
-      </p:sp>
-      <p:sp>
-        <p:nvSpPr>
-          <p:cNvPr id="9" name="TextBox 8"/>
-          <p:cNvSpPr txBox="1"/>
-          <p:nvPr/>
-        </p:nvSpPr>
-        <p:spPr>
-          <a:xfrm>
-            <a:off x="8503920" y="6492240"/>
-            <a:ext cx="3200400" cy="274320"/>
-          </a:xfrm>
-          <a:prstGeom prst="rect">
-            <a:avLst/>
-          </a:prstGeom>
-          <a:noFill/>
-        </p:spPr>
-        <p:txBody>
-          <a:bodyPr wrap="square">
-            <a:spAutoFit/>
-          </a:bodyPr>
-          <a:lstStyle/>
-          <a:p>
-            <a:pPr algn="r">
-              <a:defRPr>
-                <a:latin typeface="Roboto"/>
-              </a:defRPr>
-            </a:pPr>
-            <a:r>
-              <a:rPr sz="900" b="0">
-                <a:solidFill>
-                  <a:srgbClr val="5F6F63"/>
-                </a:solidFill>
-                <a:latin typeface="Roboto"/>
-              </a:rPr>
-              <a:t>Slide 10 of 10</a:t>
+              <a:t>Slide 1 of 7</a:t>
             </a:r>
           </a:p>
         </p:txBody>
@@ -4523,7 +5879,44 @@
       <p:grpSpPr/>
       <p:sp>
         <p:nvSpPr>
-          <p:cNvPr id="2" name="Rectangle 1"/>
+          <p:cNvPr id="2" name="Title 1"/>
+          <p:cNvSpPr>
+            <a:spLocks noGrp="1"/>
+          </p:cNvSpPr>
+          <p:nvPr>
+            <p:ph type="title"/>
+          </p:nvPr>
+        </p:nvSpPr>
+        <p:spPr>
+          <a:xfrm>
+            <a:off x="457200" y="384048"/>
+            <a:ext cx="11277295" cy="475488"/>
+          </a:xfrm>
+        </p:spPr>
+        <p:txBody>
+          <a:bodyPr wrap="square" lIns="45720" rIns="45720" tIns="0" bIns="0" anchor="t"/>
+          <a:lstStyle/>
+          <a:p>
+            <a:pPr algn="l">
+              <a:defRPr>
+                <a:latin typeface="Roboto"/>
+              </a:defRPr>
+            </a:pPr>
+            <a:r>
+              <a:rPr sz="2400" b="1">
+                <a:solidFill>
+                  <a:srgbClr val="25342A"/>
+                </a:solidFill>
+                <a:latin typeface="Roboto"/>
+              </a:rPr>
+              <a:t>All programs</a:t>
+            </a:r>
+          </a:p>
+        </p:txBody>
+      </p:sp>
+      <p:sp>
+        <p:nvSpPr>
+          <p:cNvPr id="3" name="Rectangle 2"/>
           <p:cNvSpPr/>
           <p:nvPr/>
         </p:nvSpPr>
@@ -4570,14 +5963,14 @@
       </p:sp>
       <p:sp>
         <p:nvSpPr>
-          <p:cNvPr id="3" name="TextBox 2"/>
+          <p:cNvPr id="4" name="TextBox 3"/>
           <p:cNvSpPr txBox="1"/>
           <p:nvPr/>
         </p:nvSpPr>
         <p:spPr>
           <a:xfrm>
-            <a:off x="457200" y="164592"/>
-            <a:ext cx="7315200" cy="274320"/>
+            <a:off x="457200" y="146304"/>
+            <a:ext cx="8229600" cy="256032"/>
           </a:xfrm>
           <a:prstGeom prst="rect">
             <a:avLst/>
@@ -4585,7 +5978,7 @@
           <a:noFill/>
         </p:spPr>
         <p:txBody>
-          <a:bodyPr wrap="square">
+          <a:bodyPr wrap="square" lIns="45720" rIns="45720">
             <a:spAutoFit/>
           </a:bodyPr>
           <a:lstStyle/>
@@ -4609,14 +6002,14 @@
       </p:sp>
       <p:sp>
         <p:nvSpPr>
-          <p:cNvPr id="4" name="TextBox 3"/>
+          <p:cNvPr id="5" name="TextBox 4"/>
           <p:cNvSpPr txBox="1"/>
           <p:nvPr/>
         </p:nvSpPr>
         <p:spPr>
           <a:xfrm>
-            <a:off x="457200" y="411480"/>
-            <a:ext cx="11247120" cy="548640"/>
+            <a:off x="457200" y="914400"/>
+            <a:ext cx="11277295" cy="263652"/>
           </a:xfrm>
           <a:prstGeom prst="rect">
             <a:avLst/>
@@ -4624,7 +6017,7 @@
           <a:noFill/>
         </p:spPr>
         <p:txBody>
-          <a:bodyPr wrap="square">
+          <a:bodyPr wrap="square" lIns="45720" rIns="45720">
             <a:spAutoFit/>
           </a:bodyPr>
           <a:lstStyle/>
@@ -4635,45 +6028,94 @@
               </a:defRPr>
             </a:pPr>
             <a:r>
-              <a:rPr sz="2400" b="1">
+              <a:rPr sz="1200" b="0">
                 <a:solidFill>
-                  <a:srgbClr val="25342A"/>
+                  <a:srgbClr val="5F6F63"/>
                 </a:solidFill>
                 <a:latin typeface="Roboto"/>
               </a:rPr>
-              <a:t>Full cost of each program, November 2025 · $ · Program: All programs</a:t>
+              <a:t>Full cost of each program, November 2025</a:t>
             </a:r>
           </a:p>
         </p:txBody>
       </p:sp>
       <p:graphicFrame>
         <p:nvGraphicFramePr>
-          <p:cNvPr id="5" name="Chart 4"/>
+          <p:cNvPr id="6" name="Chart 5"/>
           <p:cNvGraphicFramePr>
             <a:graphicFrameLocks noGrp="1"/>
           </p:cNvGraphicFramePr>
           <p:nvPr/>
         </p:nvGraphicFramePr>
         <p:xfrm>
-          <a:off x="457200" y="1188720"/>
-          <a:ext cx="11247120" cy="5029200"/>
+          <a:off x="457200" y="1278636"/>
+          <a:ext cx="11277295" cy="2651760"/>
         </p:xfrm>
         <a:graphic>
           <a:graphicData uri="http://schemas.openxmlformats.org/drawingml/2006/chart">
-            <c:chart xmlns:c="http://schemas.openxmlformats.org/drawingml/2006/chart" r:id="rId2"/>
+            <c:chart xmlns:c="http://schemas.openxmlformats.org/drawingml/2006/chart" r:id="rId3"/>
           </a:graphicData>
         </a:graphic>
       </p:graphicFrame>
       <p:sp>
         <p:nvSpPr>
-          <p:cNvPr id="6" name="TextBox 5"/>
+          <p:cNvPr id="7" name="Rectangle 6"/>
+          <p:cNvSpPr/>
+          <p:nvPr/>
+        </p:nvSpPr>
+        <p:spPr>
+          <a:xfrm>
+            <a:off x="457200" y="4021836"/>
+            <a:ext cx="5501487" cy="1295400"/>
+          </a:xfrm>
+          <a:prstGeom prst="rect">
+            <a:avLst/>
+          </a:prstGeom>
+          <a:solidFill>
+            <a:srgbClr val="FFFFFF"/>
+          </a:solidFill>
+          <a:ln>
+            <a:solidFill>
+              <a:srgbClr val="DCE8DC"/>
+            </a:solidFill>
+          </a:ln>
+        </p:spPr>
+        <p:style>
+          <a:lnRef idx="1">
+            <a:schemeClr val="accent1"/>
+          </a:lnRef>
+          <a:fillRef idx="3">
+            <a:schemeClr val="accent1"/>
+          </a:fillRef>
+          <a:effectRef idx="2">
+            <a:schemeClr val="accent1"/>
+          </a:effectRef>
+          <a:fontRef idx="minor">
+            <a:schemeClr val="lt1"/>
+          </a:fontRef>
+        </p:style>
+        <p:txBody>
+          <a:bodyPr rtlCol="0" anchor="ctr"/>
+          <a:lstStyle/>
+          <a:p>
+            <a:pPr algn="ctr">
+              <a:defRPr>
+                <a:latin typeface="Roboto"/>
+              </a:defRPr>
+            </a:pPr>
+          </a:p>
+        </p:txBody>
+      </p:sp>
+      <p:sp>
+        <p:nvSpPr>
+          <p:cNvPr id="8" name="TextBox 7"/>
           <p:cNvSpPr txBox="1"/>
           <p:nvPr/>
         </p:nvSpPr>
         <p:spPr>
           <a:xfrm>
-            <a:off x="457200" y="6492240"/>
-            <a:ext cx="3657600" cy="274320"/>
+            <a:off x="594360" y="4076700"/>
+            <a:ext cx="5227167" cy="274320"/>
           </a:xfrm>
           <a:prstGeom prst="rect">
             <a:avLst/>
@@ -4681,7 +6123,212 @@
           <a:noFill/>
         </p:spPr>
         <p:txBody>
-          <a:bodyPr wrap="square">
+          <a:bodyPr wrap="square" lIns="45720" rIns="45720">
+            <a:spAutoFit/>
+          </a:bodyPr>
+          <a:lstStyle/>
+          <a:p>
+            <a:pPr>
+              <a:defRPr>
+                <a:latin typeface="Roboto"/>
+              </a:defRPr>
+            </a:pPr>
+            <a:r>
+              <a:rPr sz="1000" b="1">
+                <a:solidFill>
+                  <a:srgbClr val="5F6F63"/>
+                </a:solidFill>
+                <a:latin typeface="Roboto"/>
+              </a:rPr>
+              <a:t>WHAT IT SHOWS</a:t>
+            </a:r>
+          </a:p>
+        </p:txBody>
+      </p:sp>
+      <p:sp>
+        <p:nvSpPr>
+          <p:cNvPr id="9" name="TextBox 8"/>
+          <p:cNvSpPr txBox="1"/>
+          <p:nvPr/>
+        </p:nvSpPr>
+        <p:spPr>
+          <a:xfrm>
+            <a:off x="594360" y="4351020"/>
+            <a:ext cx="5227167" cy="929640"/>
+          </a:xfrm>
+          <a:prstGeom prst="rect">
+            <a:avLst/>
+          </a:prstGeom>
+          <a:noFill/>
+        </p:spPr>
+        <p:txBody>
+          <a:bodyPr wrap="square" lIns="45720" rIns="45720">
+            <a:spAutoFit/>
+          </a:bodyPr>
+          <a:lstStyle/>
+          <a:p>
+            <a:pPr>
+              <a:defRPr>
+                <a:latin typeface="Roboto"/>
+              </a:defRPr>
+            </a:pPr>
+            <a:r>
+              <a:rPr sz="1200" b="0">
+                <a:solidFill>
+                  <a:srgbClr val="25342A"/>
+                </a:solidFill>
+                <a:latin typeface="Roboto"/>
+              </a:rPr>
+              <a:t>Housing support (2025) is the biggest program: $52,362 in November once its share of untied program costs and administration is added to $30,000 of grant spending. Shared costs add 74.5% on top of grant spending across all programs.</a:t>
+            </a:r>
+          </a:p>
+        </p:txBody>
+      </p:sp>
+      <p:sp>
+        <p:nvSpPr>
+          <p:cNvPr id="10" name="Rectangle 9"/>
+          <p:cNvSpPr/>
+          <p:nvPr/>
+        </p:nvSpPr>
+        <p:spPr>
+          <a:xfrm>
+            <a:off x="6233007" y="4021836"/>
+            <a:ext cx="5501487" cy="1295400"/>
+          </a:xfrm>
+          <a:prstGeom prst="rect">
+            <a:avLst/>
+          </a:prstGeom>
+          <a:solidFill>
+            <a:srgbClr val="EEF5F0"/>
+          </a:solidFill>
+          <a:ln>
+            <a:solidFill>
+              <a:srgbClr val="DCE8DC"/>
+            </a:solidFill>
+          </a:ln>
+        </p:spPr>
+        <p:style>
+          <a:lnRef idx="1">
+            <a:schemeClr val="accent1"/>
+          </a:lnRef>
+          <a:fillRef idx="3">
+            <a:schemeClr val="accent1"/>
+          </a:fillRef>
+          <a:effectRef idx="2">
+            <a:schemeClr val="accent1"/>
+          </a:effectRef>
+          <a:fontRef idx="minor">
+            <a:schemeClr val="lt1"/>
+          </a:fontRef>
+        </p:style>
+        <p:txBody>
+          <a:bodyPr rtlCol="0" anchor="ctr"/>
+          <a:lstStyle/>
+          <a:p>
+            <a:pPr algn="ctr">
+              <a:defRPr>
+                <a:latin typeface="Roboto"/>
+              </a:defRPr>
+            </a:pPr>
+          </a:p>
+        </p:txBody>
+      </p:sp>
+      <p:sp>
+        <p:nvSpPr>
+          <p:cNvPr id="11" name="TextBox 10"/>
+          <p:cNvSpPr txBox="1"/>
+          <p:nvPr/>
+        </p:nvSpPr>
+        <p:spPr>
+          <a:xfrm>
+            <a:off x="6370167" y="4076700"/>
+            <a:ext cx="5227167" cy="274320"/>
+          </a:xfrm>
+          <a:prstGeom prst="rect">
+            <a:avLst/>
+          </a:prstGeom>
+          <a:noFill/>
+        </p:spPr>
+        <p:txBody>
+          <a:bodyPr wrap="square" lIns="45720" rIns="45720">
+            <a:spAutoFit/>
+          </a:bodyPr>
+          <a:lstStyle/>
+          <a:p>
+            <a:pPr>
+              <a:defRPr>
+                <a:latin typeface="Roboto"/>
+              </a:defRPr>
+            </a:pPr>
+            <a:r>
+              <a:rPr sz="1000" b="1">
+                <a:solidFill>
+                  <a:srgbClr val="5F6F63"/>
+                </a:solidFill>
+                <a:latin typeface="Roboto"/>
+              </a:rPr>
+              <a:t>WHAT YOU'D DO ABOUT IT</a:t>
+            </a:r>
+          </a:p>
+        </p:txBody>
+      </p:sp>
+      <p:sp>
+        <p:nvSpPr>
+          <p:cNvPr id="12" name="TextBox 11"/>
+          <p:cNvSpPr txBox="1"/>
+          <p:nvPr/>
+        </p:nvSpPr>
+        <p:spPr>
+          <a:xfrm>
+            <a:off x="6370167" y="4351020"/>
+            <a:ext cx="5227167" cy="929640"/>
+          </a:xfrm>
+          <a:prstGeom prst="rect">
+            <a:avLst/>
+          </a:prstGeom>
+          <a:noFill/>
+        </p:spPr>
+        <p:txBody>
+          <a:bodyPr wrap="square" lIns="45720" rIns="45720">
+            <a:spAutoFit/>
+          </a:bodyPr>
+          <a:lstStyle/>
+          <a:p>
+            <a:pPr>
+              <a:defRPr>
+                <a:latin typeface="Roboto"/>
+              </a:defRPr>
+            </a:pPr>
+            <a:r>
+              <a:rPr sz="1200" b="0">
+                <a:solidFill>
+                  <a:srgbClr val="25342A"/>
+                </a:solidFill>
+                <a:latin typeface="Roboto"/>
+              </a:rPr>
+              <a:t>The full cost (not just the grant line) is the number for renewal applications, where the funder lets you recover a share of overheads. Pick a program above to see it on its own.</a:t>
+            </a:r>
+          </a:p>
+        </p:txBody>
+      </p:sp>
+      <p:sp>
+        <p:nvSpPr>
+          <p:cNvPr id="13" name="TextBox 12"/>
+          <p:cNvSpPr txBox="1"/>
+          <p:nvPr/>
+        </p:nvSpPr>
+        <p:spPr>
+          <a:xfrm>
+            <a:off x="457200" y="6492240"/>
+            <a:ext cx="2926080" cy="274320"/>
+          </a:xfrm>
+          <a:prstGeom prst="rect">
+            <a:avLst/>
+          </a:prstGeom>
+          <a:noFill/>
+        </p:spPr>
+        <p:txBody>
+          <a:bodyPr wrap="square" lIns="45720" rIns="45720">
             <a:spAutoFit/>
           </a:bodyPr>
           <a:lstStyle/>
@@ -4705,14 +6352,14 @@
       </p:sp>
       <p:sp>
         <p:nvSpPr>
-          <p:cNvPr id="7" name="TextBox 6"/>
+          <p:cNvPr id="14" name="TextBox 13"/>
           <p:cNvSpPr txBox="1"/>
           <p:nvPr/>
         </p:nvSpPr>
         <p:spPr>
           <a:xfrm>
-            <a:off x="4297680" y="6492240"/>
-            <a:ext cx="3657600" cy="274320"/>
+            <a:off x="3108960" y="6492240"/>
+            <a:ext cx="5943600" cy="274320"/>
           </a:xfrm>
           <a:prstGeom prst="rect">
             <a:avLst/>
@@ -4720,7 +6367,7 @@
           <a:noFill/>
         </p:spPr>
         <p:txBody>
-          <a:bodyPr wrap="square">
+          <a:bodyPr wrap="square" lIns="45720" rIns="45720">
             <a:spAutoFit/>
           </a:bodyPr>
           <a:lstStyle/>
@@ -4737,14 +6384,14 @@
                 </a:solidFill>
                 <a:latin typeface="Roboto"/>
               </a:rPr>
-              <a:t>Data retrieved 2pm, Tue 6 Oct 2026 · Sample data</a:t>
-            </a:r>
-          </a:p>
-        </p:txBody>
-      </p:sp>
-      <p:sp>
-        <p:nvSpPr>
-          <p:cNvPr id="8" name="TextBox 7"/>
+              <a:t>Data retrieved 2pm, Tue 6 Oct 2026 · Generated 8 Oct 2026, 9:35am · Sample data · Made with Python (python-pptx)</a:t>
+            </a:r>
+          </a:p>
+        </p:txBody>
+      </p:sp>
+      <p:sp>
+        <p:nvSpPr>
+          <p:cNvPr id="15" name="TextBox 14"/>
           <p:cNvSpPr txBox="1"/>
           <p:nvPr/>
         </p:nvSpPr>
@@ -4759,7 +6406,7 @@
           <a:noFill/>
         </p:spPr>
         <p:txBody>
-          <a:bodyPr wrap="square">
+          <a:bodyPr wrap="square" lIns="45720" rIns="45720">
             <a:spAutoFit/>
           </a:bodyPr>
           <a:lstStyle/>
@@ -4776,7 +6423,7 @@
                 </a:solidFill>
                 <a:latin typeface="Roboto"/>
               </a:rPr>
-              <a:t>Slide 2 of 10</a:t>
+              <a:t>Slide 2 of 7</a:t>
             </a:r>
           </a:p>
         </p:txBody>
@@ -4801,7 +6448,44 @@
       <p:grpSpPr/>
       <p:sp>
         <p:nvSpPr>
-          <p:cNvPr id="2" name="Rectangle 1"/>
+          <p:cNvPr id="2" name="Title 1"/>
+          <p:cNvSpPr>
+            <a:spLocks noGrp="1"/>
+          </p:cNvSpPr>
+          <p:nvPr>
+            <p:ph type="title"/>
+          </p:nvPr>
+        </p:nvSpPr>
+        <p:spPr>
+          <a:xfrm>
+            <a:off x="457200" y="384048"/>
+            <a:ext cx="11277295" cy="475488"/>
+          </a:xfrm>
+        </p:spPr>
+        <p:txBody>
+          <a:bodyPr wrap="square" lIns="45720" rIns="45720" tIns="0" bIns="0" anchor="t"/>
+          <a:lstStyle/>
+          <a:p>
+            <a:pPr algn="l">
+              <a:defRPr>
+                <a:latin typeface="Roboto"/>
+              </a:defRPr>
+            </a:pPr>
+            <a:r>
+              <a:rPr sz="2400" b="1">
+                <a:solidFill>
+                  <a:srgbClr val="25342A"/>
+                </a:solidFill>
+                <a:latin typeface="Roboto"/>
+              </a:rPr>
+              <a:t>Housing support (2025)</a:t>
+            </a:r>
+          </a:p>
+        </p:txBody>
+      </p:sp>
+      <p:sp>
+        <p:nvSpPr>
+          <p:cNvPr id="3" name="Rectangle 2"/>
           <p:cNvSpPr/>
           <p:nvPr/>
         </p:nvSpPr>
@@ -4848,14 +6532,14 @@
       </p:sp>
       <p:sp>
         <p:nvSpPr>
-          <p:cNvPr id="3" name="TextBox 2"/>
+          <p:cNvPr id="4" name="TextBox 3"/>
           <p:cNvSpPr txBox="1"/>
           <p:nvPr/>
         </p:nvSpPr>
         <p:spPr>
           <a:xfrm>
-            <a:off x="457200" y="164592"/>
-            <a:ext cx="7315200" cy="274320"/>
+            <a:off x="457200" y="146304"/>
+            <a:ext cx="8229600" cy="256032"/>
           </a:xfrm>
           <a:prstGeom prst="rect">
             <a:avLst/>
@@ -4863,7 +6547,7 @@
           <a:noFill/>
         </p:spPr>
         <p:txBody>
-          <a:bodyPr wrap="square">
+          <a:bodyPr wrap="square" lIns="45720" rIns="45720">
             <a:spAutoFit/>
           </a:bodyPr>
           <a:lstStyle/>
@@ -4887,14 +6571,14 @@
       </p:sp>
       <p:sp>
         <p:nvSpPr>
-          <p:cNvPr id="4" name="TextBox 3"/>
+          <p:cNvPr id="5" name="TextBox 4"/>
           <p:cNvSpPr txBox="1"/>
           <p:nvPr/>
         </p:nvSpPr>
         <p:spPr>
           <a:xfrm>
-            <a:off x="457200" y="411480"/>
-            <a:ext cx="11247120" cy="548640"/>
+            <a:off x="457200" y="914400"/>
+            <a:ext cx="11277295" cy="263652"/>
           </a:xfrm>
           <a:prstGeom prst="rect">
             <a:avLst/>
@@ -4902,7 +6586,7 @@
           <a:noFill/>
         </p:spPr>
         <p:txBody>
-          <a:bodyPr wrap="square">
+          <a:bodyPr wrap="square" lIns="45720" rIns="45720">
             <a:spAutoFit/>
           </a:bodyPr>
           <a:lstStyle/>
@@ -4913,45 +6597,94 @@
               </a:defRPr>
             </a:pPr>
             <a:r>
-              <a:rPr sz="2400" b="1">
+              <a:rPr sz="1200" b="0">
                 <a:solidFill>
-                  <a:srgbClr val="25342A"/>
+                  <a:srgbClr val="5F6F63"/>
                 </a:solidFill>
                 <a:latin typeface="Roboto"/>
               </a:rPr>
-              <a:t>Full cost of each program, November 2025 · % of total · Program: All programs</a:t>
+              <a:t>Grant spending, by month · Housing support (2025)</a:t>
             </a:r>
           </a:p>
         </p:txBody>
       </p:sp>
       <p:graphicFrame>
         <p:nvGraphicFramePr>
-          <p:cNvPr id="5" name="Chart 4"/>
+          <p:cNvPr id="6" name="Chart 5"/>
           <p:cNvGraphicFramePr>
             <a:graphicFrameLocks noGrp="1"/>
           </p:cNvGraphicFramePr>
           <p:nvPr/>
         </p:nvGraphicFramePr>
         <p:xfrm>
-          <a:off x="457200" y="1188720"/>
-          <a:ext cx="11247120" cy="5029200"/>
+          <a:off x="457200" y="1278636"/>
+          <a:ext cx="11277295" cy="3643884"/>
         </p:xfrm>
         <a:graphic>
           <a:graphicData uri="http://schemas.openxmlformats.org/drawingml/2006/chart">
-            <c:chart xmlns:c="http://schemas.openxmlformats.org/drawingml/2006/chart" r:id="rId2"/>
+            <c:chart xmlns:c="http://schemas.openxmlformats.org/drawingml/2006/chart" r:id="rId3"/>
           </a:graphicData>
         </a:graphic>
       </p:graphicFrame>
       <p:sp>
         <p:nvSpPr>
-          <p:cNvPr id="6" name="TextBox 5"/>
+          <p:cNvPr id="7" name="Rectangle 6"/>
+          <p:cNvSpPr/>
+          <p:nvPr/>
+        </p:nvSpPr>
+        <p:spPr>
+          <a:xfrm>
+            <a:off x="457200" y="5013960"/>
+            <a:ext cx="5501487" cy="1295400"/>
+          </a:xfrm>
+          <a:prstGeom prst="rect">
+            <a:avLst/>
+          </a:prstGeom>
+          <a:solidFill>
+            <a:srgbClr val="FFFFFF"/>
+          </a:solidFill>
+          <a:ln>
+            <a:solidFill>
+              <a:srgbClr val="DCE8DC"/>
+            </a:solidFill>
+          </a:ln>
+        </p:spPr>
+        <p:style>
+          <a:lnRef idx="1">
+            <a:schemeClr val="accent1"/>
+          </a:lnRef>
+          <a:fillRef idx="3">
+            <a:schemeClr val="accent1"/>
+          </a:fillRef>
+          <a:effectRef idx="2">
+            <a:schemeClr val="accent1"/>
+          </a:effectRef>
+          <a:fontRef idx="minor">
+            <a:schemeClr val="lt1"/>
+          </a:fontRef>
+        </p:style>
+        <p:txBody>
+          <a:bodyPr rtlCol="0" anchor="ctr"/>
+          <a:lstStyle/>
+          <a:p>
+            <a:pPr algn="ctr">
+              <a:defRPr>
+                <a:latin typeface="Roboto"/>
+              </a:defRPr>
+            </a:pPr>
+          </a:p>
+        </p:txBody>
+      </p:sp>
+      <p:sp>
+        <p:nvSpPr>
+          <p:cNvPr id="8" name="TextBox 7"/>
           <p:cNvSpPr txBox="1"/>
           <p:nvPr/>
         </p:nvSpPr>
         <p:spPr>
           <a:xfrm>
-            <a:off x="457200" y="6492240"/>
-            <a:ext cx="3657600" cy="274320"/>
+            <a:off x="594360" y="5068824"/>
+            <a:ext cx="5227167" cy="274320"/>
           </a:xfrm>
           <a:prstGeom prst="rect">
             <a:avLst/>
@@ -4959,7 +6692,212 @@
           <a:noFill/>
         </p:spPr>
         <p:txBody>
-          <a:bodyPr wrap="square">
+          <a:bodyPr wrap="square" lIns="45720" rIns="45720">
+            <a:spAutoFit/>
+          </a:bodyPr>
+          <a:lstStyle/>
+          <a:p>
+            <a:pPr>
+              <a:defRPr>
+                <a:latin typeface="Roboto"/>
+              </a:defRPr>
+            </a:pPr>
+            <a:r>
+              <a:rPr sz="1000" b="1">
+                <a:solidFill>
+                  <a:srgbClr val="5F6F63"/>
+                </a:solidFill>
+                <a:latin typeface="Roboto"/>
+              </a:rPr>
+              <a:t>WHAT IT SHOWS</a:t>
+            </a:r>
+          </a:p>
+        </p:txBody>
+      </p:sp>
+      <p:sp>
+        <p:nvSpPr>
+          <p:cNvPr id="9" name="TextBox 8"/>
+          <p:cNvSpPr txBox="1"/>
+          <p:nvPr/>
+        </p:nvSpPr>
+        <p:spPr>
+          <a:xfrm>
+            <a:off x="594360" y="5343144"/>
+            <a:ext cx="5227167" cy="929640"/>
+          </a:xfrm>
+          <a:prstGeom prst="rect">
+            <a:avLst/>
+          </a:prstGeom>
+          <a:noFill/>
+        </p:spPr>
+        <p:txBody>
+          <a:bodyPr wrap="square" lIns="45720" rIns="45720">
+            <a:spAutoFit/>
+          </a:bodyPr>
+          <a:lstStyle/>
+          <a:p>
+            <a:pPr>
+              <a:defRPr>
+                <a:latin typeface="Roboto"/>
+              </a:defRPr>
+            </a:pPr>
+            <a:r>
+              <a:rPr sz="1200" b="0">
+                <a:solidFill>
+                  <a:srgbClr val="25342A"/>
+                </a:solidFill>
+                <a:latin typeface="Roboto"/>
+              </a:rPr>
+              <a:t>Housing support (2025) cost $52,362 in full in November: $30,000 paid by the State Housing Program grant, and $22,362 of shared costs no grant covers. It has spent 99.6% of its budget to date, with $29,100 left and 1 months to go.</a:t>
+            </a:r>
+          </a:p>
+        </p:txBody>
+      </p:sp>
+      <p:sp>
+        <p:nvSpPr>
+          <p:cNvPr id="10" name="Rectangle 9"/>
+          <p:cNvSpPr/>
+          <p:nvPr/>
+        </p:nvSpPr>
+        <p:spPr>
+          <a:xfrm>
+            <a:off x="6233007" y="5013960"/>
+            <a:ext cx="5501487" cy="1295400"/>
+          </a:xfrm>
+          <a:prstGeom prst="rect">
+            <a:avLst/>
+          </a:prstGeom>
+          <a:solidFill>
+            <a:srgbClr val="EEF5F0"/>
+          </a:solidFill>
+          <a:ln>
+            <a:solidFill>
+              <a:srgbClr val="DCE8DC"/>
+            </a:solidFill>
+          </a:ln>
+        </p:spPr>
+        <p:style>
+          <a:lnRef idx="1">
+            <a:schemeClr val="accent1"/>
+          </a:lnRef>
+          <a:fillRef idx="3">
+            <a:schemeClr val="accent1"/>
+          </a:fillRef>
+          <a:effectRef idx="2">
+            <a:schemeClr val="accent1"/>
+          </a:effectRef>
+          <a:fontRef idx="minor">
+            <a:schemeClr val="lt1"/>
+          </a:fontRef>
+        </p:style>
+        <p:txBody>
+          <a:bodyPr rtlCol="0" anchor="ctr"/>
+          <a:lstStyle/>
+          <a:p>
+            <a:pPr algn="ctr">
+              <a:defRPr>
+                <a:latin typeface="Roboto"/>
+              </a:defRPr>
+            </a:pPr>
+          </a:p>
+        </p:txBody>
+      </p:sp>
+      <p:sp>
+        <p:nvSpPr>
+          <p:cNvPr id="11" name="TextBox 10"/>
+          <p:cNvSpPr txBox="1"/>
+          <p:nvPr/>
+        </p:nvSpPr>
+        <p:spPr>
+          <a:xfrm>
+            <a:off x="6370167" y="5068824"/>
+            <a:ext cx="5227167" cy="274320"/>
+          </a:xfrm>
+          <a:prstGeom prst="rect">
+            <a:avLst/>
+          </a:prstGeom>
+          <a:noFill/>
+        </p:spPr>
+        <p:txBody>
+          <a:bodyPr wrap="square" lIns="45720" rIns="45720">
+            <a:spAutoFit/>
+          </a:bodyPr>
+          <a:lstStyle/>
+          <a:p>
+            <a:pPr>
+              <a:defRPr>
+                <a:latin typeface="Roboto"/>
+              </a:defRPr>
+            </a:pPr>
+            <a:r>
+              <a:rPr sz="1000" b="1">
+                <a:solidFill>
+                  <a:srgbClr val="5F6F63"/>
+                </a:solidFill>
+                <a:latin typeface="Roboto"/>
+              </a:rPr>
+              <a:t>WHAT YOU'D DO ABOUT IT</a:t>
+            </a:r>
+          </a:p>
+        </p:txBody>
+      </p:sp>
+      <p:sp>
+        <p:nvSpPr>
+          <p:cNvPr id="12" name="TextBox 11"/>
+          <p:cNvSpPr txBox="1"/>
+          <p:nvPr/>
+        </p:nvSpPr>
+        <p:spPr>
+          <a:xfrm>
+            <a:off x="6370167" y="5343144"/>
+            <a:ext cx="5227167" cy="929640"/>
+          </a:xfrm>
+          <a:prstGeom prst="rect">
+            <a:avLst/>
+          </a:prstGeom>
+          <a:noFill/>
+        </p:spPr>
+        <p:txBody>
+          <a:bodyPr wrap="square" lIns="45720" rIns="45720">
+            <a:spAutoFit/>
+          </a:bodyPr>
+          <a:lstStyle/>
+          <a:p>
+            <a:pPr>
+              <a:defRPr>
+                <a:latin typeface="Roboto"/>
+              </a:defRPr>
+            </a:pPr>
+            <a:r>
+              <a:rPr sz="1200" b="0">
+                <a:solidFill>
+                  <a:srgbClr val="25342A"/>
+                </a:solidFill>
+                <a:latin typeface="Roboto"/>
+              </a:rPr>
+              <a:t>The full cost is $52,362 a month; $22,362 of it is shared cost the grant doesn't pay for. Worth asking for as much of it as the funder allows at renewal.</a:t>
+            </a:r>
+          </a:p>
+        </p:txBody>
+      </p:sp>
+      <p:sp>
+        <p:nvSpPr>
+          <p:cNvPr id="13" name="TextBox 12"/>
+          <p:cNvSpPr txBox="1"/>
+          <p:nvPr/>
+        </p:nvSpPr>
+        <p:spPr>
+          <a:xfrm>
+            <a:off x="457200" y="6492240"/>
+            <a:ext cx="2926080" cy="274320"/>
+          </a:xfrm>
+          <a:prstGeom prst="rect">
+            <a:avLst/>
+          </a:prstGeom>
+          <a:noFill/>
+        </p:spPr>
+        <p:txBody>
+          <a:bodyPr wrap="square" lIns="45720" rIns="45720">
             <a:spAutoFit/>
           </a:bodyPr>
           <a:lstStyle/>
@@ -4983,14 +6921,14 @@
       </p:sp>
       <p:sp>
         <p:nvSpPr>
-          <p:cNvPr id="7" name="TextBox 6"/>
+          <p:cNvPr id="14" name="TextBox 13"/>
           <p:cNvSpPr txBox="1"/>
           <p:nvPr/>
         </p:nvSpPr>
         <p:spPr>
           <a:xfrm>
-            <a:off x="4297680" y="6492240"/>
-            <a:ext cx="3657600" cy="274320"/>
+            <a:off x="3108960" y="6492240"/>
+            <a:ext cx="5943600" cy="274320"/>
           </a:xfrm>
           <a:prstGeom prst="rect">
             <a:avLst/>
@@ -4998,7 +6936,7 @@
           <a:noFill/>
         </p:spPr>
         <p:txBody>
-          <a:bodyPr wrap="square">
+          <a:bodyPr wrap="square" lIns="45720" rIns="45720">
             <a:spAutoFit/>
           </a:bodyPr>
           <a:lstStyle/>
@@ -5015,14 +6953,14 @@
                 </a:solidFill>
                 <a:latin typeface="Roboto"/>
               </a:rPr>
-              <a:t>Data retrieved 2pm, Tue 6 Oct 2026 · Sample data</a:t>
-            </a:r>
-          </a:p>
-        </p:txBody>
-      </p:sp>
-      <p:sp>
-        <p:nvSpPr>
-          <p:cNvPr id="8" name="TextBox 7"/>
+              <a:t>Data retrieved 2pm, Tue 6 Oct 2026 · Generated 8 Oct 2026, 9:35am · Sample data · Made with Python (python-pptx)</a:t>
+            </a:r>
+          </a:p>
+        </p:txBody>
+      </p:sp>
+      <p:sp>
+        <p:nvSpPr>
+          <p:cNvPr id="15" name="TextBox 14"/>
           <p:cNvSpPr txBox="1"/>
           <p:nvPr/>
         </p:nvSpPr>
@@ -5037,7 +6975,7 @@
           <a:noFill/>
         </p:spPr>
         <p:txBody>
-          <a:bodyPr wrap="square">
+          <a:bodyPr wrap="square" lIns="45720" rIns="45720">
             <a:spAutoFit/>
           </a:bodyPr>
           <a:lstStyle/>
@@ -5054,7 +6992,7 @@
                 </a:solidFill>
                 <a:latin typeface="Roboto"/>
               </a:rPr>
-              <a:t>Slide 3 of 10</a:t>
+              <a:t>Slide 3 of 7</a:t>
             </a:r>
           </a:p>
         </p:txBody>
@@ -5079,7 +7017,44 @@
       <p:grpSpPr/>
       <p:sp>
         <p:nvSpPr>
-          <p:cNvPr id="2" name="Rectangle 1"/>
+          <p:cNvPr id="2" name="Title 1"/>
+          <p:cNvSpPr>
+            <a:spLocks noGrp="1"/>
+          </p:cNvSpPr>
+          <p:nvPr>
+            <p:ph type="title"/>
+          </p:nvPr>
+        </p:nvSpPr>
+        <p:spPr>
+          <a:xfrm>
+            <a:off x="457200" y="384048"/>
+            <a:ext cx="11277295" cy="475488"/>
+          </a:xfrm>
+        </p:spPr>
+        <p:txBody>
+          <a:bodyPr wrap="square" lIns="45720" rIns="45720" tIns="0" bIns="0" anchor="t"/>
+          <a:lstStyle/>
+          <a:p>
+            <a:pPr algn="l">
+              <a:defRPr>
+                <a:latin typeface="Roboto"/>
+              </a:defRPr>
+            </a:pPr>
+            <a:r>
+              <a:rPr sz="2400" b="1">
+                <a:solidFill>
+                  <a:srgbClr val="25342A"/>
+                </a:solidFill>
+                <a:latin typeface="Roboto"/>
+              </a:rPr>
+              <a:t>Youth outreach</a:t>
+            </a:r>
+          </a:p>
+        </p:txBody>
+      </p:sp>
+      <p:sp>
+        <p:nvSpPr>
+          <p:cNvPr id="3" name="Rectangle 2"/>
           <p:cNvSpPr/>
           <p:nvPr/>
         </p:nvSpPr>
@@ -5126,14 +7101,14 @@
       </p:sp>
       <p:sp>
         <p:nvSpPr>
-          <p:cNvPr id="3" name="TextBox 2"/>
+          <p:cNvPr id="4" name="TextBox 3"/>
           <p:cNvSpPr txBox="1"/>
           <p:nvPr/>
         </p:nvSpPr>
         <p:spPr>
           <a:xfrm>
-            <a:off x="457200" y="164592"/>
-            <a:ext cx="7315200" cy="274320"/>
+            <a:off x="457200" y="146304"/>
+            <a:ext cx="8229600" cy="256032"/>
           </a:xfrm>
           <a:prstGeom prst="rect">
             <a:avLst/>
@@ -5141,7 +7116,7 @@
           <a:noFill/>
         </p:spPr>
         <p:txBody>
-          <a:bodyPr wrap="square">
+          <a:bodyPr wrap="square" lIns="45720" rIns="45720">
             <a:spAutoFit/>
           </a:bodyPr>
           <a:lstStyle/>
@@ -5165,14 +7140,14 @@
       </p:sp>
       <p:sp>
         <p:nvSpPr>
-          <p:cNvPr id="4" name="TextBox 3"/>
+          <p:cNvPr id="5" name="TextBox 4"/>
           <p:cNvSpPr txBox="1"/>
           <p:nvPr/>
         </p:nvSpPr>
         <p:spPr>
           <a:xfrm>
-            <a:off x="457200" y="411480"/>
-            <a:ext cx="11247120" cy="548640"/>
+            <a:off x="457200" y="914400"/>
+            <a:ext cx="11277295" cy="263652"/>
           </a:xfrm>
           <a:prstGeom prst="rect">
             <a:avLst/>
@@ -5180,7 +7155,7 @@
           <a:noFill/>
         </p:spPr>
         <p:txBody>
-          <a:bodyPr wrap="square">
+          <a:bodyPr wrap="square" lIns="45720" rIns="45720">
             <a:spAutoFit/>
           </a:bodyPr>
           <a:lstStyle/>
@@ -5191,27 +7166,45 @@
               </a:defRPr>
             </a:pPr>
             <a:r>
-              <a:rPr sz="2400" b="1">
+              <a:rPr sz="1200" b="0">
                 <a:solidFill>
-                  <a:srgbClr val="25342A"/>
+                  <a:srgbClr val="5F6F63"/>
                 </a:solidFill>
                 <a:latin typeface="Roboto"/>
               </a:rPr>
-              <a:t>What it shows · Program: All programs</a:t>
-            </a:r>
-          </a:p>
-        </p:txBody>
-      </p:sp>
-      <p:sp>
-        <p:nvSpPr>
-          <p:cNvPr id="5" name="Rectangle 4"/>
+              <a:t>Grant spending, by month · Youth outreach</a:t>
+            </a:r>
+          </a:p>
+        </p:txBody>
+      </p:sp>
+      <p:graphicFrame>
+        <p:nvGraphicFramePr>
+          <p:cNvPr id="6" name="Chart 5"/>
+          <p:cNvGraphicFramePr>
+            <a:graphicFrameLocks noGrp="1"/>
+          </p:cNvGraphicFramePr>
+          <p:nvPr/>
+        </p:nvGraphicFramePr>
+        <p:xfrm>
+          <a:off x="457200" y="1278636"/>
+          <a:ext cx="11277295" cy="3643884"/>
+        </p:xfrm>
+        <a:graphic>
+          <a:graphicData uri="http://schemas.openxmlformats.org/drawingml/2006/chart">
+            <c:chart xmlns:c="http://schemas.openxmlformats.org/drawingml/2006/chart" r:id="rId3"/>
+          </a:graphicData>
+        </a:graphic>
+      </p:graphicFrame>
+      <p:sp>
+        <p:nvSpPr>
+          <p:cNvPr id="7" name="Rectangle 6"/>
           <p:cNvSpPr/>
           <p:nvPr/>
         </p:nvSpPr>
         <p:spPr>
           <a:xfrm>
-            <a:off x="457200" y="1554480"/>
-            <a:ext cx="5501487" cy="4389120"/>
+            <a:off x="457200" y="5013960"/>
+            <a:ext cx="5501487" cy="1295400"/>
           </a:xfrm>
           <a:prstGeom prst="rect">
             <a:avLst/>
@@ -5253,14 +7246,14 @@
       </p:sp>
       <p:sp>
         <p:nvSpPr>
-          <p:cNvPr id="6" name="TextBox 5"/>
+          <p:cNvPr id="8" name="TextBox 7"/>
           <p:cNvSpPr txBox="1"/>
           <p:nvPr/>
         </p:nvSpPr>
         <p:spPr>
           <a:xfrm>
-            <a:off x="685800" y="1691640"/>
-            <a:ext cx="5044287" cy="365760"/>
+            <a:off x="594360" y="5068824"/>
+            <a:ext cx="5227167" cy="274320"/>
           </a:xfrm>
           <a:prstGeom prst="rect">
             <a:avLst/>
@@ -5268,7 +7261,7 @@
           <a:noFill/>
         </p:spPr>
         <p:txBody>
-          <a:bodyPr wrap="square">
+          <a:bodyPr wrap="square" lIns="45720" rIns="45720">
             <a:spAutoFit/>
           </a:bodyPr>
           <a:lstStyle/>
@@ -5279,7 +7272,7 @@
               </a:defRPr>
             </a:pPr>
             <a:r>
-              <a:rPr sz="1100" b="1">
+              <a:rPr sz="1000" b="1">
                 <a:solidFill>
                   <a:srgbClr val="5F6F63"/>
                 </a:solidFill>
@@ -5292,14 +7285,14 @@
       </p:sp>
       <p:sp>
         <p:nvSpPr>
-          <p:cNvPr id="7" name="TextBox 6"/>
+          <p:cNvPr id="9" name="TextBox 8"/>
           <p:cNvSpPr txBox="1"/>
           <p:nvPr/>
         </p:nvSpPr>
         <p:spPr>
           <a:xfrm>
-            <a:off x="685800" y="2103120"/>
-            <a:ext cx="5044287" cy="3749039"/>
+            <a:off x="594360" y="5343144"/>
+            <a:ext cx="5227167" cy="929640"/>
           </a:xfrm>
           <a:prstGeom prst="rect">
             <a:avLst/>
@@ -5307,7 +7300,7 @@
           <a:noFill/>
         </p:spPr>
         <p:txBody>
-          <a:bodyPr wrap="square">
+          <a:bodyPr wrap="square" lIns="45720" rIns="45720">
             <a:spAutoFit/>
           </a:bodyPr>
           <a:lstStyle/>
@@ -5318,27 +7311,27 @@
               </a:defRPr>
             </a:pPr>
             <a:r>
-              <a:rPr sz="1600" b="0">
+              <a:rPr sz="1200" b="0">
                 <a:solidFill>
                   <a:srgbClr val="25342A"/>
                 </a:solidFill>
                 <a:latin typeface="Roboto"/>
               </a:rPr>
-              <a:t>Housing support (2025) is the biggest program: $52,362 in November once its share of untied program costs and administration is added to $30,000 of grant spending. Shared costs add 74.5% on top of grant spending across all programs.</a:t>
-            </a:r>
-          </a:p>
-        </p:txBody>
-      </p:sp>
-      <p:sp>
-        <p:nvSpPr>
-          <p:cNvPr id="8" name="Rectangle 7"/>
+              <a:t>Youth outreach cost $36,791 in full in November: $21,079 paid by the State Department of Families grant, and $15,712 of shared costs no grant covers. It has spent 99.0% of its budget to date, with $380,952 left and 19 months to go.</a:t>
+            </a:r>
+          </a:p>
+        </p:txBody>
+      </p:sp>
+      <p:sp>
+        <p:nvSpPr>
+          <p:cNvPr id="10" name="Rectangle 9"/>
           <p:cNvSpPr/>
           <p:nvPr/>
         </p:nvSpPr>
         <p:spPr>
           <a:xfrm>
-            <a:off x="6233007" y="1554480"/>
-            <a:ext cx="5501487" cy="4389120"/>
+            <a:off x="6233007" y="5013960"/>
+            <a:ext cx="5501487" cy="1295400"/>
           </a:xfrm>
           <a:prstGeom prst="rect">
             <a:avLst/>
@@ -5380,14 +7373,14 @@
       </p:sp>
       <p:sp>
         <p:nvSpPr>
-          <p:cNvPr id="9" name="TextBox 8"/>
+          <p:cNvPr id="11" name="TextBox 10"/>
           <p:cNvSpPr txBox="1"/>
           <p:nvPr/>
         </p:nvSpPr>
         <p:spPr>
           <a:xfrm>
-            <a:off x="6461607" y="1691640"/>
-            <a:ext cx="5044287" cy="365760"/>
+            <a:off x="6370167" y="5068824"/>
+            <a:ext cx="5227167" cy="274320"/>
           </a:xfrm>
           <a:prstGeom prst="rect">
             <a:avLst/>
@@ -5395,7 +7388,7 @@
           <a:noFill/>
         </p:spPr>
         <p:txBody>
-          <a:bodyPr wrap="square">
+          <a:bodyPr wrap="square" lIns="45720" rIns="45720">
             <a:spAutoFit/>
           </a:bodyPr>
           <a:lstStyle/>
@@ -5406,7 +7399,7 @@
               </a:defRPr>
             </a:pPr>
             <a:r>
-              <a:rPr sz="1100" b="1">
+              <a:rPr sz="1000" b="1">
                 <a:solidFill>
                   <a:srgbClr val="5F6F63"/>
                 </a:solidFill>
@@ -5419,14 +7412,14 @@
       </p:sp>
       <p:sp>
         <p:nvSpPr>
-          <p:cNvPr id="10" name="TextBox 9"/>
+          <p:cNvPr id="12" name="TextBox 11"/>
           <p:cNvSpPr txBox="1"/>
           <p:nvPr/>
         </p:nvSpPr>
         <p:spPr>
           <a:xfrm>
-            <a:off x="6461607" y="2103120"/>
-            <a:ext cx="5044287" cy="3749039"/>
+            <a:off x="6370167" y="5343144"/>
+            <a:ext cx="5227167" cy="929640"/>
           </a:xfrm>
           <a:prstGeom prst="rect">
             <a:avLst/>
@@ -5434,7 +7427,7 @@
           <a:noFill/>
         </p:spPr>
         <p:txBody>
-          <a:bodyPr wrap="square">
+          <a:bodyPr wrap="square" lIns="45720" rIns="45720">
             <a:spAutoFit/>
           </a:bodyPr>
           <a:lstStyle/>
@@ -5445,27 +7438,27 @@
               </a:defRPr>
             </a:pPr>
             <a:r>
-              <a:rPr sz="1600" b="0">
+              <a:rPr sz="1200" b="0">
                 <a:solidFill>
                   <a:srgbClr val="25342A"/>
                 </a:solidFill>
                 <a:latin typeface="Roboto"/>
               </a:rPr>
-              <a:t>The full cost (not just the grant line) is the number for renewal applications, where the funder lets you recover a share of overheads. Pick a program above to see it on its own.</a:t>
-            </a:r>
-          </a:p>
-        </p:txBody>
-      </p:sp>
-      <p:sp>
-        <p:nvSpPr>
-          <p:cNvPr id="11" name="TextBox 10"/>
+              <a:t>The full cost is $36,791 a month; $15,712 of it is shared cost the grant doesn't pay for. Worth asking for as much of it as the funder allows at renewal.</a:t>
+            </a:r>
+          </a:p>
+        </p:txBody>
+      </p:sp>
+      <p:sp>
+        <p:nvSpPr>
+          <p:cNvPr id="13" name="TextBox 12"/>
           <p:cNvSpPr txBox="1"/>
           <p:nvPr/>
         </p:nvSpPr>
         <p:spPr>
           <a:xfrm>
             <a:off x="457200" y="6492240"/>
-            <a:ext cx="3657600" cy="274320"/>
+            <a:ext cx="2926080" cy="274320"/>
           </a:xfrm>
           <a:prstGeom prst="rect">
             <a:avLst/>
@@ -5473,7 +7466,7 @@
           <a:noFill/>
         </p:spPr>
         <p:txBody>
-          <a:bodyPr wrap="square">
+          <a:bodyPr wrap="square" lIns="45720" rIns="45720">
             <a:spAutoFit/>
           </a:bodyPr>
           <a:lstStyle/>
@@ -5497,14 +7490,14 @@
       </p:sp>
       <p:sp>
         <p:nvSpPr>
-          <p:cNvPr id="12" name="TextBox 11"/>
+          <p:cNvPr id="14" name="TextBox 13"/>
           <p:cNvSpPr txBox="1"/>
           <p:nvPr/>
         </p:nvSpPr>
         <p:spPr>
           <a:xfrm>
-            <a:off x="4297680" y="6492240"/>
-            <a:ext cx="3657600" cy="274320"/>
+            <a:off x="3108960" y="6492240"/>
+            <a:ext cx="5943600" cy="274320"/>
           </a:xfrm>
           <a:prstGeom prst="rect">
             <a:avLst/>
@@ -5512,7 +7505,7 @@
           <a:noFill/>
         </p:spPr>
         <p:txBody>
-          <a:bodyPr wrap="square">
+          <a:bodyPr wrap="square" lIns="45720" rIns="45720">
             <a:spAutoFit/>
           </a:bodyPr>
           <a:lstStyle/>
@@ -5529,14 +7522,14 @@
                 </a:solidFill>
                 <a:latin typeface="Roboto"/>
               </a:rPr>
-              <a:t>Data retrieved 2pm, Tue 6 Oct 2026 · Sample data</a:t>
-            </a:r>
-          </a:p>
-        </p:txBody>
-      </p:sp>
-      <p:sp>
-        <p:nvSpPr>
-          <p:cNvPr id="13" name="TextBox 12"/>
+              <a:t>Data retrieved 2pm, Tue 6 Oct 2026 · Generated 8 Oct 2026, 9:35am · Sample data · Made with Python (python-pptx)</a:t>
+            </a:r>
+          </a:p>
+        </p:txBody>
+      </p:sp>
+      <p:sp>
+        <p:nvSpPr>
+          <p:cNvPr id="15" name="TextBox 14"/>
           <p:cNvSpPr txBox="1"/>
           <p:nvPr/>
         </p:nvSpPr>
@@ -5551,7 +7544,7 @@
           <a:noFill/>
         </p:spPr>
         <p:txBody>
-          <a:bodyPr wrap="square">
+          <a:bodyPr wrap="square" lIns="45720" rIns="45720">
             <a:spAutoFit/>
           </a:bodyPr>
           <a:lstStyle/>
@@ -5568,7 +7561,7 @@
                 </a:solidFill>
                 <a:latin typeface="Roboto"/>
               </a:rPr>
-              <a:t>Slide 4 of 10</a:t>
+              <a:t>Slide 4 of 7</a:t>
             </a:r>
           </a:p>
         </p:txBody>
@@ -5593,7 +7586,44 @@
       <p:grpSpPr/>
       <p:sp>
         <p:nvSpPr>
-          <p:cNvPr id="2" name="Rectangle 1"/>
+          <p:cNvPr id="2" name="Title 1"/>
+          <p:cNvSpPr>
+            <a:spLocks noGrp="1"/>
+          </p:cNvSpPr>
+          <p:nvPr>
+            <p:ph type="title"/>
+          </p:nvPr>
+        </p:nvSpPr>
+        <p:spPr>
+          <a:xfrm>
+            <a:off x="457200" y="384048"/>
+            <a:ext cx="11277295" cy="475488"/>
+          </a:xfrm>
+        </p:spPr>
+        <p:txBody>
+          <a:bodyPr wrap="square" lIns="45720" rIns="45720" tIns="0" bIns="0" anchor="t"/>
+          <a:lstStyle/>
+          <a:p>
+            <a:pPr algn="l">
+              <a:defRPr>
+                <a:latin typeface="Roboto"/>
+              </a:defRPr>
+            </a:pPr>
+            <a:r>
+              <a:rPr sz="2400" b="1">
+                <a:solidFill>
+                  <a:srgbClr val="25342A"/>
+                </a:solidFill>
+                <a:latin typeface="Roboto"/>
+              </a:rPr>
+              <a:t>Emergency relief</a:t>
+            </a:r>
+          </a:p>
+        </p:txBody>
+      </p:sp>
+      <p:sp>
+        <p:nvSpPr>
+          <p:cNvPr id="3" name="Rectangle 2"/>
           <p:cNvSpPr/>
           <p:nvPr/>
         </p:nvSpPr>
@@ -5640,14 +7670,14 @@
       </p:sp>
       <p:sp>
         <p:nvSpPr>
-          <p:cNvPr id="3" name="TextBox 2"/>
+          <p:cNvPr id="4" name="TextBox 3"/>
           <p:cNvSpPr txBox="1"/>
           <p:nvPr/>
         </p:nvSpPr>
         <p:spPr>
           <a:xfrm>
-            <a:off x="457200" y="164592"/>
-            <a:ext cx="7315200" cy="274320"/>
+            <a:off x="457200" y="146304"/>
+            <a:ext cx="8229600" cy="256032"/>
           </a:xfrm>
           <a:prstGeom prst="rect">
             <a:avLst/>
@@ -5655,7 +7685,7 @@
           <a:noFill/>
         </p:spPr>
         <p:txBody>
-          <a:bodyPr wrap="square">
+          <a:bodyPr wrap="square" lIns="45720" rIns="45720">
             <a:spAutoFit/>
           </a:bodyPr>
           <a:lstStyle/>
@@ -5679,14 +7709,14 @@
       </p:sp>
       <p:sp>
         <p:nvSpPr>
-          <p:cNvPr id="4" name="TextBox 3"/>
+          <p:cNvPr id="5" name="TextBox 4"/>
           <p:cNvSpPr txBox="1"/>
           <p:nvPr/>
         </p:nvSpPr>
         <p:spPr>
           <a:xfrm>
-            <a:off x="457200" y="411480"/>
-            <a:ext cx="11247120" cy="548640"/>
+            <a:off x="457200" y="914400"/>
+            <a:ext cx="11277295" cy="263652"/>
           </a:xfrm>
           <a:prstGeom prst="rect">
             <a:avLst/>
@@ -5694,7 +7724,7 @@
           <a:noFill/>
         </p:spPr>
         <p:txBody>
-          <a:bodyPr wrap="square">
+          <a:bodyPr wrap="square" lIns="45720" rIns="45720">
             <a:spAutoFit/>
           </a:bodyPr>
           <a:lstStyle/>
@@ -5705,27 +7735,45 @@
               </a:defRPr>
             </a:pPr>
             <a:r>
-              <a:rPr sz="2400" b="1">
+              <a:rPr sz="1200" b="0">
                 <a:solidFill>
-                  <a:srgbClr val="25342A"/>
+                  <a:srgbClr val="5F6F63"/>
                 </a:solidFill>
                 <a:latin typeface="Roboto"/>
               </a:rPr>
-              <a:t>What it shows · Program: Housing support (2025)</a:t>
-            </a:r>
-          </a:p>
-        </p:txBody>
-      </p:sp>
-      <p:sp>
-        <p:nvSpPr>
-          <p:cNvPr id="5" name="Rectangle 4"/>
+              <a:t>Grant spending, by month · Emergency relief</a:t>
+            </a:r>
+          </a:p>
+        </p:txBody>
+      </p:sp>
+      <p:graphicFrame>
+        <p:nvGraphicFramePr>
+          <p:cNvPr id="6" name="Chart 5"/>
+          <p:cNvGraphicFramePr>
+            <a:graphicFrameLocks noGrp="1"/>
+          </p:cNvGraphicFramePr>
+          <p:nvPr/>
+        </p:nvGraphicFramePr>
+        <p:xfrm>
+          <a:off x="457200" y="1278636"/>
+          <a:ext cx="11277295" cy="3445764"/>
+        </p:xfrm>
+        <a:graphic>
+          <a:graphicData uri="http://schemas.openxmlformats.org/drawingml/2006/chart">
+            <c:chart xmlns:c="http://schemas.openxmlformats.org/drawingml/2006/chart" r:id="rId3"/>
+          </a:graphicData>
+        </a:graphic>
+      </p:graphicFrame>
+      <p:sp>
+        <p:nvSpPr>
+          <p:cNvPr id="7" name="Rectangle 6"/>
           <p:cNvSpPr/>
           <p:nvPr/>
         </p:nvSpPr>
         <p:spPr>
           <a:xfrm>
-            <a:off x="457200" y="1554480"/>
-            <a:ext cx="5501487" cy="4389120"/>
+            <a:off x="457200" y="4815840"/>
+            <a:ext cx="5501487" cy="1493520"/>
           </a:xfrm>
           <a:prstGeom prst="rect">
             <a:avLst/>
@@ -5767,14 +7815,14 @@
       </p:sp>
       <p:sp>
         <p:nvSpPr>
-          <p:cNvPr id="6" name="TextBox 5"/>
+          <p:cNvPr id="8" name="TextBox 7"/>
           <p:cNvSpPr txBox="1"/>
           <p:nvPr/>
         </p:nvSpPr>
         <p:spPr>
           <a:xfrm>
-            <a:off x="685800" y="1691640"/>
-            <a:ext cx="5044287" cy="365760"/>
+            <a:off x="594360" y="4870704"/>
+            <a:ext cx="5227167" cy="274320"/>
           </a:xfrm>
           <a:prstGeom prst="rect">
             <a:avLst/>
@@ -5782,7 +7830,7 @@
           <a:noFill/>
         </p:spPr>
         <p:txBody>
-          <a:bodyPr wrap="square">
+          <a:bodyPr wrap="square" lIns="45720" rIns="45720">
             <a:spAutoFit/>
           </a:bodyPr>
           <a:lstStyle/>
@@ -5793,7 +7841,7 @@
               </a:defRPr>
             </a:pPr>
             <a:r>
-              <a:rPr sz="1100" b="1">
+              <a:rPr sz="1000" b="1">
                 <a:solidFill>
                   <a:srgbClr val="5F6F63"/>
                 </a:solidFill>
@@ -5806,14 +7854,14 @@
       </p:sp>
       <p:sp>
         <p:nvSpPr>
-          <p:cNvPr id="7" name="TextBox 6"/>
+          <p:cNvPr id="9" name="TextBox 8"/>
           <p:cNvSpPr txBox="1"/>
           <p:nvPr/>
         </p:nvSpPr>
         <p:spPr>
           <a:xfrm>
-            <a:off x="685800" y="2103120"/>
-            <a:ext cx="5044287" cy="3749039"/>
+            <a:off x="594360" y="5145024"/>
+            <a:ext cx="5227167" cy="1127760"/>
           </a:xfrm>
           <a:prstGeom prst="rect">
             <a:avLst/>
@@ -5821,7 +7869,7 @@
           <a:noFill/>
         </p:spPr>
         <p:txBody>
-          <a:bodyPr wrap="square">
+          <a:bodyPr wrap="square" lIns="45720" rIns="45720">
             <a:spAutoFit/>
           </a:bodyPr>
           <a:lstStyle/>
@@ -5832,27 +7880,27 @@
               </a:defRPr>
             </a:pPr>
             <a:r>
-              <a:rPr sz="1600" b="0">
+              <a:rPr sz="1200" b="0">
                 <a:solidFill>
                   <a:srgbClr val="25342A"/>
                 </a:solidFill>
                 <a:latin typeface="Roboto"/>
               </a:rPr>
-              <a:t>Housing support (2025) cost $52,362 in full in November: $30,000 paid by the State Housing Program grant, and $22,362 of shared costs no grant covers. It has spent 99.6% of its budget to date, with $29,100 left and 1 months to go.</a:t>
-            </a:r>
-          </a:p>
-        </p:txBody>
-      </p:sp>
-      <p:sp>
-        <p:nvSpPr>
-          <p:cNvPr id="8" name="Rectangle 7"/>
+              <a:t>Emergency relief cost $19,898 in full in November: $11,400 paid by the Federal community grant grant, and $8,498 of shared costs no grant covers. It has spent 99.7% of its budget to date (spending before October 2024 taken at budget), with $12,900 left and 1 months to go.</a:t>
+            </a:r>
+          </a:p>
+        </p:txBody>
+      </p:sp>
+      <p:sp>
+        <p:nvSpPr>
+          <p:cNvPr id="10" name="Rectangle 9"/>
           <p:cNvSpPr/>
           <p:nvPr/>
         </p:nvSpPr>
         <p:spPr>
           <a:xfrm>
-            <a:off x="6233007" y="1554480"/>
-            <a:ext cx="5501487" cy="4389120"/>
+            <a:off x="6233007" y="4815840"/>
+            <a:ext cx="5501487" cy="1493520"/>
           </a:xfrm>
           <a:prstGeom prst="rect">
             <a:avLst/>
@@ -5894,14 +7942,14 @@
       </p:sp>
       <p:sp>
         <p:nvSpPr>
-          <p:cNvPr id="9" name="TextBox 8"/>
+          <p:cNvPr id="11" name="TextBox 10"/>
           <p:cNvSpPr txBox="1"/>
           <p:nvPr/>
         </p:nvSpPr>
         <p:spPr>
           <a:xfrm>
-            <a:off x="6461607" y="1691640"/>
-            <a:ext cx="5044287" cy="365760"/>
+            <a:off x="6370167" y="4870704"/>
+            <a:ext cx="5227167" cy="274320"/>
           </a:xfrm>
           <a:prstGeom prst="rect">
             <a:avLst/>
@@ -5909,7 +7957,7 @@
           <a:noFill/>
         </p:spPr>
         <p:txBody>
-          <a:bodyPr wrap="square">
+          <a:bodyPr wrap="square" lIns="45720" rIns="45720">
             <a:spAutoFit/>
           </a:bodyPr>
           <a:lstStyle/>
@@ -5920,7 +7968,7 @@
               </a:defRPr>
             </a:pPr>
             <a:r>
-              <a:rPr sz="1100" b="1">
+              <a:rPr sz="1000" b="1">
                 <a:solidFill>
                   <a:srgbClr val="5F6F63"/>
                 </a:solidFill>
@@ -5933,14 +7981,14 @@
       </p:sp>
       <p:sp>
         <p:nvSpPr>
-          <p:cNvPr id="10" name="TextBox 9"/>
+          <p:cNvPr id="12" name="TextBox 11"/>
           <p:cNvSpPr txBox="1"/>
           <p:nvPr/>
         </p:nvSpPr>
         <p:spPr>
           <a:xfrm>
-            <a:off x="6461607" y="2103120"/>
-            <a:ext cx="5044287" cy="3749039"/>
+            <a:off x="6370167" y="5145024"/>
+            <a:ext cx="5227167" cy="1127760"/>
           </a:xfrm>
           <a:prstGeom prst="rect">
             <a:avLst/>
@@ -5948,7 +7996,7 @@
           <a:noFill/>
         </p:spPr>
         <p:txBody>
-          <a:bodyPr wrap="square">
+          <a:bodyPr wrap="square" lIns="45720" rIns="45720">
             <a:spAutoFit/>
           </a:bodyPr>
           <a:lstStyle/>
@@ -5959,27 +8007,27 @@
               </a:defRPr>
             </a:pPr>
             <a:r>
-              <a:rPr sz="1600" b="0">
+              <a:rPr sz="1200" b="0">
                 <a:solidFill>
                   <a:srgbClr val="25342A"/>
                 </a:solidFill>
                 <a:latin typeface="Roboto"/>
               </a:rPr>
-              <a:t>The full cost is $52,362 a month; $22,362 of it is shared cost the grant doesn't pay for. Worth asking for as much of it as the funder allows at renewal.</a:t>
-            </a:r>
-          </a:p>
-        </p:txBody>
-      </p:sp>
-      <p:sp>
-        <p:nvSpPr>
-          <p:cNvPr id="11" name="TextBox 10"/>
+              <a:t>The full cost is $19,898 a month; $8,498 of it is shared cost the grant doesn't pay for. Worth asking for as much of it as the funder allows at renewal.</a:t>
+            </a:r>
+          </a:p>
+        </p:txBody>
+      </p:sp>
+      <p:sp>
+        <p:nvSpPr>
+          <p:cNvPr id="13" name="TextBox 12"/>
           <p:cNvSpPr txBox="1"/>
           <p:nvPr/>
         </p:nvSpPr>
         <p:spPr>
           <a:xfrm>
             <a:off x="457200" y="6492240"/>
-            <a:ext cx="3657600" cy="274320"/>
+            <a:ext cx="2926080" cy="274320"/>
           </a:xfrm>
           <a:prstGeom prst="rect">
             <a:avLst/>
@@ -5987,7 +8035,7 @@
           <a:noFill/>
         </p:spPr>
         <p:txBody>
-          <a:bodyPr wrap="square">
+          <a:bodyPr wrap="square" lIns="45720" rIns="45720">
             <a:spAutoFit/>
           </a:bodyPr>
           <a:lstStyle/>
@@ -6011,14 +8059,14 @@
       </p:sp>
       <p:sp>
         <p:nvSpPr>
-          <p:cNvPr id="12" name="TextBox 11"/>
+          <p:cNvPr id="14" name="TextBox 13"/>
           <p:cNvSpPr txBox="1"/>
           <p:nvPr/>
         </p:nvSpPr>
         <p:spPr>
           <a:xfrm>
-            <a:off x="4297680" y="6492240"/>
-            <a:ext cx="3657600" cy="274320"/>
+            <a:off x="3108960" y="6492240"/>
+            <a:ext cx="5943600" cy="274320"/>
           </a:xfrm>
           <a:prstGeom prst="rect">
             <a:avLst/>
@@ -6026,7 +8074,7 @@
           <a:noFill/>
         </p:spPr>
         <p:txBody>
-          <a:bodyPr wrap="square">
+          <a:bodyPr wrap="square" lIns="45720" rIns="45720">
             <a:spAutoFit/>
           </a:bodyPr>
           <a:lstStyle/>
@@ -6043,14 +8091,14 @@
                 </a:solidFill>
                 <a:latin typeface="Roboto"/>
               </a:rPr>
-              <a:t>Data retrieved 2pm, Tue 6 Oct 2026 · Sample data</a:t>
-            </a:r>
-          </a:p>
-        </p:txBody>
-      </p:sp>
-      <p:sp>
-        <p:nvSpPr>
-          <p:cNvPr id="13" name="TextBox 12"/>
+              <a:t>Data retrieved 2pm, Tue 6 Oct 2026 · Generated 8 Oct 2026, 9:35am · Sample data · Made with Python (python-pptx)</a:t>
+            </a:r>
+          </a:p>
+        </p:txBody>
+      </p:sp>
+      <p:sp>
+        <p:nvSpPr>
+          <p:cNvPr id="15" name="TextBox 14"/>
           <p:cNvSpPr txBox="1"/>
           <p:nvPr/>
         </p:nvSpPr>
@@ -6065,7 +8113,7 @@
           <a:noFill/>
         </p:spPr>
         <p:txBody>
-          <a:bodyPr wrap="square">
+          <a:bodyPr wrap="square" lIns="45720" rIns="45720">
             <a:spAutoFit/>
           </a:bodyPr>
           <a:lstStyle/>
@@ -6082,7 +8130,7 @@
                 </a:solidFill>
                 <a:latin typeface="Roboto"/>
               </a:rPr>
-              <a:t>Slide 5 of 10</a:t>
+              <a:t>Slide 5 of 7</a:t>
             </a:r>
           </a:p>
         </p:txBody>
@@ -6107,7 +8155,44 @@
       <p:grpSpPr/>
       <p:sp>
         <p:nvSpPr>
-          <p:cNvPr id="2" name="Rectangle 1"/>
+          <p:cNvPr id="2" name="Title 1"/>
+          <p:cNvSpPr>
+            <a:spLocks noGrp="1"/>
+          </p:cNvSpPr>
+          <p:nvPr>
+            <p:ph type="title"/>
+          </p:nvPr>
+        </p:nvSpPr>
+        <p:spPr>
+          <a:xfrm>
+            <a:off x="457200" y="384048"/>
+            <a:ext cx="11277295" cy="475488"/>
+          </a:xfrm>
+        </p:spPr>
+        <p:txBody>
+          <a:bodyPr wrap="square" lIns="45720" rIns="45720" tIns="0" bIns="0" anchor="t"/>
+          <a:lstStyle/>
+          <a:p>
+            <a:pPr algn="l">
+              <a:defRPr>
+                <a:latin typeface="Roboto"/>
+              </a:defRPr>
+            </a:pPr>
+            <a:r>
+              <a:rPr sz="2400" b="1">
+                <a:solidFill>
+                  <a:srgbClr val="25342A"/>
+                </a:solidFill>
+                <a:latin typeface="Roboto"/>
+              </a:rPr>
+              <a:t>Digital literacy</a:t>
+            </a:r>
+          </a:p>
+        </p:txBody>
+      </p:sp>
+      <p:sp>
+        <p:nvSpPr>
+          <p:cNvPr id="3" name="Rectangle 2"/>
           <p:cNvSpPr/>
           <p:nvPr/>
         </p:nvSpPr>
@@ -6154,14 +8239,14 @@
       </p:sp>
       <p:sp>
         <p:nvSpPr>
-          <p:cNvPr id="3" name="TextBox 2"/>
+          <p:cNvPr id="4" name="TextBox 3"/>
           <p:cNvSpPr txBox="1"/>
           <p:nvPr/>
         </p:nvSpPr>
         <p:spPr>
           <a:xfrm>
-            <a:off x="457200" y="164592"/>
-            <a:ext cx="7315200" cy="274320"/>
+            <a:off x="457200" y="146304"/>
+            <a:ext cx="8229600" cy="256032"/>
           </a:xfrm>
           <a:prstGeom prst="rect">
             <a:avLst/>
@@ -6169,7 +8254,7 @@
           <a:noFill/>
         </p:spPr>
         <p:txBody>
-          <a:bodyPr wrap="square">
+          <a:bodyPr wrap="square" lIns="45720" rIns="45720">
             <a:spAutoFit/>
           </a:bodyPr>
           <a:lstStyle/>
@@ -6193,14 +8278,14 @@
       </p:sp>
       <p:sp>
         <p:nvSpPr>
-          <p:cNvPr id="4" name="TextBox 3"/>
+          <p:cNvPr id="5" name="TextBox 4"/>
           <p:cNvSpPr txBox="1"/>
           <p:nvPr/>
         </p:nvSpPr>
         <p:spPr>
           <a:xfrm>
-            <a:off x="457200" y="411480"/>
-            <a:ext cx="11247120" cy="548640"/>
+            <a:off x="457200" y="914400"/>
+            <a:ext cx="11277295" cy="263652"/>
           </a:xfrm>
           <a:prstGeom prst="rect">
             <a:avLst/>
@@ -6208,7 +8293,7 @@
           <a:noFill/>
         </p:spPr>
         <p:txBody>
-          <a:bodyPr wrap="square">
+          <a:bodyPr wrap="square" lIns="45720" rIns="45720">
             <a:spAutoFit/>
           </a:bodyPr>
           <a:lstStyle/>
@@ -6219,27 +8304,45 @@
               </a:defRPr>
             </a:pPr>
             <a:r>
-              <a:rPr sz="2400" b="1">
+              <a:rPr sz="1200" b="0">
                 <a:solidFill>
-                  <a:srgbClr val="25342A"/>
+                  <a:srgbClr val="5F6F63"/>
                 </a:solidFill>
                 <a:latin typeface="Roboto"/>
               </a:rPr>
-              <a:t>What it shows · Program: Youth outreach</a:t>
-            </a:r>
-          </a:p>
-        </p:txBody>
-      </p:sp>
-      <p:sp>
-        <p:nvSpPr>
-          <p:cNvPr id="5" name="Rectangle 4"/>
+              <a:t>Grant spending, by month · Digital literacy</a:t>
+            </a:r>
+          </a:p>
+        </p:txBody>
+      </p:sp>
+      <p:graphicFrame>
+        <p:nvGraphicFramePr>
+          <p:cNvPr id="6" name="Chart 5"/>
+          <p:cNvGraphicFramePr>
+            <a:graphicFrameLocks noGrp="1"/>
+          </p:cNvGraphicFramePr>
+          <p:nvPr/>
+        </p:nvGraphicFramePr>
+        <p:xfrm>
+          <a:off x="457200" y="1278636"/>
+          <a:ext cx="11277295" cy="3643884"/>
+        </p:xfrm>
+        <a:graphic>
+          <a:graphicData uri="http://schemas.openxmlformats.org/drawingml/2006/chart">
+            <c:chart xmlns:c="http://schemas.openxmlformats.org/drawingml/2006/chart" r:id="rId3"/>
+          </a:graphicData>
+        </a:graphic>
+      </p:graphicFrame>
+      <p:sp>
+        <p:nvSpPr>
+          <p:cNvPr id="7" name="Rectangle 6"/>
           <p:cNvSpPr/>
           <p:nvPr/>
         </p:nvSpPr>
         <p:spPr>
           <a:xfrm>
-            <a:off x="457200" y="1554480"/>
-            <a:ext cx="5501487" cy="4389120"/>
+            <a:off x="457200" y="5013960"/>
+            <a:ext cx="5501487" cy="1295400"/>
           </a:xfrm>
           <a:prstGeom prst="rect">
             <a:avLst/>
@@ -6281,14 +8384,14 @@
       </p:sp>
       <p:sp>
         <p:nvSpPr>
-          <p:cNvPr id="6" name="TextBox 5"/>
+          <p:cNvPr id="8" name="TextBox 7"/>
           <p:cNvSpPr txBox="1"/>
           <p:nvPr/>
         </p:nvSpPr>
         <p:spPr>
           <a:xfrm>
-            <a:off x="685800" y="1691640"/>
-            <a:ext cx="5044287" cy="365760"/>
+            <a:off x="594360" y="5068824"/>
+            <a:ext cx="5227167" cy="274320"/>
           </a:xfrm>
           <a:prstGeom prst="rect">
             <a:avLst/>
@@ -6296,7 +8399,7 @@
           <a:noFill/>
         </p:spPr>
         <p:txBody>
-          <a:bodyPr wrap="square">
+          <a:bodyPr wrap="square" lIns="45720" rIns="45720">
             <a:spAutoFit/>
           </a:bodyPr>
           <a:lstStyle/>
@@ -6307,7 +8410,7 @@
               </a:defRPr>
             </a:pPr>
             <a:r>
-              <a:rPr sz="1100" b="1">
+              <a:rPr sz="1000" b="1">
                 <a:solidFill>
                   <a:srgbClr val="5F6F63"/>
                 </a:solidFill>
@@ -6320,14 +8423,14 @@
       </p:sp>
       <p:sp>
         <p:nvSpPr>
-          <p:cNvPr id="7" name="TextBox 6"/>
+          <p:cNvPr id="9" name="TextBox 8"/>
           <p:cNvSpPr txBox="1"/>
           <p:nvPr/>
         </p:nvSpPr>
         <p:spPr>
           <a:xfrm>
-            <a:off x="685800" y="2103120"/>
-            <a:ext cx="5044287" cy="3749039"/>
+            <a:off x="594360" y="5343144"/>
+            <a:ext cx="5227167" cy="929640"/>
           </a:xfrm>
           <a:prstGeom prst="rect">
             <a:avLst/>
@@ -6335,7 +8438,7 @@
           <a:noFill/>
         </p:spPr>
         <p:txBody>
-          <a:bodyPr wrap="square">
+          <a:bodyPr wrap="square" lIns="45720" rIns="45720">
             <a:spAutoFit/>
           </a:bodyPr>
           <a:lstStyle/>
@@ -6346,27 +8449,27 @@
               </a:defRPr>
             </a:pPr>
             <a:r>
-              <a:rPr sz="1600" b="0">
+              <a:rPr sz="1200" b="0">
                 <a:solidFill>
                   <a:srgbClr val="25342A"/>
                 </a:solidFill>
                 <a:latin typeface="Roboto"/>
               </a:rPr>
-              <a:t>Youth outreach cost $36,791 in full in November: $21,079 paid by the State Department of Families grant, and $15,712 of shared costs no grant covers. It has spent 99.0% of its budget to date, with $380,952 left and 19 months to go.</a:t>
-            </a:r>
-          </a:p>
-        </p:txBody>
-      </p:sp>
-      <p:sp>
-        <p:nvSpPr>
-          <p:cNvPr id="8" name="Rectangle 7"/>
+              <a:t>Digital literacy cost $8,003 in full in November: $4,585 paid by the Philanthropic foundation grant, and $3,418 of shared costs no grant covers. It has spent 97.5% of its budget to date, with $80,255 left and 16 months to go.</a:t>
+            </a:r>
+          </a:p>
+        </p:txBody>
+      </p:sp>
+      <p:sp>
+        <p:nvSpPr>
+          <p:cNvPr id="10" name="Rectangle 9"/>
           <p:cNvSpPr/>
           <p:nvPr/>
         </p:nvSpPr>
         <p:spPr>
           <a:xfrm>
-            <a:off x="6233007" y="1554480"/>
-            <a:ext cx="5501487" cy="4389120"/>
+            <a:off x="6233007" y="5013960"/>
+            <a:ext cx="5501487" cy="1295400"/>
           </a:xfrm>
           <a:prstGeom prst="rect">
             <a:avLst/>
@@ -6408,14 +8511,14 @@
       </p:sp>
       <p:sp>
         <p:nvSpPr>
-          <p:cNvPr id="9" name="TextBox 8"/>
+          <p:cNvPr id="11" name="TextBox 10"/>
           <p:cNvSpPr txBox="1"/>
           <p:nvPr/>
         </p:nvSpPr>
         <p:spPr>
           <a:xfrm>
-            <a:off x="6461607" y="1691640"/>
-            <a:ext cx="5044287" cy="365760"/>
+            <a:off x="6370167" y="5068824"/>
+            <a:ext cx="5227167" cy="274320"/>
           </a:xfrm>
           <a:prstGeom prst="rect">
             <a:avLst/>
@@ -6423,7 +8526,7 @@
           <a:noFill/>
         </p:spPr>
         <p:txBody>
-          <a:bodyPr wrap="square">
+          <a:bodyPr wrap="square" lIns="45720" rIns="45720">
             <a:spAutoFit/>
           </a:bodyPr>
           <a:lstStyle/>
@@ -6434,7 +8537,7 @@
               </a:defRPr>
             </a:pPr>
             <a:r>
-              <a:rPr sz="1100" b="1">
+              <a:rPr sz="1000" b="1">
                 <a:solidFill>
                   <a:srgbClr val="5F6F63"/>
                 </a:solidFill>
@@ -6447,14 +8550,14 @@
       </p:sp>
       <p:sp>
         <p:nvSpPr>
-          <p:cNvPr id="10" name="TextBox 9"/>
+          <p:cNvPr id="12" name="TextBox 11"/>
           <p:cNvSpPr txBox="1"/>
           <p:nvPr/>
         </p:nvSpPr>
         <p:spPr>
           <a:xfrm>
-            <a:off x="6461607" y="2103120"/>
-            <a:ext cx="5044287" cy="3749039"/>
+            <a:off x="6370167" y="5343144"/>
+            <a:ext cx="5227167" cy="929640"/>
           </a:xfrm>
           <a:prstGeom prst="rect">
             <a:avLst/>
@@ -6462,7 +8565,7 @@
           <a:noFill/>
         </p:spPr>
         <p:txBody>
-          <a:bodyPr wrap="square">
+          <a:bodyPr wrap="square" lIns="45720" rIns="45720">
             <a:spAutoFit/>
           </a:bodyPr>
           <a:lstStyle/>
@@ -6473,27 +8576,27 @@
               </a:defRPr>
             </a:pPr>
             <a:r>
-              <a:rPr sz="1600" b="0">
+              <a:rPr sz="1200" b="0">
                 <a:solidFill>
                   <a:srgbClr val="25342A"/>
                 </a:solidFill>
                 <a:latin typeface="Roboto"/>
               </a:rPr>
-              <a:t>The full cost is $36,791 a month; $15,712 of it is shared cost the grant doesn't pay for. Worth asking for as much of it as the funder allows at renewal.</a:t>
-            </a:r>
-          </a:p>
-        </p:txBody>
-      </p:sp>
-      <p:sp>
-        <p:nvSpPr>
-          <p:cNvPr id="11" name="TextBox 10"/>
+              <a:t>The full cost is $8,003 a month; $3,418 of it is shared cost the grant doesn't pay for. Worth asking for as much of it as the funder allows at renewal.</a:t>
+            </a:r>
+          </a:p>
+        </p:txBody>
+      </p:sp>
+      <p:sp>
+        <p:nvSpPr>
+          <p:cNvPr id="13" name="TextBox 12"/>
           <p:cNvSpPr txBox="1"/>
           <p:nvPr/>
         </p:nvSpPr>
         <p:spPr>
           <a:xfrm>
             <a:off x="457200" y="6492240"/>
-            <a:ext cx="3657600" cy="274320"/>
+            <a:ext cx="2926080" cy="274320"/>
           </a:xfrm>
           <a:prstGeom prst="rect">
             <a:avLst/>
@@ -6501,7 +8604,7 @@
           <a:noFill/>
         </p:spPr>
         <p:txBody>
-          <a:bodyPr wrap="square">
+          <a:bodyPr wrap="square" lIns="45720" rIns="45720">
             <a:spAutoFit/>
           </a:bodyPr>
           <a:lstStyle/>
@@ -6525,14 +8628,14 @@
       </p:sp>
       <p:sp>
         <p:nvSpPr>
-          <p:cNvPr id="12" name="TextBox 11"/>
+          <p:cNvPr id="14" name="TextBox 13"/>
           <p:cNvSpPr txBox="1"/>
           <p:nvPr/>
         </p:nvSpPr>
         <p:spPr>
           <a:xfrm>
-            <a:off x="4297680" y="6492240"/>
-            <a:ext cx="3657600" cy="274320"/>
+            <a:off x="3108960" y="6492240"/>
+            <a:ext cx="5943600" cy="274320"/>
           </a:xfrm>
           <a:prstGeom prst="rect">
             <a:avLst/>
@@ -6540,7 +8643,7 @@
           <a:noFill/>
         </p:spPr>
         <p:txBody>
-          <a:bodyPr wrap="square">
+          <a:bodyPr wrap="square" lIns="45720" rIns="45720">
             <a:spAutoFit/>
           </a:bodyPr>
           <a:lstStyle/>
@@ -6557,14 +8660,14 @@
                 </a:solidFill>
                 <a:latin typeface="Roboto"/>
               </a:rPr>
-              <a:t>Data retrieved 2pm, Tue 6 Oct 2026 · Sample data</a:t>
-            </a:r>
-          </a:p>
-        </p:txBody>
-      </p:sp>
-      <p:sp>
-        <p:nvSpPr>
-          <p:cNvPr id="13" name="TextBox 12"/>
+              <a:t>Data retrieved 2pm, Tue 6 Oct 2026 · Generated 8 Oct 2026, 9:35am · Sample data · Made with Python (python-pptx)</a:t>
+            </a:r>
+          </a:p>
+        </p:txBody>
+      </p:sp>
+      <p:sp>
+        <p:nvSpPr>
+          <p:cNvPr id="15" name="TextBox 14"/>
           <p:cNvSpPr txBox="1"/>
           <p:nvPr/>
         </p:nvSpPr>
@@ -6579,7 +8682,7 @@
           <a:noFill/>
         </p:spPr>
         <p:txBody>
-          <a:bodyPr wrap="square">
+          <a:bodyPr wrap="square" lIns="45720" rIns="45720">
             <a:spAutoFit/>
           </a:bodyPr>
           <a:lstStyle/>
@@ -6596,7 +8699,7 @@
                 </a:solidFill>
                 <a:latin typeface="Roboto"/>
               </a:rPr>
-              <a:t>Slide 6 of 10</a:t>
+              <a:t>Slide 6 of 7</a:t>
             </a:r>
           </a:p>
         </p:txBody>
@@ -6621,7 +8724,44 @@
       <p:grpSpPr/>
       <p:sp>
         <p:nvSpPr>
-          <p:cNvPr id="2" name="Rectangle 1"/>
+          <p:cNvPr id="2" name="Title 1"/>
+          <p:cNvSpPr>
+            <a:spLocks noGrp="1"/>
+          </p:cNvSpPr>
+          <p:nvPr>
+            <p:ph type="title"/>
+          </p:nvPr>
+        </p:nvSpPr>
+        <p:spPr>
+          <a:xfrm>
+            <a:off x="457200" y="384048"/>
+            <a:ext cx="11277295" cy="475488"/>
+          </a:xfrm>
+        </p:spPr>
+        <p:txBody>
+          <a:bodyPr wrap="square" lIns="45720" rIns="45720" tIns="0" bIns="0" anchor="t"/>
+          <a:lstStyle/>
+          <a:p>
+            <a:pPr algn="l">
+              <a:defRPr>
+                <a:latin typeface="Roboto"/>
+              </a:defRPr>
+            </a:pPr>
+            <a:r>
+              <a:rPr sz="2400" b="1">
+                <a:solidFill>
+                  <a:srgbClr val="25342A"/>
+                </a:solidFill>
+                <a:latin typeface="Roboto"/>
+              </a:rPr>
+              <a:t>Community meals (2025-26)</a:t>
+            </a:r>
+          </a:p>
+        </p:txBody>
+      </p:sp>
+      <p:sp>
+        <p:nvSpPr>
+          <p:cNvPr id="3" name="Rectangle 2"/>
           <p:cNvSpPr/>
           <p:nvPr/>
         </p:nvSpPr>
@@ -6668,14 +8808,14 @@
       </p:sp>
       <p:sp>
         <p:nvSpPr>
-          <p:cNvPr id="3" name="TextBox 2"/>
+          <p:cNvPr id="4" name="TextBox 3"/>
           <p:cNvSpPr txBox="1"/>
           <p:nvPr/>
         </p:nvSpPr>
         <p:spPr>
           <a:xfrm>
-            <a:off x="457200" y="164592"/>
-            <a:ext cx="7315200" cy="274320"/>
+            <a:off x="457200" y="146304"/>
+            <a:ext cx="8229600" cy="256032"/>
           </a:xfrm>
           <a:prstGeom prst="rect">
             <a:avLst/>
@@ -6683,7 +8823,7 @@
           <a:noFill/>
         </p:spPr>
         <p:txBody>
-          <a:bodyPr wrap="square">
+          <a:bodyPr wrap="square" lIns="45720" rIns="45720">
             <a:spAutoFit/>
           </a:bodyPr>
           <a:lstStyle/>
@@ -6707,14 +8847,14 @@
       </p:sp>
       <p:sp>
         <p:nvSpPr>
-          <p:cNvPr id="4" name="TextBox 3"/>
+          <p:cNvPr id="5" name="TextBox 4"/>
           <p:cNvSpPr txBox="1"/>
           <p:nvPr/>
         </p:nvSpPr>
         <p:spPr>
           <a:xfrm>
-            <a:off x="457200" y="411480"/>
-            <a:ext cx="11247120" cy="548640"/>
+            <a:off x="457200" y="914400"/>
+            <a:ext cx="11277295" cy="263652"/>
           </a:xfrm>
           <a:prstGeom prst="rect">
             <a:avLst/>
@@ -6722,7 +8862,7 @@
           <a:noFill/>
         </p:spPr>
         <p:txBody>
-          <a:bodyPr wrap="square">
+          <a:bodyPr wrap="square" lIns="45720" rIns="45720">
             <a:spAutoFit/>
           </a:bodyPr>
           <a:lstStyle/>
@@ -6733,27 +8873,45 @@
               </a:defRPr>
             </a:pPr>
             <a:r>
-              <a:rPr sz="2400" b="1">
+              <a:rPr sz="1200" b="0">
                 <a:solidFill>
-                  <a:srgbClr val="25342A"/>
+                  <a:srgbClr val="5F6F63"/>
                 </a:solidFill>
                 <a:latin typeface="Roboto"/>
               </a:rPr>
-              <a:t>What it shows · Program: Emergency relief</a:t>
-            </a:r>
-          </a:p>
-        </p:txBody>
-      </p:sp>
-      <p:sp>
-        <p:nvSpPr>
-          <p:cNvPr id="5" name="Rectangle 4"/>
+              <a:t>Grant spending, by month · Community meals (2025-26)</a:t>
+            </a:r>
+          </a:p>
+        </p:txBody>
+      </p:sp>
+      <p:graphicFrame>
+        <p:nvGraphicFramePr>
+          <p:cNvPr id="6" name="Chart 5"/>
+          <p:cNvGraphicFramePr>
+            <a:graphicFrameLocks noGrp="1"/>
+          </p:cNvGraphicFramePr>
+          <p:nvPr/>
+        </p:nvGraphicFramePr>
+        <p:xfrm>
+          <a:off x="457200" y="1278636"/>
+          <a:ext cx="11277295" cy="3643884"/>
+        </p:xfrm>
+        <a:graphic>
+          <a:graphicData uri="http://schemas.openxmlformats.org/drawingml/2006/chart">
+            <c:chart xmlns:c="http://schemas.openxmlformats.org/drawingml/2006/chart" r:id="rId3"/>
+          </a:graphicData>
+        </a:graphic>
+      </p:graphicFrame>
+      <p:sp>
+        <p:nvSpPr>
+          <p:cNvPr id="7" name="Rectangle 6"/>
           <p:cNvSpPr/>
           <p:nvPr/>
         </p:nvSpPr>
         <p:spPr>
           <a:xfrm>
-            <a:off x="457200" y="1554480"/>
-            <a:ext cx="5501487" cy="4389120"/>
+            <a:off x="457200" y="5013960"/>
+            <a:ext cx="5501487" cy="1295400"/>
           </a:xfrm>
           <a:prstGeom prst="rect">
             <a:avLst/>
@@ -6795,14 +8953,14 @@
       </p:sp>
       <p:sp>
         <p:nvSpPr>
-          <p:cNvPr id="6" name="TextBox 5"/>
+          <p:cNvPr id="8" name="TextBox 7"/>
           <p:cNvSpPr txBox="1"/>
           <p:nvPr/>
         </p:nvSpPr>
         <p:spPr>
           <a:xfrm>
-            <a:off x="685800" y="1691640"/>
-            <a:ext cx="5044287" cy="365760"/>
+            <a:off x="594360" y="5068824"/>
+            <a:ext cx="5227167" cy="274320"/>
           </a:xfrm>
           <a:prstGeom prst="rect">
             <a:avLst/>
@@ -6810,7 +8968,7 @@
           <a:noFill/>
         </p:spPr>
         <p:txBody>
-          <a:bodyPr wrap="square">
+          <a:bodyPr wrap="square" lIns="45720" rIns="45720">
             <a:spAutoFit/>
           </a:bodyPr>
           <a:lstStyle/>
@@ -6821,7 +8979,7 @@
               </a:defRPr>
             </a:pPr>
             <a:r>
-              <a:rPr sz="1100" b="1">
+              <a:rPr sz="1000" b="1">
                 <a:solidFill>
                   <a:srgbClr val="5F6F63"/>
                 </a:solidFill>
@@ -6834,14 +8992,14 @@
       </p:sp>
       <p:sp>
         <p:nvSpPr>
-          <p:cNvPr id="7" name="TextBox 6"/>
+          <p:cNvPr id="9" name="TextBox 8"/>
           <p:cNvSpPr txBox="1"/>
           <p:nvPr/>
         </p:nvSpPr>
         <p:spPr>
           <a:xfrm>
-            <a:off x="685800" y="2103120"/>
-            <a:ext cx="5044287" cy="3749039"/>
+            <a:off x="594360" y="5343144"/>
+            <a:ext cx="5227167" cy="929640"/>
           </a:xfrm>
           <a:prstGeom prst="rect">
             <a:avLst/>
@@ -6849,7 +9007,7 @@
           <a:noFill/>
         </p:spPr>
         <p:txBody>
-          <a:bodyPr wrap="square">
+          <a:bodyPr wrap="square" lIns="45720" rIns="45720">
             <a:spAutoFit/>
           </a:bodyPr>
           <a:lstStyle/>
@@ -6860,27 +9018,27 @@
               </a:defRPr>
             </a:pPr>
             <a:r>
-              <a:rPr sz="1600" b="0">
+              <a:rPr sz="1200" b="0">
                 <a:solidFill>
                   <a:srgbClr val="25342A"/>
                 </a:solidFill>
                 <a:latin typeface="Roboto"/>
               </a:rPr>
-              <a:t>Emergency relief cost $19,898 in full in November: $11,400 paid by the Federal community grant grant, and $8,498 of shared costs no grant covers. It has spent 99.7% of its budget to date (spending before October 2024 taken at budget), with $12,900 left and 1 months to go.</a:t>
-            </a:r>
-          </a:p>
-        </p:txBody>
-      </p:sp>
-      <p:sp>
-        <p:nvSpPr>
-          <p:cNvPr id="8" name="Rectangle 7"/>
+              <a:t>Community meals (2025-26) cost $5,411 in full in November: $3,100 paid by the Local council community grant grant, and $2,311 of shared costs no grant covers. It has spent 93.8% of its budget to date, with $26,800 left and 7 months to go.</a:t>
+            </a:r>
+          </a:p>
+        </p:txBody>
+      </p:sp>
+      <p:sp>
+        <p:nvSpPr>
+          <p:cNvPr id="10" name="Rectangle 9"/>
           <p:cNvSpPr/>
           <p:nvPr/>
         </p:nvSpPr>
         <p:spPr>
           <a:xfrm>
-            <a:off x="6233007" y="1554480"/>
-            <a:ext cx="5501487" cy="4389120"/>
+            <a:off x="6233007" y="5013960"/>
+            <a:ext cx="5501487" cy="1295400"/>
           </a:xfrm>
           <a:prstGeom prst="rect">
             <a:avLst/>
@@ -6922,14 +9080,14 @@
       </p:sp>
       <p:sp>
         <p:nvSpPr>
-          <p:cNvPr id="9" name="TextBox 8"/>
+          <p:cNvPr id="11" name="TextBox 10"/>
           <p:cNvSpPr txBox="1"/>
           <p:nvPr/>
         </p:nvSpPr>
         <p:spPr>
           <a:xfrm>
-            <a:off x="6461607" y="1691640"/>
-            <a:ext cx="5044287" cy="365760"/>
+            <a:off x="6370167" y="5068824"/>
+            <a:ext cx="5227167" cy="274320"/>
           </a:xfrm>
           <a:prstGeom prst="rect">
             <a:avLst/>
@@ -6937,7 +9095,7 @@
           <a:noFill/>
         </p:spPr>
         <p:txBody>
-          <a:bodyPr wrap="square">
+          <a:bodyPr wrap="square" lIns="45720" rIns="45720">
             <a:spAutoFit/>
           </a:bodyPr>
           <a:lstStyle/>
@@ -6948,7 +9106,7 @@
               </a:defRPr>
             </a:pPr>
             <a:r>
-              <a:rPr sz="1100" b="1">
+              <a:rPr sz="1000" b="1">
                 <a:solidFill>
                   <a:srgbClr val="5F6F63"/>
                 </a:solidFill>
@@ -6961,14 +9119,14 @@
       </p:sp>
       <p:sp>
         <p:nvSpPr>
-          <p:cNvPr id="10" name="TextBox 9"/>
+          <p:cNvPr id="12" name="TextBox 11"/>
           <p:cNvSpPr txBox="1"/>
           <p:nvPr/>
         </p:nvSpPr>
         <p:spPr>
           <a:xfrm>
-            <a:off x="6461607" y="2103120"/>
-            <a:ext cx="5044287" cy="3749039"/>
+            <a:off x="6370167" y="5343144"/>
+            <a:ext cx="5227167" cy="929640"/>
           </a:xfrm>
           <a:prstGeom prst="rect">
             <a:avLst/>
@@ -6976,7 +9134,7 @@
           <a:noFill/>
         </p:spPr>
         <p:txBody>
-          <a:bodyPr wrap="square">
+          <a:bodyPr wrap="square" lIns="45720" rIns="45720">
             <a:spAutoFit/>
           </a:bodyPr>
           <a:lstStyle/>
@@ -6987,27 +9145,27 @@
               </a:defRPr>
             </a:pPr>
             <a:r>
-              <a:rPr sz="1600" b="0">
+              <a:rPr sz="1200" b="0">
                 <a:solidFill>
                   <a:srgbClr val="25342A"/>
                 </a:solidFill>
                 <a:latin typeface="Roboto"/>
               </a:rPr>
-              <a:t>The full cost is $19,898 a month; $8,498 of it is shared cost the grant doesn't pay for. Worth asking for as much of it as the funder allows at renewal.</a:t>
-            </a:r>
-          </a:p>
-        </p:txBody>
-      </p:sp>
-      <p:sp>
-        <p:nvSpPr>
-          <p:cNvPr id="11" name="TextBox 10"/>
+              <a:t>The full cost is $5,411 a month; $2,311 of it is shared cost the grant doesn't pay for. Worth asking for as much of it as the funder allows at renewal.</a:t>
+            </a:r>
+          </a:p>
+        </p:txBody>
+      </p:sp>
+      <p:sp>
+        <p:nvSpPr>
+          <p:cNvPr id="13" name="TextBox 12"/>
           <p:cNvSpPr txBox="1"/>
           <p:nvPr/>
         </p:nvSpPr>
         <p:spPr>
           <a:xfrm>
             <a:off x="457200" y="6492240"/>
-            <a:ext cx="3657600" cy="274320"/>
+            <a:ext cx="2926080" cy="274320"/>
           </a:xfrm>
           <a:prstGeom prst="rect">
             <a:avLst/>
@@ -7015,7 +9173,7 @@
           <a:noFill/>
         </p:spPr>
         <p:txBody>
-          <a:bodyPr wrap="square">
+          <a:bodyPr wrap="square" lIns="45720" rIns="45720">
             <a:spAutoFit/>
           </a:bodyPr>
           <a:lstStyle/>
@@ -7039,14 +9197,14 @@
       </p:sp>
       <p:sp>
         <p:nvSpPr>
-          <p:cNvPr id="12" name="TextBox 11"/>
+          <p:cNvPr id="14" name="TextBox 13"/>
           <p:cNvSpPr txBox="1"/>
           <p:nvPr/>
         </p:nvSpPr>
         <p:spPr>
           <a:xfrm>
-            <a:off x="4297680" y="6492240"/>
-            <a:ext cx="3657600" cy="274320"/>
+            <a:off x="3108960" y="6492240"/>
+            <a:ext cx="5943600" cy="274320"/>
           </a:xfrm>
           <a:prstGeom prst="rect">
             <a:avLst/>
@@ -7054,7 +9212,7 @@
           <a:noFill/>
         </p:spPr>
         <p:txBody>
-          <a:bodyPr wrap="square">
+          <a:bodyPr wrap="square" lIns="45720" rIns="45720">
             <a:spAutoFit/>
           </a:bodyPr>
           <a:lstStyle/>
@@ -7071,14 +9229,14 @@
                 </a:solidFill>
                 <a:latin typeface="Roboto"/>
               </a:rPr>
-              <a:t>Data retrieved 2pm, Tue 6 Oct 2026 · Sample data</a:t>
-            </a:r>
-          </a:p>
-        </p:txBody>
-      </p:sp>
-      <p:sp>
-        <p:nvSpPr>
-          <p:cNvPr id="13" name="TextBox 12"/>
+              <a:t>Data retrieved 2pm, Tue 6 Oct 2026 · Generated 8 Oct 2026, 9:35am · Sample data · Made with Python (python-pptx)</a:t>
+            </a:r>
+          </a:p>
+        </p:txBody>
+      </p:sp>
+      <p:sp>
+        <p:nvSpPr>
+          <p:cNvPr id="15" name="TextBox 14"/>
           <p:cNvSpPr txBox="1"/>
           <p:nvPr/>
         </p:nvSpPr>
@@ -7093,7 +9251,7 @@
           <a:noFill/>
         </p:spPr>
         <p:txBody>
-          <a:bodyPr wrap="square">
+          <a:bodyPr wrap="square" lIns="45720" rIns="45720">
             <a:spAutoFit/>
           </a:bodyPr>
           <a:lstStyle/>
@@ -7110,1035 +9268,7 @@
                 </a:solidFill>
                 <a:latin typeface="Roboto"/>
               </a:rPr>
-              <a:t>Slide 7 of 10</a:t>
-            </a:r>
-          </a:p>
-        </p:txBody>
-      </p:sp>
-    </p:spTree>
-  </p:cSld>
-  <p:clrMapOvr>
-    <a:masterClrMapping/>
-  </p:clrMapOvr>
-</p:sld>
-</file>
-
-<file path=ppt/slides/slide8.xml><?xml version="1.0" encoding="utf-8"?>
-<p:sld xmlns:a="http://schemas.openxmlformats.org/drawingml/2006/main" xmlns:p="http://schemas.openxmlformats.org/presentationml/2006/main" xmlns:r="http://schemas.openxmlformats.org/officeDocument/2006/relationships">
-  <p:cSld>
-    <p:spTree>
-      <p:nvGrpSpPr>
-        <p:cNvPr id="1" name=""/>
-        <p:cNvGrpSpPr/>
-        <p:nvPr/>
-      </p:nvGrpSpPr>
-      <p:grpSpPr/>
-      <p:sp>
-        <p:nvSpPr>
-          <p:cNvPr id="2" name="Rectangle 1"/>
-          <p:cNvSpPr/>
-          <p:nvPr/>
-        </p:nvSpPr>
-        <p:spPr>
-          <a:xfrm>
-            <a:off x="0" y="0"/>
-            <a:ext cx="12191695" cy="73152"/>
-          </a:xfrm>
-          <a:prstGeom prst="rect">
-            <a:avLst/>
-          </a:prstGeom>
-          <a:solidFill>
-            <a:srgbClr val="2F7A5D"/>
-          </a:solidFill>
-          <a:ln>
-            <a:noFill/>
-          </a:ln>
-        </p:spPr>
-        <p:style>
-          <a:lnRef idx="1">
-            <a:schemeClr val="accent1"/>
-          </a:lnRef>
-          <a:fillRef idx="3">
-            <a:schemeClr val="accent1"/>
-          </a:fillRef>
-          <a:effectRef idx="2">
-            <a:schemeClr val="accent1"/>
-          </a:effectRef>
-          <a:fontRef idx="minor">
-            <a:schemeClr val="lt1"/>
-          </a:fontRef>
-        </p:style>
-        <p:txBody>
-          <a:bodyPr rtlCol="0" anchor="ctr"/>
-          <a:lstStyle/>
-          <a:p>
-            <a:pPr algn="ctr">
-              <a:defRPr>
-                <a:latin typeface="Roboto"/>
-              </a:defRPr>
-            </a:pPr>
-          </a:p>
-        </p:txBody>
-      </p:sp>
-      <p:sp>
-        <p:nvSpPr>
-          <p:cNvPr id="3" name="TextBox 2"/>
-          <p:cNvSpPr txBox="1"/>
-          <p:nvPr/>
-        </p:nvSpPr>
-        <p:spPr>
-          <a:xfrm>
-            <a:off x="457200" y="164592"/>
-            <a:ext cx="7315200" cy="274320"/>
-          </a:xfrm>
-          <a:prstGeom prst="rect">
-            <a:avLst/>
-          </a:prstGeom>
-          <a:noFill/>
-        </p:spPr>
-        <p:txBody>
-          <a:bodyPr wrap="square">
-            <a:spAutoFit/>
-          </a:bodyPr>
-          <a:lstStyle/>
-          <a:p>
-            <a:pPr>
-              <a:defRPr>
-                <a:latin typeface="Roboto"/>
-              </a:defRPr>
-            </a:pPr>
-            <a:r>
-              <a:rPr sz="1000" b="0">
-                <a:solidFill>
-                  <a:srgbClr val="5F6F63"/>
-                </a:solidFill>
-                <a:latin typeface="Roboto"/>
-              </a:rPr>
-              <a:t>Sample Community Services Ltd · What does each program really cost?</a:t>
-            </a:r>
-          </a:p>
-        </p:txBody>
-      </p:sp>
-      <p:sp>
-        <p:nvSpPr>
-          <p:cNvPr id="4" name="TextBox 3"/>
-          <p:cNvSpPr txBox="1"/>
-          <p:nvPr/>
-        </p:nvSpPr>
-        <p:spPr>
-          <a:xfrm>
-            <a:off x="457200" y="411480"/>
-            <a:ext cx="11247120" cy="548640"/>
-          </a:xfrm>
-          <a:prstGeom prst="rect">
-            <a:avLst/>
-          </a:prstGeom>
-          <a:noFill/>
-        </p:spPr>
-        <p:txBody>
-          <a:bodyPr wrap="square">
-            <a:spAutoFit/>
-          </a:bodyPr>
-          <a:lstStyle/>
-          <a:p>
-            <a:pPr>
-              <a:defRPr>
-                <a:latin typeface="Roboto"/>
-              </a:defRPr>
-            </a:pPr>
-            <a:r>
-              <a:rPr sz="2400" b="1">
-                <a:solidFill>
-                  <a:srgbClr val="25342A"/>
-                </a:solidFill>
-                <a:latin typeface="Roboto"/>
-              </a:rPr>
-              <a:t>What it shows · Program: Digital literacy</a:t>
-            </a:r>
-          </a:p>
-        </p:txBody>
-      </p:sp>
-      <p:sp>
-        <p:nvSpPr>
-          <p:cNvPr id="5" name="Rectangle 4"/>
-          <p:cNvSpPr/>
-          <p:nvPr/>
-        </p:nvSpPr>
-        <p:spPr>
-          <a:xfrm>
-            <a:off x="457200" y="1554480"/>
-            <a:ext cx="5501487" cy="4389120"/>
-          </a:xfrm>
-          <a:prstGeom prst="rect">
-            <a:avLst/>
-          </a:prstGeom>
-          <a:solidFill>
-            <a:srgbClr val="FFFFFF"/>
-          </a:solidFill>
-          <a:ln>
-            <a:solidFill>
-              <a:srgbClr val="DCE8DC"/>
-            </a:solidFill>
-          </a:ln>
-        </p:spPr>
-        <p:style>
-          <a:lnRef idx="1">
-            <a:schemeClr val="accent1"/>
-          </a:lnRef>
-          <a:fillRef idx="3">
-            <a:schemeClr val="accent1"/>
-          </a:fillRef>
-          <a:effectRef idx="2">
-            <a:schemeClr val="accent1"/>
-          </a:effectRef>
-          <a:fontRef idx="minor">
-            <a:schemeClr val="lt1"/>
-          </a:fontRef>
-        </p:style>
-        <p:txBody>
-          <a:bodyPr rtlCol="0" anchor="ctr"/>
-          <a:lstStyle/>
-          <a:p>
-            <a:pPr algn="ctr">
-              <a:defRPr>
-                <a:latin typeface="Roboto"/>
-              </a:defRPr>
-            </a:pPr>
-          </a:p>
-        </p:txBody>
-      </p:sp>
-      <p:sp>
-        <p:nvSpPr>
-          <p:cNvPr id="6" name="TextBox 5"/>
-          <p:cNvSpPr txBox="1"/>
-          <p:nvPr/>
-        </p:nvSpPr>
-        <p:spPr>
-          <a:xfrm>
-            <a:off x="685800" y="1691640"/>
-            <a:ext cx="5044287" cy="365760"/>
-          </a:xfrm>
-          <a:prstGeom prst="rect">
-            <a:avLst/>
-          </a:prstGeom>
-          <a:noFill/>
-        </p:spPr>
-        <p:txBody>
-          <a:bodyPr wrap="square">
-            <a:spAutoFit/>
-          </a:bodyPr>
-          <a:lstStyle/>
-          <a:p>
-            <a:pPr>
-              <a:defRPr>
-                <a:latin typeface="Roboto"/>
-              </a:defRPr>
-            </a:pPr>
-            <a:r>
-              <a:rPr sz="1100" b="1">
-                <a:solidFill>
-                  <a:srgbClr val="5F6F63"/>
-                </a:solidFill>
-                <a:latin typeface="Roboto"/>
-              </a:rPr>
-              <a:t>WHAT IT SHOWS</a:t>
-            </a:r>
-          </a:p>
-        </p:txBody>
-      </p:sp>
-      <p:sp>
-        <p:nvSpPr>
-          <p:cNvPr id="7" name="TextBox 6"/>
-          <p:cNvSpPr txBox="1"/>
-          <p:nvPr/>
-        </p:nvSpPr>
-        <p:spPr>
-          <a:xfrm>
-            <a:off x="685800" y="2103120"/>
-            <a:ext cx="5044287" cy="3749039"/>
-          </a:xfrm>
-          <a:prstGeom prst="rect">
-            <a:avLst/>
-          </a:prstGeom>
-          <a:noFill/>
-        </p:spPr>
-        <p:txBody>
-          <a:bodyPr wrap="square">
-            <a:spAutoFit/>
-          </a:bodyPr>
-          <a:lstStyle/>
-          <a:p>
-            <a:pPr>
-              <a:defRPr>
-                <a:latin typeface="Roboto"/>
-              </a:defRPr>
-            </a:pPr>
-            <a:r>
-              <a:rPr sz="1600" b="0">
-                <a:solidFill>
-                  <a:srgbClr val="25342A"/>
-                </a:solidFill>
-                <a:latin typeface="Roboto"/>
-              </a:rPr>
-              <a:t>Digital literacy cost $8,003 in full in November: $4,585 paid by the Philanthropic foundation grant, and $3,418 of shared costs no grant covers. It has spent 97.5% of its budget to date, with $80,255 left and 16 months to go.</a:t>
-            </a:r>
-          </a:p>
-        </p:txBody>
-      </p:sp>
-      <p:sp>
-        <p:nvSpPr>
-          <p:cNvPr id="8" name="Rectangle 7"/>
-          <p:cNvSpPr/>
-          <p:nvPr/>
-        </p:nvSpPr>
-        <p:spPr>
-          <a:xfrm>
-            <a:off x="6233007" y="1554480"/>
-            <a:ext cx="5501487" cy="4389120"/>
-          </a:xfrm>
-          <a:prstGeom prst="rect">
-            <a:avLst/>
-          </a:prstGeom>
-          <a:solidFill>
-            <a:srgbClr val="EEF5F0"/>
-          </a:solidFill>
-          <a:ln>
-            <a:solidFill>
-              <a:srgbClr val="DCE8DC"/>
-            </a:solidFill>
-          </a:ln>
-        </p:spPr>
-        <p:style>
-          <a:lnRef idx="1">
-            <a:schemeClr val="accent1"/>
-          </a:lnRef>
-          <a:fillRef idx="3">
-            <a:schemeClr val="accent1"/>
-          </a:fillRef>
-          <a:effectRef idx="2">
-            <a:schemeClr val="accent1"/>
-          </a:effectRef>
-          <a:fontRef idx="minor">
-            <a:schemeClr val="lt1"/>
-          </a:fontRef>
-        </p:style>
-        <p:txBody>
-          <a:bodyPr rtlCol="0" anchor="ctr"/>
-          <a:lstStyle/>
-          <a:p>
-            <a:pPr algn="ctr">
-              <a:defRPr>
-                <a:latin typeface="Roboto"/>
-              </a:defRPr>
-            </a:pPr>
-          </a:p>
-        </p:txBody>
-      </p:sp>
-      <p:sp>
-        <p:nvSpPr>
-          <p:cNvPr id="9" name="TextBox 8"/>
-          <p:cNvSpPr txBox="1"/>
-          <p:nvPr/>
-        </p:nvSpPr>
-        <p:spPr>
-          <a:xfrm>
-            <a:off x="6461607" y="1691640"/>
-            <a:ext cx="5044287" cy="365760"/>
-          </a:xfrm>
-          <a:prstGeom prst="rect">
-            <a:avLst/>
-          </a:prstGeom>
-          <a:noFill/>
-        </p:spPr>
-        <p:txBody>
-          <a:bodyPr wrap="square">
-            <a:spAutoFit/>
-          </a:bodyPr>
-          <a:lstStyle/>
-          <a:p>
-            <a:pPr>
-              <a:defRPr>
-                <a:latin typeface="Roboto"/>
-              </a:defRPr>
-            </a:pPr>
-            <a:r>
-              <a:rPr sz="1100" b="1">
-                <a:solidFill>
-                  <a:srgbClr val="5F6F63"/>
-                </a:solidFill>
-                <a:latin typeface="Roboto"/>
-              </a:rPr>
-              <a:t>WHAT YOU'D DO ABOUT IT</a:t>
-            </a:r>
-          </a:p>
-        </p:txBody>
-      </p:sp>
-      <p:sp>
-        <p:nvSpPr>
-          <p:cNvPr id="10" name="TextBox 9"/>
-          <p:cNvSpPr txBox="1"/>
-          <p:nvPr/>
-        </p:nvSpPr>
-        <p:spPr>
-          <a:xfrm>
-            <a:off x="6461607" y="2103120"/>
-            <a:ext cx="5044287" cy="3749039"/>
-          </a:xfrm>
-          <a:prstGeom prst="rect">
-            <a:avLst/>
-          </a:prstGeom>
-          <a:noFill/>
-        </p:spPr>
-        <p:txBody>
-          <a:bodyPr wrap="square">
-            <a:spAutoFit/>
-          </a:bodyPr>
-          <a:lstStyle/>
-          <a:p>
-            <a:pPr>
-              <a:defRPr>
-                <a:latin typeface="Roboto"/>
-              </a:defRPr>
-            </a:pPr>
-            <a:r>
-              <a:rPr sz="1600" b="0">
-                <a:solidFill>
-                  <a:srgbClr val="25342A"/>
-                </a:solidFill>
-                <a:latin typeface="Roboto"/>
-              </a:rPr>
-              <a:t>The full cost is $8,003 a month; $3,418 of it is shared cost the grant doesn't pay for. Worth asking for as much of it as the funder allows at renewal.</a:t>
-            </a:r>
-          </a:p>
-        </p:txBody>
-      </p:sp>
-      <p:sp>
-        <p:nvSpPr>
-          <p:cNvPr id="11" name="TextBox 10"/>
-          <p:cNvSpPr txBox="1"/>
-          <p:nvPr/>
-        </p:nvSpPr>
-        <p:spPr>
-          <a:xfrm>
-            <a:off x="457200" y="6492240"/>
-            <a:ext cx="3657600" cy="274320"/>
-          </a:xfrm>
-          <a:prstGeom prst="rect">
-            <a:avLst/>
-          </a:prstGeom>
-          <a:noFill/>
-        </p:spPr>
-        <p:txBody>
-          <a:bodyPr wrap="square">
-            <a:spAutoFit/>
-          </a:bodyPr>
-          <a:lstStyle/>
-          <a:p>
-            <a:pPr>
-              <a:defRPr>
-                <a:latin typeface="Roboto"/>
-              </a:defRPr>
-            </a:pPr>
-            <a:r>
-              <a:rPr sz="900" b="0">
-                <a:solidFill>
-                  <a:srgbClr val="5F6F63"/>
-                </a:solidFill>
-                <a:latin typeface="Roboto"/>
-              </a:rPr>
-              <a:t>program-cost.pptx</a:t>
-            </a:r>
-          </a:p>
-        </p:txBody>
-      </p:sp>
-      <p:sp>
-        <p:nvSpPr>
-          <p:cNvPr id="12" name="TextBox 11"/>
-          <p:cNvSpPr txBox="1"/>
-          <p:nvPr/>
-        </p:nvSpPr>
-        <p:spPr>
-          <a:xfrm>
-            <a:off x="4297680" y="6492240"/>
-            <a:ext cx="3657600" cy="274320"/>
-          </a:xfrm>
-          <a:prstGeom prst="rect">
-            <a:avLst/>
-          </a:prstGeom>
-          <a:noFill/>
-        </p:spPr>
-        <p:txBody>
-          <a:bodyPr wrap="square">
-            <a:spAutoFit/>
-          </a:bodyPr>
-          <a:lstStyle/>
-          <a:p>
-            <a:pPr algn="ctr">
-              <a:defRPr>
-                <a:latin typeface="Roboto"/>
-              </a:defRPr>
-            </a:pPr>
-            <a:r>
-              <a:rPr sz="900" b="0">
-                <a:solidFill>
-                  <a:srgbClr val="5F6F63"/>
-                </a:solidFill>
-                <a:latin typeface="Roboto"/>
-              </a:rPr>
-              <a:t>Data retrieved 2pm, Tue 6 Oct 2026 · Sample data</a:t>
-            </a:r>
-          </a:p>
-        </p:txBody>
-      </p:sp>
-      <p:sp>
-        <p:nvSpPr>
-          <p:cNvPr id="13" name="TextBox 12"/>
-          <p:cNvSpPr txBox="1"/>
-          <p:nvPr/>
-        </p:nvSpPr>
-        <p:spPr>
-          <a:xfrm>
-            <a:off x="8503920" y="6492240"/>
-            <a:ext cx="3200400" cy="274320"/>
-          </a:xfrm>
-          <a:prstGeom prst="rect">
-            <a:avLst/>
-          </a:prstGeom>
-          <a:noFill/>
-        </p:spPr>
-        <p:txBody>
-          <a:bodyPr wrap="square">
-            <a:spAutoFit/>
-          </a:bodyPr>
-          <a:lstStyle/>
-          <a:p>
-            <a:pPr algn="r">
-              <a:defRPr>
-                <a:latin typeface="Roboto"/>
-              </a:defRPr>
-            </a:pPr>
-            <a:r>
-              <a:rPr sz="900" b="0">
-                <a:solidFill>
-                  <a:srgbClr val="5F6F63"/>
-                </a:solidFill>
-                <a:latin typeface="Roboto"/>
-              </a:rPr>
-              <a:t>Slide 8 of 10</a:t>
-            </a:r>
-          </a:p>
-        </p:txBody>
-      </p:sp>
-    </p:spTree>
-  </p:cSld>
-  <p:clrMapOvr>
-    <a:masterClrMapping/>
-  </p:clrMapOvr>
-</p:sld>
-</file>
-
-<file path=ppt/slides/slide9.xml><?xml version="1.0" encoding="utf-8"?>
-<p:sld xmlns:a="http://schemas.openxmlformats.org/drawingml/2006/main" xmlns:p="http://schemas.openxmlformats.org/presentationml/2006/main" xmlns:r="http://schemas.openxmlformats.org/officeDocument/2006/relationships">
-  <p:cSld>
-    <p:spTree>
-      <p:nvGrpSpPr>
-        <p:cNvPr id="1" name=""/>
-        <p:cNvGrpSpPr/>
-        <p:nvPr/>
-      </p:nvGrpSpPr>
-      <p:grpSpPr/>
-      <p:sp>
-        <p:nvSpPr>
-          <p:cNvPr id="2" name="Rectangle 1"/>
-          <p:cNvSpPr/>
-          <p:nvPr/>
-        </p:nvSpPr>
-        <p:spPr>
-          <a:xfrm>
-            <a:off x="0" y="0"/>
-            <a:ext cx="12191695" cy="73152"/>
-          </a:xfrm>
-          <a:prstGeom prst="rect">
-            <a:avLst/>
-          </a:prstGeom>
-          <a:solidFill>
-            <a:srgbClr val="2F7A5D"/>
-          </a:solidFill>
-          <a:ln>
-            <a:noFill/>
-          </a:ln>
-        </p:spPr>
-        <p:style>
-          <a:lnRef idx="1">
-            <a:schemeClr val="accent1"/>
-          </a:lnRef>
-          <a:fillRef idx="3">
-            <a:schemeClr val="accent1"/>
-          </a:fillRef>
-          <a:effectRef idx="2">
-            <a:schemeClr val="accent1"/>
-          </a:effectRef>
-          <a:fontRef idx="minor">
-            <a:schemeClr val="lt1"/>
-          </a:fontRef>
-        </p:style>
-        <p:txBody>
-          <a:bodyPr rtlCol="0" anchor="ctr"/>
-          <a:lstStyle/>
-          <a:p>
-            <a:pPr algn="ctr">
-              <a:defRPr>
-                <a:latin typeface="Roboto"/>
-              </a:defRPr>
-            </a:pPr>
-          </a:p>
-        </p:txBody>
-      </p:sp>
-      <p:sp>
-        <p:nvSpPr>
-          <p:cNvPr id="3" name="TextBox 2"/>
-          <p:cNvSpPr txBox="1"/>
-          <p:nvPr/>
-        </p:nvSpPr>
-        <p:spPr>
-          <a:xfrm>
-            <a:off x="457200" y="164592"/>
-            <a:ext cx="7315200" cy="274320"/>
-          </a:xfrm>
-          <a:prstGeom prst="rect">
-            <a:avLst/>
-          </a:prstGeom>
-          <a:noFill/>
-        </p:spPr>
-        <p:txBody>
-          <a:bodyPr wrap="square">
-            <a:spAutoFit/>
-          </a:bodyPr>
-          <a:lstStyle/>
-          <a:p>
-            <a:pPr>
-              <a:defRPr>
-                <a:latin typeface="Roboto"/>
-              </a:defRPr>
-            </a:pPr>
-            <a:r>
-              <a:rPr sz="1000" b="0">
-                <a:solidFill>
-                  <a:srgbClr val="5F6F63"/>
-                </a:solidFill>
-                <a:latin typeface="Roboto"/>
-              </a:rPr>
-              <a:t>Sample Community Services Ltd · What does each program really cost?</a:t>
-            </a:r>
-          </a:p>
-        </p:txBody>
-      </p:sp>
-      <p:sp>
-        <p:nvSpPr>
-          <p:cNvPr id="4" name="TextBox 3"/>
-          <p:cNvSpPr txBox="1"/>
-          <p:nvPr/>
-        </p:nvSpPr>
-        <p:spPr>
-          <a:xfrm>
-            <a:off x="457200" y="411480"/>
-            <a:ext cx="11247120" cy="548640"/>
-          </a:xfrm>
-          <a:prstGeom prst="rect">
-            <a:avLst/>
-          </a:prstGeom>
-          <a:noFill/>
-        </p:spPr>
-        <p:txBody>
-          <a:bodyPr wrap="square">
-            <a:spAutoFit/>
-          </a:bodyPr>
-          <a:lstStyle/>
-          <a:p>
-            <a:pPr>
-              <a:defRPr>
-                <a:latin typeface="Roboto"/>
-              </a:defRPr>
-            </a:pPr>
-            <a:r>
-              <a:rPr sz="2400" b="1">
-                <a:solidFill>
-                  <a:srgbClr val="25342A"/>
-                </a:solidFill>
-                <a:latin typeface="Roboto"/>
-              </a:rPr>
-              <a:t>What it shows · Program: Community meals (2025-26)</a:t>
-            </a:r>
-          </a:p>
-        </p:txBody>
-      </p:sp>
-      <p:sp>
-        <p:nvSpPr>
-          <p:cNvPr id="5" name="Rectangle 4"/>
-          <p:cNvSpPr/>
-          <p:nvPr/>
-        </p:nvSpPr>
-        <p:spPr>
-          <a:xfrm>
-            <a:off x="457200" y="1554480"/>
-            <a:ext cx="5501487" cy="4389120"/>
-          </a:xfrm>
-          <a:prstGeom prst="rect">
-            <a:avLst/>
-          </a:prstGeom>
-          <a:solidFill>
-            <a:srgbClr val="FFFFFF"/>
-          </a:solidFill>
-          <a:ln>
-            <a:solidFill>
-              <a:srgbClr val="DCE8DC"/>
-            </a:solidFill>
-          </a:ln>
-        </p:spPr>
-        <p:style>
-          <a:lnRef idx="1">
-            <a:schemeClr val="accent1"/>
-          </a:lnRef>
-          <a:fillRef idx="3">
-            <a:schemeClr val="accent1"/>
-          </a:fillRef>
-          <a:effectRef idx="2">
-            <a:schemeClr val="accent1"/>
-          </a:effectRef>
-          <a:fontRef idx="minor">
-            <a:schemeClr val="lt1"/>
-          </a:fontRef>
-        </p:style>
-        <p:txBody>
-          <a:bodyPr rtlCol="0" anchor="ctr"/>
-          <a:lstStyle/>
-          <a:p>
-            <a:pPr algn="ctr">
-              <a:defRPr>
-                <a:latin typeface="Roboto"/>
-              </a:defRPr>
-            </a:pPr>
-          </a:p>
-        </p:txBody>
-      </p:sp>
-      <p:sp>
-        <p:nvSpPr>
-          <p:cNvPr id="6" name="TextBox 5"/>
-          <p:cNvSpPr txBox="1"/>
-          <p:nvPr/>
-        </p:nvSpPr>
-        <p:spPr>
-          <a:xfrm>
-            <a:off x="685800" y="1691640"/>
-            <a:ext cx="5044287" cy="365760"/>
-          </a:xfrm>
-          <a:prstGeom prst="rect">
-            <a:avLst/>
-          </a:prstGeom>
-          <a:noFill/>
-        </p:spPr>
-        <p:txBody>
-          <a:bodyPr wrap="square">
-            <a:spAutoFit/>
-          </a:bodyPr>
-          <a:lstStyle/>
-          <a:p>
-            <a:pPr>
-              <a:defRPr>
-                <a:latin typeface="Roboto"/>
-              </a:defRPr>
-            </a:pPr>
-            <a:r>
-              <a:rPr sz="1100" b="1">
-                <a:solidFill>
-                  <a:srgbClr val="5F6F63"/>
-                </a:solidFill>
-                <a:latin typeface="Roboto"/>
-              </a:rPr>
-              <a:t>WHAT IT SHOWS</a:t>
-            </a:r>
-          </a:p>
-        </p:txBody>
-      </p:sp>
-      <p:sp>
-        <p:nvSpPr>
-          <p:cNvPr id="7" name="TextBox 6"/>
-          <p:cNvSpPr txBox="1"/>
-          <p:nvPr/>
-        </p:nvSpPr>
-        <p:spPr>
-          <a:xfrm>
-            <a:off x="685800" y="2103120"/>
-            <a:ext cx="5044287" cy="3749039"/>
-          </a:xfrm>
-          <a:prstGeom prst="rect">
-            <a:avLst/>
-          </a:prstGeom>
-          <a:noFill/>
-        </p:spPr>
-        <p:txBody>
-          <a:bodyPr wrap="square">
-            <a:spAutoFit/>
-          </a:bodyPr>
-          <a:lstStyle/>
-          <a:p>
-            <a:pPr>
-              <a:defRPr>
-                <a:latin typeface="Roboto"/>
-              </a:defRPr>
-            </a:pPr>
-            <a:r>
-              <a:rPr sz="1600" b="0">
-                <a:solidFill>
-                  <a:srgbClr val="25342A"/>
-                </a:solidFill>
-                <a:latin typeface="Roboto"/>
-              </a:rPr>
-              <a:t>Community meals (2025-26) cost $5,411 in full in November: $3,100 paid by the Local council community grant grant, and $2,311 of shared costs no grant covers. It has spent 93.8% of its budget to date, with $26,800 left and 7 months to go.</a:t>
-            </a:r>
-          </a:p>
-        </p:txBody>
-      </p:sp>
-      <p:sp>
-        <p:nvSpPr>
-          <p:cNvPr id="8" name="Rectangle 7"/>
-          <p:cNvSpPr/>
-          <p:nvPr/>
-        </p:nvSpPr>
-        <p:spPr>
-          <a:xfrm>
-            <a:off x="6233007" y="1554480"/>
-            <a:ext cx="5501487" cy="4389120"/>
-          </a:xfrm>
-          <a:prstGeom prst="rect">
-            <a:avLst/>
-          </a:prstGeom>
-          <a:solidFill>
-            <a:srgbClr val="EEF5F0"/>
-          </a:solidFill>
-          <a:ln>
-            <a:solidFill>
-              <a:srgbClr val="DCE8DC"/>
-            </a:solidFill>
-          </a:ln>
-        </p:spPr>
-        <p:style>
-          <a:lnRef idx="1">
-            <a:schemeClr val="accent1"/>
-          </a:lnRef>
-          <a:fillRef idx="3">
-            <a:schemeClr val="accent1"/>
-          </a:fillRef>
-          <a:effectRef idx="2">
-            <a:schemeClr val="accent1"/>
-          </a:effectRef>
-          <a:fontRef idx="minor">
-            <a:schemeClr val="lt1"/>
-          </a:fontRef>
-        </p:style>
-        <p:txBody>
-          <a:bodyPr rtlCol="0" anchor="ctr"/>
-          <a:lstStyle/>
-          <a:p>
-            <a:pPr algn="ctr">
-              <a:defRPr>
-                <a:latin typeface="Roboto"/>
-              </a:defRPr>
-            </a:pPr>
-          </a:p>
-        </p:txBody>
-      </p:sp>
-      <p:sp>
-        <p:nvSpPr>
-          <p:cNvPr id="9" name="TextBox 8"/>
-          <p:cNvSpPr txBox="1"/>
-          <p:nvPr/>
-        </p:nvSpPr>
-        <p:spPr>
-          <a:xfrm>
-            <a:off x="6461607" y="1691640"/>
-            <a:ext cx="5044287" cy="365760"/>
-          </a:xfrm>
-          <a:prstGeom prst="rect">
-            <a:avLst/>
-          </a:prstGeom>
-          <a:noFill/>
-        </p:spPr>
-        <p:txBody>
-          <a:bodyPr wrap="square">
-            <a:spAutoFit/>
-          </a:bodyPr>
-          <a:lstStyle/>
-          <a:p>
-            <a:pPr>
-              <a:defRPr>
-                <a:latin typeface="Roboto"/>
-              </a:defRPr>
-            </a:pPr>
-            <a:r>
-              <a:rPr sz="1100" b="1">
-                <a:solidFill>
-                  <a:srgbClr val="5F6F63"/>
-                </a:solidFill>
-                <a:latin typeface="Roboto"/>
-              </a:rPr>
-              <a:t>WHAT YOU'D DO ABOUT IT</a:t>
-            </a:r>
-          </a:p>
-        </p:txBody>
-      </p:sp>
-      <p:sp>
-        <p:nvSpPr>
-          <p:cNvPr id="10" name="TextBox 9"/>
-          <p:cNvSpPr txBox="1"/>
-          <p:nvPr/>
-        </p:nvSpPr>
-        <p:spPr>
-          <a:xfrm>
-            <a:off x="6461607" y="2103120"/>
-            <a:ext cx="5044287" cy="3749039"/>
-          </a:xfrm>
-          <a:prstGeom prst="rect">
-            <a:avLst/>
-          </a:prstGeom>
-          <a:noFill/>
-        </p:spPr>
-        <p:txBody>
-          <a:bodyPr wrap="square">
-            <a:spAutoFit/>
-          </a:bodyPr>
-          <a:lstStyle/>
-          <a:p>
-            <a:pPr>
-              <a:defRPr>
-                <a:latin typeface="Roboto"/>
-              </a:defRPr>
-            </a:pPr>
-            <a:r>
-              <a:rPr sz="1600" b="0">
-                <a:solidFill>
-                  <a:srgbClr val="25342A"/>
-                </a:solidFill>
-                <a:latin typeface="Roboto"/>
-              </a:rPr>
-              <a:t>The full cost is $5,411 a month; $2,311 of it is shared cost the grant doesn't pay for. Worth asking for as much of it as the funder allows at renewal.</a:t>
-            </a:r>
-          </a:p>
-        </p:txBody>
-      </p:sp>
-      <p:sp>
-        <p:nvSpPr>
-          <p:cNvPr id="11" name="TextBox 10"/>
-          <p:cNvSpPr txBox="1"/>
-          <p:nvPr/>
-        </p:nvSpPr>
-        <p:spPr>
-          <a:xfrm>
-            <a:off x="457200" y="6492240"/>
-            <a:ext cx="3657600" cy="274320"/>
-          </a:xfrm>
-          <a:prstGeom prst="rect">
-            <a:avLst/>
-          </a:prstGeom>
-          <a:noFill/>
-        </p:spPr>
-        <p:txBody>
-          <a:bodyPr wrap="square">
-            <a:spAutoFit/>
-          </a:bodyPr>
-          <a:lstStyle/>
-          <a:p>
-            <a:pPr>
-              <a:defRPr>
-                <a:latin typeface="Roboto"/>
-              </a:defRPr>
-            </a:pPr>
-            <a:r>
-              <a:rPr sz="900" b="0">
-                <a:solidFill>
-                  <a:srgbClr val="5F6F63"/>
-                </a:solidFill>
-                <a:latin typeface="Roboto"/>
-              </a:rPr>
-              <a:t>program-cost.pptx</a:t>
-            </a:r>
-          </a:p>
-        </p:txBody>
-      </p:sp>
-      <p:sp>
-        <p:nvSpPr>
-          <p:cNvPr id="12" name="TextBox 11"/>
-          <p:cNvSpPr txBox="1"/>
-          <p:nvPr/>
-        </p:nvSpPr>
-        <p:spPr>
-          <a:xfrm>
-            <a:off x="4297680" y="6492240"/>
-            <a:ext cx="3657600" cy="274320"/>
-          </a:xfrm>
-          <a:prstGeom prst="rect">
-            <a:avLst/>
-          </a:prstGeom>
-          <a:noFill/>
-        </p:spPr>
-        <p:txBody>
-          <a:bodyPr wrap="square">
-            <a:spAutoFit/>
-          </a:bodyPr>
-          <a:lstStyle/>
-          <a:p>
-            <a:pPr algn="ctr">
-              <a:defRPr>
-                <a:latin typeface="Roboto"/>
-              </a:defRPr>
-            </a:pPr>
-            <a:r>
-              <a:rPr sz="900" b="0">
-                <a:solidFill>
-                  <a:srgbClr val="5F6F63"/>
-                </a:solidFill>
-                <a:latin typeface="Roboto"/>
-              </a:rPr>
-              <a:t>Data retrieved 2pm, Tue 6 Oct 2026 · Sample data</a:t>
-            </a:r>
-          </a:p>
-        </p:txBody>
-      </p:sp>
-      <p:sp>
-        <p:nvSpPr>
-          <p:cNvPr id="13" name="TextBox 12"/>
-          <p:cNvSpPr txBox="1"/>
-          <p:nvPr/>
-        </p:nvSpPr>
-        <p:spPr>
-          <a:xfrm>
-            <a:off x="8503920" y="6492240"/>
-            <a:ext cx="3200400" cy="274320"/>
-          </a:xfrm>
-          <a:prstGeom prst="rect">
-            <a:avLst/>
-          </a:prstGeom>
-          <a:noFill/>
-        </p:spPr>
-        <p:txBody>
-          <a:bodyPr wrap="square">
-            <a:spAutoFit/>
-          </a:bodyPr>
-          <a:lstStyle/>
-          <a:p>
-            <a:pPr algn="r">
-              <a:defRPr>
-                <a:latin typeface="Roboto"/>
-              </a:defRPr>
-            </a:pPr>
-            <a:r>
-              <a:rPr sz="900" b="0">
-                <a:solidFill>
-                  <a:srgbClr val="5F6F63"/>
-                </a:solidFill>
-                <a:latin typeface="Roboto"/>
-              </a:rPr>
-              <a:t>Slide 9 of 10</a:t>
+              <a:t>Slide 7 of 7</a:t>
             </a:r>
           </a:p>
         </p:txBody>
@@ -8152,6 +9282,326 @@
 </file>
 
 <file path=ppt/theme/theme1.xml><?xml version="1.0" encoding="utf-8"?>
+<a:theme xmlns:a="http://schemas.openxmlformats.org/drawingml/2006/main" name="Office Theme">
+  <a:themeElements>
+    <a:clrScheme name="Office">
+      <a:dk1>
+        <a:sysClr val="windowText" lastClr="000000"/>
+      </a:dk1>
+      <a:lt1>
+        <a:sysClr val="window" lastClr="FFFFFF"/>
+      </a:lt1>
+      <a:dk2>
+        <a:srgbClr val="25342A"/>
+      </a:dk2>
+      <a:lt2>
+        <a:srgbClr val="F4F7F2"/>
+      </a:lt2>
+      <a:accent1>
+        <a:srgbClr val="2F7A5D"/>
+      </a:accent1>
+      <a:accent2>
+        <a:srgbClr val="0E9F6E"/>
+      </a:accent2>
+      <a:accent3>
+        <a:srgbClr val="7D8790"/>
+      </a:accent3>
+      <a:accent4>
+        <a:srgbClr val="8A6D3B"/>
+      </a:accent4>
+      <a:accent5>
+        <a:srgbClr val="B42318"/>
+      </a:accent5>
+      <a:accent6>
+        <a:srgbClr val="8E9CAB"/>
+      </a:accent6>
+      <a:hlink>
+        <a:srgbClr val="0000FF"/>
+      </a:hlink>
+      <a:folHlink>
+        <a:srgbClr val="800080"/>
+      </a:folHlink>
+    </a:clrScheme>
+    <a:fontScheme name="Office">
+      <a:majorFont>
+        <a:latin typeface="Roboto"/>
+        <a:ea typeface=""/>
+        <a:cs typeface=""/>
+        <a:font script="Jpan" typeface="ＭＳ Ｐゴシック"/>
+        <a:font script="Hang" typeface="맑은 고딕"/>
+        <a:font script="Hans" typeface="宋体"/>
+        <a:font script="Hant" typeface="新細明體"/>
+        <a:font script="Arab" typeface="Times New Roman"/>
+        <a:font script="Hebr" typeface="Times New Roman"/>
+        <a:font script="Thai" typeface="Angsana New"/>
+        <a:font script="Ethi" typeface="Nyala"/>
+        <a:font script="Beng" typeface="Vrinda"/>
+        <a:font script="Gujr" typeface="Shruti"/>
+        <a:font script="Khmr" typeface="MoolBoran"/>
+        <a:font script="Knda" typeface="Tunga"/>
+        <a:font script="Guru" typeface="Raavi"/>
+        <a:font script="Cans" typeface="Euphemia"/>
+        <a:font script="Cher" typeface="Plantagenet Cherokee"/>
+        <a:font script="Yiii" typeface="Microsoft Yi Baiti"/>
+        <a:font script="Tibt" typeface="Microsoft Himalaya"/>
+        <a:font script="Thaa" typeface="MV Boli"/>
+        <a:font script="Deva" typeface="Mangal"/>
+        <a:font script="Telu" typeface="Gautami"/>
+        <a:font script="Taml" typeface="Latha"/>
+        <a:font script="Syrc" typeface="Estrangelo Edessa"/>
+        <a:font script="Orya" typeface="Kalinga"/>
+        <a:font script="Mlym" typeface="Kartika"/>
+        <a:font script="Laoo" typeface="DokChampa"/>
+        <a:font script="Sinh" typeface="Iskoola Pota"/>
+        <a:font script="Mong" typeface="Mongolian Baiti"/>
+        <a:font script="Viet" typeface="Times New Roman"/>
+        <a:font script="Uigh" typeface="Microsoft Uighur"/>
+        <a:font script="Geor" typeface="Sylfaen"/>
+      </a:majorFont>
+      <a:minorFont>
+        <a:latin typeface="Roboto"/>
+        <a:ea typeface=""/>
+        <a:cs typeface=""/>
+        <a:font script="Jpan" typeface="ＭＳ Ｐゴシック"/>
+        <a:font script="Hang" typeface="맑은 고딕"/>
+        <a:font script="Hans" typeface="宋体"/>
+        <a:font script="Hant" typeface="新細明體"/>
+        <a:font script="Arab" typeface="Arial"/>
+        <a:font script="Hebr" typeface="Arial"/>
+        <a:font script="Thai" typeface="Cordia New"/>
+        <a:font script="Ethi" typeface="Nyala"/>
+        <a:font script="Beng" typeface="Vrinda"/>
+        <a:font script="Gujr" typeface="Shruti"/>
+        <a:font script="Khmr" typeface="DaunPenh"/>
+        <a:font script="Knda" typeface="Tunga"/>
+        <a:font script="Guru" typeface="Raavi"/>
+        <a:font script="Cans" typeface="Euphemia"/>
+        <a:font script="Cher" typeface="Plantagenet Cherokee"/>
+        <a:font script="Yiii" typeface="Microsoft Yi Baiti"/>
+        <a:font script="Tibt" typeface="Microsoft Himalaya"/>
+        <a:font script="Thaa" typeface="MV Boli"/>
+        <a:font script="Deva" typeface="Mangal"/>
+        <a:font script="Telu" typeface="Gautami"/>
+        <a:font script="Taml" typeface="Latha"/>
+        <a:font script="Syrc" typeface="Estrangelo Edessa"/>
+        <a:font script="Orya" typeface="Kalinga"/>
+        <a:font script="Mlym" typeface="Kartika"/>
+        <a:font script="Laoo" typeface="DokChampa"/>
+        <a:font script="Sinh" typeface="Iskoola Pota"/>
+        <a:font script="Mong" typeface="Mongolian Baiti"/>
+        <a:font script="Viet" typeface="Arial"/>
+        <a:font script="Uigh" typeface="Microsoft Uighur"/>
+        <a:font script="Geor" typeface="Sylfaen"/>
+      </a:minorFont>
+    </a:fontScheme>
+    <a:fmtScheme name="Office">
+      <a:fillStyleLst>
+        <a:solidFill>
+          <a:schemeClr val="phClr"/>
+        </a:solidFill>
+        <a:gradFill rotWithShape="1">
+          <a:gsLst>
+            <a:gs pos="0">
+              <a:schemeClr val="phClr">
+                <a:tint val="50000"/>
+                <a:satMod val="300000"/>
+              </a:schemeClr>
+            </a:gs>
+            <a:gs pos="35000">
+              <a:schemeClr val="phClr">
+                <a:tint val="37000"/>
+                <a:satMod val="300000"/>
+              </a:schemeClr>
+            </a:gs>
+            <a:gs pos="100000">
+              <a:schemeClr val="phClr">
+                <a:tint val="15000"/>
+                <a:satMod val="350000"/>
+              </a:schemeClr>
+            </a:gs>
+          </a:gsLst>
+          <a:lin ang="16200000" scaled="1"/>
+        </a:gradFill>
+        <a:gradFill rotWithShape="1">
+          <a:gsLst>
+            <a:gs pos="0">
+              <a:schemeClr val="phClr">
+                <a:tint val="100000"/>
+                <a:shade val="100000"/>
+                <a:satMod val="130000"/>
+              </a:schemeClr>
+            </a:gs>
+            <a:gs pos="100000">
+              <a:schemeClr val="phClr">
+                <a:tint val="50000"/>
+                <a:shade val="100000"/>
+                <a:satMod val="350000"/>
+              </a:schemeClr>
+            </a:gs>
+          </a:gsLst>
+          <a:lin ang="16200000" scaled="0"/>
+        </a:gradFill>
+      </a:fillStyleLst>
+      <a:lnStyleLst>
+        <a:ln w="9525" cap="flat" cmpd="sng" algn="ctr">
+          <a:solidFill>
+            <a:schemeClr val="phClr">
+              <a:shade val="95000"/>
+              <a:satMod val="105000"/>
+            </a:schemeClr>
+          </a:solidFill>
+          <a:prstDash val="solid"/>
+        </a:ln>
+        <a:ln w="25400" cap="flat" cmpd="sng" algn="ctr">
+          <a:solidFill>
+            <a:schemeClr val="phClr"/>
+          </a:solidFill>
+          <a:prstDash val="solid"/>
+        </a:ln>
+        <a:ln w="38100" cap="flat" cmpd="sng" algn="ctr">
+          <a:solidFill>
+            <a:schemeClr val="phClr"/>
+          </a:solidFill>
+          <a:prstDash val="solid"/>
+        </a:ln>
+      </a:lnStyleLst>
+      <a:effectStyleLst>
+        <a:effectStyle>
+          <a:effectLst>
+            <a:outerShdw blurRad="40000" dist="20000" dir="5400000" rotWithShape="0">
+              <a:srgbClr val="000000">
+                <a:alpha val="38000"/>
+              </a:srgbClr>
+            </a:outerShdw>
+          </a:effectLst>
+        </a:effectStyle>
+        <a:effectStyle>
+          <a:effectLst>
+            <a:outerShdw blurRad="40000" dist="23000" dir="5400000" rotWithShape="0">
+              <a:srgbClr val="000000">
+                <a:alpha val="35000"/>
+              </a:srgbClr>
+            </a:outerShdw>
+          </a:effectLst>
+        </a:effectStyle>
+        <a:effectStyle>
+          <a:effectLst>
+            <a:outerShdw blurRad="40000" dist="23000" dir="5400000" rotWithShape="0">
+              <a:srgbClr val="000000">
+                <a:alpha val="35000"/>
+              </a:srgbClr>
+            </a:outerShdw>
+          </a:effectLst>
+          <a:scene3d>
+            <a:camera prst="orthographicFront">
+              <a:rot lat="0" lon="0" rev="0"/>
+            </a:camera>
+            <a:lightRig rig="threePt" dir="t">
+              <a:rot lat="0" lon="0" rev="1200000"/>
+            </a:lightRig>
+          </a:scene3d>
+          <a:sp3d>
+            <a:bevelT w="63500" h="25400"/>
+          </a:sp3d>
+        </a:effectStyle>
+      </a:effectStyleLst>
+      <a:bgFillStyleLst>
+        <a:solidFill>
+          <a:schemeClr val="phClr"/>
+        </a:solidFill>
+        <a:gradFill rotWithShape="1">
+          <a:gsLst>
+            <a:gs pos="0">
+              <a:schemeClr val="phClr">
+                <a:tint val="40000"/>
+                <a:satMod val="350000"/>
+              </a:schemeClr>
+            </a:gs>
+            <a:gs pos="40000">
+              <a:schemeClr val="phClr">
+                <a:tint val="45000"/>
+                <a:shade val="99000"/>
+                <a:satMod val="350000"/>
+              </a:schemeClr>
+            </a:gs>
+            <a:gs pos="100000">
+              <a:schemeClr val="phClr">
+                <a:shade val="20000"/>
+                <a:satMod val="255000"/>
+              </a:schemeClr>
+            </a:gs>
+          </a:gsLst>
+          <a:path path="circle">
+            <a:fillToRect l="50000" t="-80000" r="50000" b="180000"/>
+          </a:path>
+        </a:gradFill>
+        <a:gradFill rotWithShape="1">
+          <a:gsLst>
+            <a:gs pos="0">
+              <a:schemeClr val="phClr">
+                <a:tint val="80000"/>
+                <a:satMod val="300000"/>
+              </a:schemeClr>
+            </a:gs>
+            <a:gs pos="100000">
+              <a:schemeClr val="phClr">
+                <a:shade val="30000"/>
+                <a:satMod val="200000"/>
+              </a:schemeClr>
+            </a:gs>
+          </a:gsLst>
+          <a:path path="circle">
+            <a:fillToRect l="50000" t="50000" r="50000" b="50000"/>
+          </a:path>
+        </a:gradFill>
+      </a:bgFillStyleLst>
+    </a:fmtScheme>
+  </a:themeElements>
+  <a:objectDefaults>
+    <a:spDef>
+      <a:spPr/>
+      <a:bodyPr/>
+      <a:lstStyle/>
+      <a:style>
+        <a:lnRef idx="1">
+          <a:schemeClr val="accent1"/>
+        </a:lnRef>
+        <a:fillRef idx="3">
+          <a:schemeClr val="accent1"/>
+        </a:fillRef>
+        <a:effectRef idx="2">
+          <a:schemeClr val="accent1"/>
+        </a:effectRef>
+        <a:fontRef idx="minor">
+          <a:schemeClr val="lt1"/>
+        </a:fontRef>
+      </a:style>
+    </a:spDef>
+    <a:lnDef>
+      <a:spPr/>
+      <a:bodyPr/>
+      <a:lstStyle/>
+      <a:style>
+        <a:lnRef idx="2">
+          <a:schemeClr val="accent1"/>
+        </a:lnRef>
+        <a:fillRef idx="0">
+          <a:schemeClr val="accent1"/>
+        </a:fillRef>
+        <a:effectRef idx="1">
+          <a:schemeClr val="accent1"/>
+        </a:effectRef>
+        <a:fontRef idx="minor">
+          <a:schemeClr val="tx1"/>
+        </a:fontRef>
+      </a:style>
+    </a:lnDef>
+  </a:objectDefaults>
+  <a:extraClrSchemeLst/>
+</a:theme>
+</file>
+
+<file path=ppt/theme/theme2.xml><?xml version="1.0" encoding="utf-8"?>
 <a:theme xmlns:a="http://schemas.openxmlformats.org/drawingml/2006/main" name="Office Theme">
   <a:themeElements>
     <a:clrScheme name="Office">

--- a/media/exports/reports/2025-11/program-cost.pptx
+++ b/media/exports/reports/2025-11/program-cost.pptx
@@ -1980,7 +1980,7 @@
           <a:lstStyle/>
           <a:p>
             <a:r>
-              <a:t>What does each program really cost?. Sample Community Services Ltd. Period: November 2025. Each program's full cost: what its grant pays for, plus its fair share of the costs no single grant covers (untied program costs and administration, shared by grant spending). Pick a program and every chart and note follows it.</a:t>
+              <a:t>What does each program really cost?. Sample Community Services Ltd. Period: November 2025. In short: Housing support (2025) costs $52,362 in full in November: $22,362 more than its grant spending, once its share of shared costs is added. Each program's full cost: what its grant pays for, plus its fair share of the costs no single grant covers (untied program costs and administration, shared by grant spending). Pick a program and every chart and note follows it.</a:t>
             </a:r>
           </a:p>
         </p:txBody>
@@ -5625,7 +5625,7 @@
         <p:spPr>
           <a:xfrm>
             <a:off x="457200" y="3703320"/>
-            <a:ext cx="11277295" cy="535940"/>
+            <a:ext cx="11277295" cy="980440"/>
           </a:xfrm>
           <a:prstGeom prst="rect">
             <a:avLst/>
@@ -5650,7 +5650,7 @@
                 </a:solidFill>
                 <a:latin typeface="Roboto"/>
               </a:rPr>
-              <a:t>Period: November 2025. Each program's full cost: what its grant pays for, plus its fair share of the costs no single grant covers (untied program costs and administration, shared by grant spending). Pick a program and every chart and note follows it.</a:t>
+              <a:t>Period: November 2025. In short: Housing support (2025) costs $52,362 in full in November: $22,362 more than its grant spending, once its share of shared costs is added. Each program's full cost: what its grant pays for, plus its fair share of the costs no single grant covers (untied program costs and administration, shared by grant spending). Pick a program and every chart and note follows it.</a:t>
             </a:r>
           </a:p>
         </p:txBody>
@@ -5663,7 +5663,7 @@
         </p:nvSpPr>
         <p:spPr>
           <a:xfrm>
-            <a:off x="457200" y="4330700"/>
+            <a:off x="457200" y="4775200"/>
             <a:ext cx="11277295" cy="1097280"/>
           </a:xfrm>
           <a:prstGeom prst="rect">
@@ -5815,7 +5815,7 @@
                 </a:solidFill>
                 <a:latin typeface="Roboto"/>
               </a:rPr>
-              <a:t>Data retrieved 2pm, Tue 6 Oct 2026 · Generated 8 Oct 2026, 9:35am · Sample data · Made with Python (python-pptx)</a:t>
+              <a:t>Data retrieved 2pm, Tue 6 Oct 2026 · Generated 10 Oct 2026, 9:55pm · Sample data · Made with Python (python-pptx)</a:t>
             </a:r>
           </a:p>
         </p:txBody>
@@ -6384,7 +6384,7 @@
                 </a:solidFill>
                 <a:latin typeface="Roboto"/>
               </a:rPr>
-              <a:t>Data retrieved 2pm, Tue 6 Oct 2026 · Generated 8 Oct 2026, 9:35am · Sample data · Made with Python (python-pptx)</a:t>
+              <a:t>Data retrieved 2pm, Tue 6 Oct 2026 · Generated 10 Oct 2026, 9:55pm · Sample data · Made with Python (python-pptx)</a:t>
             </a:r>
           </a:p>
         </p:txBody>
@@ -6953,7 +6953,7 @@
                 </a:solidFill>
                 <a:latin typeface="Roboto"/>
               </a:rPr>
-              <a:t>Data retrieved 2pm, Tue 6 Oct 2026 · Generated 8 Oct 2026, 9:35am · Sample data · Made with Python (python-pptx)</a:t>
+              <a:t>Data retrieved 2pm, Tue 6 Oct 2026 · Generated 10 Oct 2026, 9:55pm · Sample data · Made with Python (python-pptx)</a:t>
             </a:r>
           </a:p>
         </p:txBody>
@@ -7522,7 +7522,7 @@
                 </a:solidFill>
                 <a:latin typeface="Roboto"/>
               </a:rPr>
-              <a:t>Data retrieved 2pm, Tue 6 Oct 2026 · Generated 8 Oct 2026, 9:35am · Sample data · Made with Python (python-pptx)</a:t>
+              <a:t>Data retrieved 2pm, Tue 6 Oct 2026 · Generated 10 Oct 2026, 9:55pm · Sample data · Made with Python (python-pptx)</a:t>
             </a:r>
           </a:p>
         </p:txBody>
@@ -8091,7 +8091,7 @@
                 </a:solidFill>
                 <a:latin typeface="Roboto"/>
               </a:rPr>
-              <a:t>Data retrieved 2pm, Tue 6 Oct 2026 · Generated 8 Oct 2026, 9:35am · Sample data · Made with Python (python-pptx)</a:t>
+              <a:t>Data retrieved 2pm, Tue 6 Oct 2026 · Generated 10 Oct 2026, 9:55pm · Sample data · Made with Python (python-pptx)</a:t>
             </a:r>
           </a:p>
         </p:txBody>
@@ -8660,7 +8660,7 @@
                 </a:solidFill>
                 <a:latin typeface="Roboto"/>
               </a:rPr>
-              <a:t>Data retrieved 2pm, Tue 6 Oct 2026 · Generated 8 Oct 2026, 9:35am · Sample data · Made with Python (python-pptx)</a:t>
+              <a:t>Data retrieved 2pm, Tue 6 Oct 2026 · Generated 10 Oct 2026, 9:55pm · Sample data · Made with Python (python-pptx)</a:t>
             </a:r>
           </a:p>
         </p:txBody>
@@ -9229,7 +9229,7 @@
                 </a:solidFill>
                 <a:latin typeface="Roboto"/>
               </a:rPr>
-              <a:t>Data retrieved 2pm, Tue 6 Oct 2026 · Generated 8 Oct 2026, 9:35am · Sample data · Made with Python (python-pptx)</a:t>
+              <a:t>Data retrieved 2pm, Tue 6 Oct 2026 · Generated 10 Oct 2026, 9:55pm · Sample data · Made with Python (python-pptx)</a:t>
             </a:r>
           </a:p>
         </p:txBody>
